--- a/tutorial/一种基于Rust语言的操作系统内核服务可靠性增强设计与实现.pptx
+++ b/tutorial/一种基于Rust语言的操作系统内核服务可靠性增强设计与实现.pptx
@@ -14,34 +14,27 @@
     <p:sldId id="299" r:id="rId7"/>
     <p:sldId id="301" r:id="rId8"/>
     <p:sldId id="259" r:id="rId9"/>
-    <p:sldId id="298" r:id="rId10"/>
-    <p:sldId id="260" r:id="rId11"/>
+    <p:sldId id="362" r:id="rId10"/>
+    <p:sldId id="363" r:id="rId11"/>
     <p:sldId id="300" r:id="rId12"/>
-    <p:sldId id="302" r:id="rId13"/>
-    <p:sldId id="303" r:id="rId14"/>
-    <p:sldId id="304" r:id="rId15"/>
-    <p:sldId id="325" r:id="rId16"/>
-    <p:sldId id="261" r:id="rId17"/>
-    <p:sldId id="327" r:id="rId18"/>
-    <p:sldId id="326" r:id="rId19"/>
-    <p:sldId id="328" r:id="rId20"/>
-    <p:sldId id="262" r:id="rId21"/>
-    <p:sldId id="346" r:id="rId22"/>
-    <p:sldId id="264" r:id="rId23"/>
-    <p:sldId id="265" r:id="rId24"/>
-    <p:sldId id="269" r:id="rId25"/>
-    <p:sldId id="266" r:id="rId26"/>
-    <p:sldId id="267" r:id="rId27"/>
-    <p:sldId id="268" r:id="rId28"/>
-    <p:sldId id="331" r:id="rId29"/>
-    <p:sldId id="270" r:id="rId30"/>
-    <p:sldId id="271" r:id="rId31"/>
-    <p:sldId id="292" r:id="rId32"/>
-    <p:sldId id="272" r:id="rId33"/>
-    <p:sldId id="273" r:id="rId34"/>
-    <p:sldId id="274" r:id="rId35"/>
-    <p:sldId id="275" r:id="rId36"/>
-    <p:sldId id="276" r:id="rId37"/>
+    <p:sldId id="327" r:id="rId13"/>
+    <p:sldId id="326" r:id="rId14"/>
+    <p:sldId id="364" r:id="rId15"/>
+    <p:sldId id="262" r:id="rId16"/>
+    <p:sldId id="346" r:id="rId17"/>
+    <p:sldId id="264" r:id="rId18"/>
+    <p:sldId id="265" r:id="rId19"/>
+    <p:sldId id="365" r:id="rId20"/>
+    <p:sldId id="269" r:id="rId21"/>
+    <p:sldId id="266" r:id="rId22"/>
+    <p:sldId id="267" r:id="rId23"/>
+    <p:sldId id="270" r:id="rId24"/>
+    <p:sldId id="271" r:id="rId25"/>
+    <p:sldId id="292" r:id="rId26"/>
+    <p:sldId id="272" r:id="rId27"/>
+    <p:sldId id="274" r:id="rId28"/>
+    <p:sldId id="366" r:id="rId29"/>
+    <p:sldId id="276" r:id="rId30"/>
   </p:sldIdLst>
   <p:sldSz cx="9144000" cy="5143500"/>
   <p:notesSz cx="5143500" cy="9144000"/>
@@ -2047,553 +2040,7 @@
 </p:notes>
 </file>
 
-<file path=ppt/notesSlides/notesSlide28.xml><?xml version="1.0" encoding="utf-8"?>
-<p:notes xmlns:a="http://schemas.openxmlformats.org/drawingml/2006/main" xmlns:r="http://schemas.openxmlformats.org/officeDocument/2006/relationships" xmlns:p="http://schemas.openxmlformats.org/presentationml/2006/main">
-  <p:cSld>
-    <p:spTree>
-      <p:nvGrpSpPr>
-        <p:cNvPr id="1" name=""/>
-        <p:cNvGrpSpPr/>
-        <p:nvPr/>
-      </p:nvGrpSpPr>
-      <p:grpSpPr>
-        <a:xfrm>
-          <a:off x="0" y="0"/>
-          <a:ext cx="0" cy="0"/>
-          <a:chOff x="0" y="0"/>
-          <a:chExt cx="0" cy="0"/>
-        </a:xfrm>
-      </p:grpSpPr>
-      <p:sp>
-        <p:nvSpPr>
-          <p:cNvPr id="2" name="Slide Image Placeholder 1"/>
-          <p:cNvSpPr>
-            <a:spLocks noGrp="1" noRot="1" noChangeAspect="1"/>
-          </p:cNvSpPr>
-          <p:nvPr>
-            <p:ph type="sldImg"/>
-          </p:nvPr>
-        </p:nvSpPr>
-        <p:spPr/>
-      </p:sp>
-      <p:sp>
-        <p:nvSpPr>
-          <p:cNvPr id="3" name="Notes Placeholder 2"/>
-          <p:cNvSpPr>
-            <a:spLocks noGrp="1"/>
-          </p:cNvSpPr>
-          <p:nvPr>
-            <p:ph type="body" idx="1"/>
-          </p:nvPr>
-        </p:nvSpPr>
-        <p:spPr/>
-        <p:txBody>
-          <a:bodyPr/>
-          <a:lstStyle/>
-          <a:p>
-            <a:endParaRPr lang="en-US" dirty="0"/>
-          </a:p>
-        </p:txBody>
-      </p:sp>
-      <p:sp>
-        <p:nvSpPr>
-          <p:cNvPr id="4" name="Slide Number Placeholder 3"/>
-          <p:cNvSpPr>
-            <a:spLocks noGrp="1"/>
-          </p:cNvSpPr>
-          <p:nvPr>
-            <p:ph type="sldNum" sz="quarter" idx="10"/>
-          </p:nvPr>
-        </p:nvSpPr>
-        <p:spPr/>
-        <p:txBody>
-          <a:bodyPr/>
-          <a:lstStyle/>
-          <a:p>
-            <a:fld id="{F7021451-1387-4CA6-816F-3879F97B5CBC}" type="slidenum">
-              <a:rPr lang="en-US"/>
-            </a:fld>
-            <a:endParaRPr lang="en-US"/>
-          </a:p>
-        </p:txBody>
-      </p:sp>
-    </p:spTree>
-  </p:cSld>
-  <p:clrMapOvr>
-    <a:masterClrMapping/>
-  </p:clrMapOvr>
-</p:notes>
-</file>
-
-<file path=ppt/notesSlides/notesSlide29.xml><?xml version="1.0" encoding="utf-8"?>
-<p:notes xmlns:a="http://schemas.openxmlformats.org/drawingml/2006/main" xmlns:r="http://schemas.openxmlformats.org/officeDocument/2006/relationships" xmlns:p="http://schemas.openxmlformats.org/presentationml/2006/main">
-  <p:cSld>
-    <p:spTree>
-      <p:nvGrpSpPr>
-        <p:cNvPr id="1" name=""/>
-        <p:cNvGrpSpPr/>
-        <p:nvPr/>
-      </p:nvGrpSpPr>
-      <p:grpSpPr>
-        <a:xfrm>
-          <a:off x="0" y="0"/>
-          <a:ext cx="0" cy="0"/>
-          <a:chOff x="0" y="0"/>
-          <a:chExt cx="0" cy="0"/>
-        </a:xfrm>
-      </p:grpSpPr>
-      <p:sp>
-        <p:nvSpPr>
-          <p:cNvPr id="2" name="Slide Image Placeholder 1"/>
-          <p:cNvSpPr>
-            <a:spLocks noGrp="1" noRot="1" noChangeAspect="1"/>
-          </p:cNvSpPr>
-          <p:nvPr>
-            <p:ph type="sldImg"/>
-          </p:nvPr>
-        </p:nvSpPr>
-        <p:spPr/>
-      </p:sp>
-      <p:sp>
-        <p:nvSpPr>
-          <p:cNvPr id="3" name="Notes Placeholder 2"/>
-          <p:cNvSpPr>
-            <a:spLocks noGrp="1"/>
-          </p:cNvSpPr>
-          <p:nvPr>
-            <p:ph type="body" idx="1"/>
-          </p:nvPr>
-        </p:nvSpPr>
-        <p:spPr/>
-        <p:txBody>
-          <a:bodyPr/>
-          <a:lstStyle/>
-          <a:p>
-            <a:endParaRPr lang="en-US" dirty="0"/>
-          </a:p>
-        </p:txBody>
-      </p:sp>
-      <p:sp>
-        <p:nvSpPr>
-          <p:cNvPr id="4" name="Slide Number Placeholder 3"/>
-          <p:cNvSpPr>
-            <a:spLocks noGrp="1"/>
-          </p:cNvSpPr>
-          <p:nvPr>
-            <p:ph type="sldNum" sz="quarter" idx="10"/>
-          </p:nvPr>
-        </p:nvSpPr>
-        <p:spPr/>
-        <p:txBody>
-          <a:bodyPr/>
-          <a:lstStyle/>
-          <a:p>
-            <a:fld id="{F7021451-1387-4CA6-816F-3879F97B5CBC}" type="slidenum">
-              <a:rPr lang="en-US"/>
-            </a:fld>
-            <a:endParaRPr lang="en-US"/>
-          </a:p>
-        </p:txBody>
-      </p:sp>
-    </p:spTree>
-  </p:cSld>
-  <p:clrMapOvr>
-    <a:masterClrMapping/>
-  </p:clrMapOvr>
-</p:notes>
-</file>
-
 <file path=ppt/notesSlides/notesSlide3.xml><?xml version="1.0" encoding="utf-8"?>
-<p:notes xmlns:a="http://schemas.openxmlformats.org/drawingml/2006/main" xmlns:r="http://schemas.openxmlformats.org/officeDocument/2006/relationships" xmlns:p="http://schemas.openxmlformats.org/presentationml/2006/main">
-  <p:cSld>
-    <p:spTree>
-      <p:nvGrpSpPr>
-        <p:cNvPr id="1" name=""/>
-        <p:cNvGrpSpPr/>
-        <p:nvPr/>
-      </p:nvGrpSpPr>
-      <p:grpSpPr>
-        <a:xfrm>
-          <a:off x="0" y="0"/>
-          <a:ext cx="0" cy="0"/>
-          <a:chOff x="0" y="0"/>
-          <a:chExt cx="0" cy="0"/>
-        </a:xfrm>
-      </p:grpSpPr>
-      <p:sp>
-        <p:nvSpPr>
-          <p:cNvPr id="2" name="Slide Image Placeholder 1"/>
-          <p:cNvSpPr>
-            <a:spLocks noGrp="1" noRot="1" noChangeAspect="1"/>
-          </p:cNvSpPr>
-          <p:nvPr>
-            <p:ph type="sldImg"/>
-          </p:nvPr>
-        </p:nvSpPr>
-        <p:spPr/>
-      </p:sp>
-      <p:sp>
-        <p:nvSpPr>
-          <p:cNvPr id="3" name="Notes Placeholder 2"/>
-          <p:cNvSpPr>
-            <a:spLocks noGrp="1"/>
-          </p:cNvSpPr>
-          <p:nvPr>
-            <p:ph type="body" idx="1"/>
-          </p:nvPr>
-        </p:nvSpPr>
-        <p:spPr/>
-        <p:txBody>
-          <a:bodyPr/>
-          <a:lstStyle/>
-          <a:p>
-            <a:endParaRPr lang="en-US" dirty="0"/>
-          </a:p>
-        </p:txBody>
-      </p:sp>
-      <p:sp>
-        <p:nvSpPr>
-          <p:cNvPr id="4" name="Slide Number Placeholder 3"/>
-          <p:cNvSpPr>
-            <a:spLocks noGrp="1"/>
-          </p:cNvSpPr>
-          <p:nvPr>
-            <p:ph type="sldNum" sz="quarter" idx="10"/>
-          </p:nvPr>
-        </p:nvSpPr>
-        <p:spPr/>
-        <p:txBody>
-          <a:bodyPr/>
-          <a:lstStyle/>
-          <a:p>
-            <a:fld id="{F7021451-1387-4CA6-816F-3879F97B5CBC}" type="slidenum">
-              <a:rPr lang="en-US"/>
-            </a:fld>
-            <a:endParaRPr lang="en-US"/>
-          </a:p>
-        </p:txBody>
-      </p:sp>
-    </p:spTree>
-  </p:cSld>
-  <p:clrMapOvr>
-    <a:masterClrMapping/>
-  </p:clrMapOvr>
-</p:notes>
-</file>
-
-<file path=ppt/notesSlides/notesSlide30.xml><?xml version="1.0" encoding="utf-8"?>
-<p:notes xmlns:a="http://schemas.openxmlformats.org/drawingml/2006/main" xmlns:r="http://schemas.openxmlformats.org/officeDocument/2006/relationships" xmlns:p="http://schemas.openxmlformats.org/presentationml/2006/main">
-  <p:cSld>
-    <p:spTree>
-      <p:nvGrpSpPr>
-        <p:cNvPr id="1" name=""/>
-        <p:cNvGrpSpPr/>
-        <p:nvPr/>
-      </p:nvGrpSpPr>
-      <p:grpSpPr>
-        <a:xfrm>
-          <a:off x="0" y="0"/>
-          <a:ext cx="0" cy="0"/>
-          <a:chOff x="0" y="0"/>
-          <a:chExt cx="0" cy="0"/>
-        </a:xfrm>
-      </p:grpSpPr>
-      <p:sp>
-        <p:nvSpPr>
-          <p:cNvPr id="2" name="Slide Image Placeholder 1"/>
-          <p:cNvSpPr>
-            <a:spLocks noGrp="1" noRot="1" noChangeAspect="1"/>
-          </p:cNvSpPr>
-          <p:nvPr>
-            <p:ph type="sldImg"/>
-          </p:nvPr>
-        </p:nvSpPr>
-        <p:spPr/>
-      </p:sp>
-      <p:sp>
-        <p:nvSpPr>
-          <p:cNvPr id="3" name="Notes Placeholder 2"/>
-          <p:cNvSpPr>
-            <a:spLocks noGrp="1"/>
-          </p:cNvSpPr>
-          <p:nvPr>
-            <p:ph type="body" idx="1"/>
-          </p:nvPr>
-        </p:nvSpPr>
-        <p:spPr/>
-        <p:txBody>
-          <a:bodyPr/>
-          <a:lstStyle/>
-          <a:p>
-            <a:endParaRPr lang="en-US" dirty="0"/>
-          </a:p>
-        </p:txBody>
-      </p:sp>
-      <p:sp>
-        <p:nvSpPr>
-          <p:cNvPr id="4" name="Slide Number Placeholder 3"/>
-          <p:cNvSpPr>
-            <a:spLocks noGrp="1"/>
-          </p:cNvSpPr>
-          <p:nvPr>
-            <p:ph type="sldNum" sz="quarter" idx="10"/>
-          </p:nvPr>
-        </p:nvSpPr>
-        <p:spPr/>
-        <p:txBody>
-          <a:bodyPr/>
-          <a:lstStyle/>
-          <a:p>
-            <a:fld id="{F7021451-1387-4CA6-816F-3879F97B5CBC}" type="slidenum">
-              <a:rPr lang="en-US"/>
-            </a:fld>
-            <a:endParaRPr lang="en-US"/>
-          </a:p>
-        </p:txBody>
-      </p:sp>
-    </p:spTree>
-  </p:cSld>
-  <p:clrMapOvr>
-    <a:masterClrMapping/>
-  </p:clrMapOvr>
-</p:notes>
-</file>
-
-<file path=ppt/notesSlides/notesSlide31.xml><?xml version="1.0" encoding="utf-8"?>
-<p:notes xmlns:a="http://schemas.openxmlformats.org/drawingml/2006/main" xmlns:r="http://schemas.openxmlformats.org/officeDocument/2006/relationships" xmlns:p="http://schemas.openxmlformats.org/presentationml/2006/main">
-  <p:cSld>
-    <p:spTree>
-      <p:nvGrpSpPr>
-        <p:cNvPr id="1" name=""/>
-        <p:cNvGrpSpPr/>
-        <p:nvPr/>
-      </p:nvGrpSpPr>
-      <p:grpSpPr>
-        <a:xfrm>
-          <a:off x="0" y="0"/>
-          <a:ext cx="0" cy="0"/>
-          <a:chOff x="0" y="0"/>
-          <a:chExt cx="0" cy="0"/>
-        </a:xfrm>
-      </p:grpSpPr>
-      <p:sp>
-        <p:nvSpPr>
-          <p:cNvPr id="2" name="Slide Image Placeholder 1"/>
-          <p:cNvSpPr>
-            <a:spLocks noGrp="1" noRot="1" noChangeAspect="1"/>
-          </p:cNvSpPr>
-          <p:nvPr>
-            <p:ph type="sldImg"/>
-          </p:nvPr>
-        </p:nvSpPr>
-        <p:spPr/>
-      </p:sp>
-      <p:sp>
-        <p:nvSpPr>
-          <p:cNvPr id="3" name="Notes Placeholder 2"/>
-          <p:cNvSpPr>
-            <a:spLocks noGrp="1"/>
-          </p:cNvSpPr>
-          <p:nvPr>
-            <p:ph type="body" idx="1"/>
-          </p:nvPr>
-        </p:nvSpPr>
-        <p:spPr/>
-        <p:txBody>
-          <a:bodyPr/>
-          <a:lstStyle/>
-          <a:p>
-            <a:endParaRPr lang="en-US" dirty="0"/>
-          </a:p>
-        </p:txBody>
-      </p:sp>
-      <p:sp>
-        <p:nvSpPr>
-          <p:cNvPr id="4" name="Slide Number Placeholder 3"/>
-          <p:cNvSpPr>
-            <a:spLocks noGrp="1"/>
-          </p:cNvSpPr>
-          <p:nvPr>
-            <p:ph type="sldNum" sz="quarter" idx="10"/>
-          </p:nvPr>
-        </p:nvSpPr>
-        <p:spPr/>
-        <p:txBody>
-          <a:bodyPr/>
-          <a:lstStyle/>
-          <a:p>
-            <a:fld id="{F7021451-1387-4CA6-816F-3879F97B5CBC}" type="slidenum">
-              <a:rPr lang="en-US"/>
-            </a:fld>
-            <a:endParaRPr lang="en-US"/>
-          </a:p>
-        </p:txBody>
-      </p:sp>
-    </p:spTree>
-  </p:cSld>
-  <p:clrMapOvr>
-    <a:masterClrMapping/>
-  </p:clrMapOvr>
-</p:notes>
-</file>
-
-<file path=ppt/notesSlides/notesSlide32.xml><?xml version="1.0" encoding="utf-8"?>
-<p:notes xmlns:a="http://schemas.openxmlformats.org/drawingml/2006/main" xmlns:r="http://schemas.openxmlformats.org/officeDocument/2006/relationships" xmlns:p="http://schemas.openxmlformats.org/presentationml/2006/main">
-  <p:cSld>
-    <p:spTree>
-      <p:nvGrpSpPr>
-        <p:cNvPr id="1" name=""/>
-        <p:cNvGrpSpPr/>
-        <p:nvPr/>
-      </p:nvGrpSpPr>
-      <p:grpSpPr>
-        <a:xfrm>
-          <a:off x="0" y="0"/>
-          <a:ext cx="0" cy="0"/>
-          <a:chOff x="0" y="0"/>
-          <a:chExt cx="0" cy="0"/>
-        </a:xfrm>
-      </p:grpSpPr>
-      <p:sp>
-        <p:nvSpPr>
-          <p:cNvPr id="2" name="Slide Image Placeholder 1"/>
-          <p:cNvSpPr>
-            <a:spLocks noGrp="1" noRot="1" noChangeAspect="1"/>
-          </p:cNvSpPr>
-          <p:nvPr>
-            <p:ph type="sldImg"/>
-          </p:nvPr>
-        </p:nvSpPr>
-        <p:spPr/>
-      </p:sp>
-      <p:sp>
-        <p:nvSpPr>
-          <p:cNvPr id="3" name="Notes Placeholder 2"/>
-          <p:cNvSpPr>
-            <a:spLocks noGrp="1"/>
-          </p:cNvSpPr>
-          <p:nvPr>
-            <p:ph type="body" idx="1"/>
-          </p:nvPr>
-        </p:nvSpPr>
-        <p:spPr/>
-        <p:txBody>
-          <a:bodyPr/>
-          <a:lstStyle/>
-          <a:p>
-            <a:endParaRPr lang="en-US" dirty="0"/>
-          </a:p>
-        </p:txBody>
-      </p:sp>
-      <p:sp>
-        <p:nvSpPr>
-          <p:cNvPr id="4" name="Slide Number Placeholder 3"/>
-          <p:cNvSpPr>
-            <a:spLocks noGrp="1"/>
-          </p:cNvSpPr>
-          <p:nvPr>
-            <p:ph type="sldNum" sz="quarter" idx="10"/>
-          </p:nvPr>
-        </p:nvSpPr>
-        <p:spPr/>
-        <p:txBody>
-          <a:bodyPr/>
-          <a:lstStyle/>
-          <a:p>
-            <a:fld id="{F7021451-1387-4CA6-816F-3879F97B5CBC}" type="slidenum">
-              <a:rPr lang="en-US"/>
-            </a:fld>
-            <a:endParaRPr lang="en-US"/>
-          </a:p>
-        </p:txBody>
-      </p:sp>
-    </p:spTree>
-  </p:cSld>
-  <p:clrMapOvr>
-    <a:masterClrMapping/>
-  </p:clrMapOvr>
-</p:notes>
-</file>
-
-<file path=ppt/notesSlides/notesSlide33.xml><?xml version="1.0" encoding="utf-8"?>
-<p:notes xmlns:a="http://schemas.openxmlformats.org/drawingml/2006/main" xmlns:r="http://schemas.openxmlformats.org/officeDocument/2006/relationships" xmlns:p="http://schemas.openxmlformats.org/presentationml/2006/main">
-  <p:cSld>
-    <p:spTree>
-      <p:nvGrpSpPr>
-        <p:cNvPr id="1" name=""/>
-        <p:cNvGrpSpPr/>
-        <p:nvPr/>
-      </p:nvGrpSpPr>
-      <p:grpSpPr>
-        <a:xfrm>
-          <a:off x="0" y="0"/>
-          <a:ext cx="0" cy="0"/>
-          <a:chOff x="0" y="0"/>
-          <a:chExt cx="0" cy="0"/>
-        </a:xfrm>
-      </p:grpSpPr>
-      <p:sp>
-        <p:nvSpPr>
-          <p:cNvPr id="2" name="Slide Image Placeholder 1"/>
-          <p:cNvSpPr>
-            <a:spLocks noGrp="1" noRot="1" noChangeAspect="1"/>
-          </p:cNvSpPr>
-          <p:nvPr>
-            <p:ph type="sldImg"/>
-          </p:nvPr>
-        </p:nvSpPr>
-        <p:spPr/>
-      </p:sp>
-      <p:sp>
-        <p:nvSpPr>
-          <p:cNvPr id="3" name="Notes Placeholder 2"/>
-          <p:cNvSpPr>
-            <a:spLocks noGrp="1"/>
-          </p:cNvSpPr>
-          <p:nvPr>
-            <p:ph type="body" idx="1"/>
-          </p:nvPr>
-        </p:nvSpPr>
-        <p:spPr/>
-        <p:txBody>
-          <a:bodyPr/>
-          <a:lstStyle/>
-          <a:p>
-            <a:endParaRPr lang="en-US" dirty="0"/>
-          </a:p>
-        </p:txBody>
-      </p:sp>
-      <p:sp>
-        <p:nvSpPr>
-          <p:cNvPr id="4" name="Slide Number Placeholder 3"/>
-          <p:cNvSpPr>
-            <a:spLocks noGrp="1"/>
-          </p:cNvSpPr>
-          <p:nvPr>
-            <p:ph type="sldNum" sz="quarter" idx="10"/>
-          </p:nvPr>
-        </p:nvSpPr>
-        <p:spPr/>
-        <p:txBody>
-          <a:bodyPr/>
-          <a:lstStyle/>
-          <a:p>
-            <a:fld id="{F7021451-1387-4CA6-816F-3879F97B5CBC}" type="slidenum">
-              <a:rPr lang="en-US"/>
-            </a:fld>
-            <a:endParaRPr lang="en-US"/>
-          </a:p>
-        </p:txBody>
-      </p:sp>
-    </p:spTree>
-  </p:cSld>
-  <p:clrMapOvr>
-    <a:masterClrMapping/>
-  </p:clrMapOvr>
-</p:notes>
-</file>
-
-<file path=ppt/notesSlides/notesSlide34.xml><?xml version="1.0" encoding="utf-8"?>
 <p:notes xmlns:a="http://schemas.openxmlformats.org/drawingml/2006/main" xmlns:r="http://schemas.openxmlformats.org/officeDocument/2006/relationships" xmlns:p="http://schemas.openxmlformats.org/presentationml/2006/main">
   <p:cSld>
     <p:spTree>
@@ -3534,7 +2981,7 @@
         <a:spcBef>
           <a:spcPct val="20000"/>
         </a:spcBef>
-        <a:buFont typeface="Arial" panose="02080604020202020204" pitchFamily="34" charset="0"/>
+        <a:buFont typeface="Arial" panose="020B0604020202020204" pitchFamily="34" charset="0"/>
         <a:buChar char="•"/>
         <a:defRPr sz="3200" kern="1200">
           <a:solidFill>
@@ -3549,7 +2996,7 @@
         <a:spcBef>
           <a:spcPct val="20000"/>
         </a:spcBef>
-        <a:buFont typeface="Arial" panose="02080604020202020204" pitchFamily="34" charset="0"/>
+        <a:buFont typeface="Arial" panose="020B0604020202020204" pitchFamily="34" charset="0"/>
         <a:buChar char="–"/>
         <a:defRPr sz="2800" kern="1200">
           <a:solidFill>
@@ -3564,7 +3011,7 @@
         <a:spcBef>
           <a:spcPct val="20000"/>
         </a:spcBef>
-        <a:buFont typeface="Arial" panose="02080604020202020204" pitchFamily="34" charset="0"/>
+        <a:buFont typeface="Arial" panose="020B0604020202020204" pitchFamily="34" charset="0"/>
         <a:buChar char="•"/>
         <a:defRPr sz="2400" kern="1200">
           <a:solidFill>
@@ -3579,7 +3026,7 @@
         <a:spcBef>
           <a:spcPct val="20000"/>
         </a:spcBef>
-        <a:buFont typeface="Arial" panose="02080604020202020204" pitchFamily="34" charset="0"/>
+        <a:buFont typeface="Arial" panose="020B0604020202020204" pitchFamily="34" charset="0"/>
         <a:buChar char="–"/>
         <a:defRPr sz="2000" kern="1200">
           <a:solidFill>
@@ -3594,7 +3041,7 @@
         <a:spcBef>
           <a:spcPct val="20000"/>
         </a:spcBef>
-        <a:buFont typeface="Arial" panose="02080604020202020204" pitchFamily="34" charset="0"/>
+        <a:buFont typeface="Arial" panose="020B0604020202020204" pitchFamily="34" charset="0"/>
         <a:buChar char="»"/>
         <a:defRPr sz="2000" kern="1200">
           <a:solidFill>
@@ -3609,7 +3056,7 @@
         <a:spcBef>
           <a:spcPct val="20000"/>
         </a:spcBef>
-        <a:buFont typeface="Arial" panose="02080604020202020204" pitchFamily="34" charset="0"/>
+        <a:buFont typeface="Arial" panose="020B0604020202020204" pitchFamily="34" charset="0"/>
         <a:buChar char="•"/>
         <a:defRPr sz="2000" kern="1200">
           <a:solidFill>
@@ -3624,7 +3071,7 @@
         <a:spcBef>
           <a:spcPct val="20000"/>
         </a:spcBef>
-        <a:buFont typeface="Arial" panose="02080604020202020204" pitchFamily="34" charset="0"/>
+        <a:buFont typeface="Arial" panose="020B0604020202020204" pitchFamily="34" charset="0"/>
         <a:buChar char="•"/>
         <a:defRPr sz="2000" kern="1200">
           <a:solidFill>
@@ -3639,7 +3086,7 @@
         <a:spcBef>
           <a:spcPct val="20000"/>
         </a:spcBef>
-        <a:buFont typeface="Arial" panose="02080604020202020204" pitchFamily="34" charset="0"/>
+        <a:buFont typeface="Arial" panose="020B0604020202020204" pitchFamily="34" charset="0"/>
         <a:buChar char="•"/>
         <a:defRPr sz="2000" kern="1200">
           <a:solidFill>
@@ -3654,7 +3101,7 @@
         <a:spcBef>
           <a:spcPct val="20000"/>
         </a:spcBef>
-        <a:buFont typeface="Arial" panose="02080604020202020204" pitchFamily="34" charset="0"/>
+        <a:buFont typeface="Arial" panose="020B0604020202020204" pitchFamily="34" charset="0"/>
         <a:buChar char="•"/>
         <a:defRPr sz="2000" kern="1200">
           <a:solidFill>
@@ -3844,9 +3291,16 @@
                 <a:ea typeface="微软雅黑" pitchFamily="34" charset="-122"/>
                 <a:cs typeface="微软雅黑" pitchFamily="34" charset="-120"/>
               </a:rPr>
-              <a:t>一种基于Rust语言的操作系统内核服务可靠性增强设计与实现</a:t>
-            </a:r>
-            <a:endParaRPr lang="en-US" sz="3010" dirty="0"/>
+              <a:t>面向RustOS的可靠性增强内核架构设计</a:t>
+            </a:r>
+            <a:endParaRPr lang="en-US" sz="3010" b="1" dirty="0">
+              <a:solidFill>
+                <a:srgbClr val="1F436B"/>
+              </a:solidFill>
+              <a:latin typeface="微软雅黑" pitchFamily="34" charset="0"/>
+              <a:ea typeface="微软雅黑" pitchFamily="34" charset="-122"/>
+              <a:cs typeface="微软雅黑" pitchFamily="34" charset="-120"/>
+            </a:endParaRPr>
           </a:p>
         </p:txBody>
       </p:sp>
@@ -3874,22 +3328,22 @@
               <a:buNone/>
             </a:pPr>
             <a:r>
-              <a:rPr lang="en-US" dirty="0">
+              <a:rPr lang="zh-CN" altLang="x-none" dirty="0">
                 <a:solidFill>
                   <a:srgbClr val="1F426A"/>
                 </a:solidFill>
                 <a:latin typeface="微软雅黑" pitchFamily="34" charset="0"/>
-                <a:ea typeface="微软雅黑" pitchFamily="34" charset="-122"/>
-                <a:cs typeface="微软雅黑" pitchFamily="34" charset="-120"/>
-              </a:rPr>
-              <a:t>邓荣达</a:t>
-            </a:r>
-            <a:endParaRPr lang="en-US" dirty="0">
+                <a:ea typeface="宋体" charset="0"/>
+                <a:cs typeface="微软雅黑" pitchFamily="34" charset="-120"/>
+              </a:rPr>
+              <a:t>黑袍纠察队</a:t>
+            </a:r>
+            <a:endParaRPr lang="zh-CN" altLang="x-none" dirty="0">
               <a:solidFill>
                 <a:srgbClr val="1F426A"/>
               </a:solidFill>
               <a:latin typeface="微软雅黑" pitchFamily="34" charset="0"/>
-              <a:ea typeface="微软雅黑" pitchFamily="34" charset="-122"/>
+              <a:ea typeface="宋体" charset="0"/>
               <a:cs typeface="微软雅黑" pitchFamily="34" charset="-120"/>
             </a:endParaRPr>
           </a:p>
@@ -3919,22 +3373,22 @@
               <a:buNone/>
             </a:pPr>
             <a:r>
-              <a:rPr lang="en-US" dirty="0">
+              <a:rPr lang="zh-CN" altLang="en-US" dirty="0">
                 <a:solidFill>
                   <a:srgbClr val="1F436B"/>
                 </a:solidFill>
                 <a:latin typeface="微软雅黑" pitchFamily="34" charset="0"/>
-                <a:ea typeface="微软雅黑" pitchFamily="34" charset="-122"/>
-                <a:cs typeface="微软雅黑" pitchFamily="34" charset="-120"/>
-              </a:rPr>
-              <a:t>2025-06-06</a:t>
-            </a:r>
-            <a:endParaRPr lang="en-US" dirty="0">
+                <a:ea typeface="宋体" charset="0"/>
+                <a:cs typeface="微软雅黑" pitchFamily="34" charset="-120"/>
+              </a:rPr>
+              <a:t>国防科技大学</a:t>
+            </a:r>
+            <a:endParaRPr lang="zh-CN" altLang="en-US" dirty="0">
               <a:solidFill>
                 <a:srgbClr val="1F436B"/>
               </a:solidFill>
               <a:latin typeface="微软雅黑" pitchFamily="34" charset="0"/>
-              <a:ea typeface="微软雅黑" pitchFamily="34" charset="-122"/>
+              <a:ea typeface="宋体" charset="0"/>
               <a:cs typeface="微软雅黑" pitchFamily="34" charset="-120"/>
             </a:endParaRPr>
           </a:p>
@@ -4043,7 +3497,7 @@
         <p:spPr>
           <a:xfrm>
             <a:off x="904875" y="653415"/>
-            <a:ext cx="7715250" cy="4340860"/>
+            <a:ext cx="7715250" cy="2030730"/>
           </a:xfrm>
           <a:prstGeom prst="rect">
             <a:avLst/>
@@ -4096,30 +3550,12 @@
                 </a:solidFill>
                 <a:ea typeface="宋体" charset="0"/>
               </a:rPr>
-              <a:t>相关工作</a:t>
+              <a:t>项目设计目标</a:t>
             </a:r>
             <a:endParaRPr lang="zh-CN" altLang="en-US" dirty="0">
               <a:solidFill>
                 <a:srgbClr val="FF0000"/>
               </a:solidFill>
-              <a:ea typeface="宋体" charset="0"/>
-            </a:endParaRPr>
-          </a:p>
-          <a:p>
-            <a:pPr marL="190500" indent="-190500" algn="l">
-              <a:lnSpc>
-                <a:spcPct val="150000"/>
-              </a:lnSpc>
-              <a:buSzPct val="100000"/>
-              <a:buChar char="•"/>
-            </a:pPr>
-            <a:r>
-              <a:rPr lang="zh-CN" altLang="en-US" dirty="0">
-                <a:ea typeface="宋体" charset="0"/>
-              </a:rPr>
-              <a:t>研究目的</a:t>
-            </a:r>
-            <a:endParaRPr lang="zh-CN" altLang="en-US" dirty="0">
               <a:ea typeface="宋体" charset="0"/>
             </a:endParaRPr>
           </a:p>
@@ -4216,37 +3652,78 @@
               <a:buNone/>
             </a:pPr>
             <a:r>
+              <a:rPr lang="en-US" sz="2660" b="1" dirty="0">
+                <a:solidFill>
+                  <a:srgbClr val="1C3C5F"/>
+                </a:solidFill>
+                <a:latin typeface="微软雅黑" pitchFamily="34" charset="0"/>
+                <a:ea typeface="微软雅黑" pitchFamily="34" charset="-122"/>
+                <a:cs typeface="微软雅黑" pitchFamily="34" charset="-120"/>
+              </a:rPr>
+              <a:t>研究</a:t>
+            </a:r>
+            <a:r>
               <a:rPr lang="zh-CN" altLang="en-US" sz="2660" b="1" dirty="0">
                 <a:solidFill>
                   <a:srgbClr val="1C3C5F"/>
                 </a:solidFill>
                 <a:latin typeface="微软雅黑" pitchFamily="34" charset="0"/>
-                <a:ea typeface="微软雅黑" pitchFamily="34" charset="-122"/>
-                <a:cs typeface="微软雅黑" pitchFamily="34" charset="-120"/>
-              </a:rPr>
-              <a:t>相关工作</a:t>
+                <a:ea typeface="宋体" charset="0"/>
+                <a:cs typeface="微软雅黑" pitchFamily="34" charset="-120"/>
+              </a:rPr>
+              <a:t>设计目标</a:t>
             </a:r>
             <a:endParaRPr lang="zh-CN" altLang="en-US" sz="2660" b="1" dirty="0">
               <a:solidFill>
                 <a:srgbClr val="1C3C5F"/>
               </a:solidFill>
               <a:latin typeface="微软雅黑" pitchFamily="34" charset="0"/>
-              <a:ea typeface="微软雅黑" pitchFamily="34" charset="-122"/>
+              <a:ea typeface="宋体" charset="0"/>
               <a:cs typeface="微软雅黑" pitchFamily="34" charset="-120"/>
             </a:endParaRPr>
           </a:p>
         </p:txBody>
       </p:sp>
-      <p:sp>
-        <p:nvSpPr>
-          <p:cNvPr id="4" name="Text 1"/>
+      <p:pic>
+        <p:nvPicPr>
+          <p:cNvPr id="4" name="Image 1" descr="preencoded.png"/>
+          <p:cNvPicPr>
+            <a:picLocks noChangeAspect="1"/>
+          </p:cNvPicPr>
+          <p:nvPr/>
+        </p:nvPicPr>
+        <p:blipFill>
+          <a:blip r:embed="rId2">
+            <a:extLst>
+              <a:ext uri="{96DAC541-7B7A-43D3-8B79-37D633B846F1}">
+                <asvg:svgBlip xmlns:asvg="http://schemas.microsoft.com/office/drawing/2016/SVG/main" r:embed="rId3"/>
+              </a:ext>
+            </a:extLst>
+          </a:blip>
+          <a:stretch>
+            <a:fillRect/>
+          </a:stretch>
+        </p:blipFill>
+        <p:spPr>
+          <a:xfrm>
+            <a:off x="904875" y="1062038"/>
+            <a:ext cx="7715250" cy="3452813"/>
+          </a:xfrm>
+          <a:prstGeom prst="rect">
+            <a:avLst/>
+          </a:prstGeom>
+        </p:spPr>
+      </p:pic>
+      <p:sp>
+        <p:nvSpPr>
+          <p:cNvPr id="5" name="Text 1"/>
           <p:cNvSpPr/>
           <p:nvPr/>
         </p:nvSpPr>
         <p:spPr>
           <a:xfrm>
-            <a:off x="904875" y="653415"/>
-            <a:ext cx="7715250" cy="4340860"/>
+            <a:off x="625475" y="846455"/>
+            <a:ext cx="8142605" cy="3478530"/>
           </a:xfrm>
           <a:prstGeom prst="rect">
             <a:avLst/>
@@ -4254,70 +3731,272 @@
           <a:noFill/>
         </p:spPr>
         <p:txBody>
-          <a:bodyPr wrap="square" rtlCol="0" anchor="t"/>
-          <a:lstStyle/>
-          <a:p>
-            <a:pPr marL="190500" lvl="0" indent="-190500" algn="l">
+          <a:bodyPr wrap="square" rtlCol="0" anchor="ctr"/>
+          <a:lstStyle/>
+          <a:p>
+            <a:pPr marL="285750" indent="-285750" algn="l">
               <a:lnSpc>
                 <a:spcPct val="150000"/>
               </a:lnSpc>
-              <a:buSzPct val="100000"/>
+              <a:buFont typeface="Arial" panose="020B0604020202020204" pitchFamily="34" charset="0"/>
               <a:buChar char="•"/>
             </a:pPr>
             <a:r>
               <a:rPr lang="zh-CN" dirty="0">
+                <a:latin typeface="微软雅黑" pitchFamily="34" charset="0"/>
+                <a:ea typeface="微软雅黑" pitchFamily="34" charset="-122"/>
+                <a:cs typeface="微软雅黑" pitchFamily="34" charset="-120"/>
+              </a:rPr>
+              <a:t>基于</a:t>
+            </a:r>
+            <a:r>
+              <a:rPr lang="en-US" altLang="zh-CN" dirty="0">
+                <a:latin typeface="微软雅黑" pitchFamily="34" charset="0"/>
+                <a:ea typeface="微软雅黑" pitchFamily="34" charset="-122"/>
+                <a:cs typeface="微软雅黑" pitchFamily="34" charset="-120"/>
+              </a:rPr>
+              <a:t>Rust</a:t>
+            </a:r>
+            <a:r>
+              <a:rPr lang="zh-CN" altLang="en-US" dirty="0">
+                <a:latin typeface="微软雅黑" pitchFamily="34" charset="0"/>
                 <a:ea typeface="宋体" charset="0"/>
-              </a:rPr>
-              <a:t>主流内核架构</a:t>
-            </a:r>
-            <a:endParaRPr lang="en-US" dirty="0"/>
-          </a:p>
-          <a:p>
-            <a:pPr marL="190500" lvl="0" indent="-190500" algn="l">
+                <a:cs typeface="微软雅黑" pitchFamily="34" charset="-120"/>
+              </a:rPr>
+              <a:t>语言，设计</a:t>
+            </a:r>
+            <a:r>
+              <a:rPr lang="zh-CN" dirty="0">
+                <a:latin typeface="微软雅黑" pitchFamily="34" charset="0"/>
+                <a:ea typeface="微软雅黑" pitchFamily="34" charset="-122"/>
+                <a:cs typeface="微软雅黑" pitchFamily="34" charset="-120"/>
+              </a:rPr>
+              <a:t>实现一个</a:t>
+            </a:r>
+            <a:r>
+              <a:rPr lang="zh-CN" dirty="0">
+                <a:solidFill>
+                  <a:srgbClr val="FF0000"/>
+                </a:solidFill>
+                <a:latin typeface="微软雅黑" pitchFamily="34" charset="0"/>
+                <a:ea typeface="微软雅黑" pitchFamily="34" charset="-122"/>
+                <a:cs typeface="微软雅黑" pitchFamily="34" charset="-120"/>
+              </a:rPr>
+              <a:t>多对多线程模型</a:t>
+            </a:r>
+            <a:r>
+              <a:rPr lang="zh-CN" dirty="0">
+                <a:latin typeface="微软雅黑" pitchFamily="34" charset="0"/>
+                <a:ea typeface="微软雅黑" pitchFamily="34" charset="-122"/>
+                <a:cs typeface="微软雅黑" pitchFamily="34" charset="-120"/>
+              </a:rPr>
+              <a:t>的</a:t>
+            </a:r>
+            <a:r>
+              <a:rPr lang="zh-CN" dirty="0">
+                <a:solidFill>
+                  <a:srgbClr val="FF0000"/>
+                </a:solidFill>
+                <a:latin typeface="微软雅黑" pitchFamily="34" charset="0"/>
+                <a:ea typeface="微软雅黑" pitchFamily="34" charset="-122"/>
+                <a:cs typeface="微软雅黑" pitchFamily="34" charset="-120"/>
+              </a:rPr>
+              <a:t>混合内核</a:t>
+            </a:r>
+            <a:r>
+              <a:rPr lang="zh-CN" dirty="0">
+                <a:latin typeface="微软雅黑" pitchFamily="34" charset="0"/>
+                <a:ea typeface="微软雅黑" pitchFamily="34" charset="-122"/>
+                <a:cs typeface="微软雅黑" pitchFamily="34" charset="-120"/>
+              </a:rPr>
+              <a:t>，</a:t>
+            </a:r>
+            <a:r>
+              <a:rPr dirty="0">
+                <a:latin typeface="微软雅黑" pitchFamily="34" charset="0"/>
+                <a:ea typeface="微软雅黑" pitchFamily="34" charset="-122"/>
+                <a:cs typeface="微软雅黑" pitchFamily="34" charset="-120"/>
+              </a:rPr>
+              <a:t>内存安全特性</a:t>
+            </a:r>
+            <a:r>
+              <a:rPr dirty="0">
+                <a:solidFill>
+                  <a:srgbClr val="FF0000"/>
+                </a:solidFill>
+                <a:latin typeface="微软雅黑" pitchFamily="34" charset="0"/>
+                <a:ea typeface="微软雅黑" pitchFamily="34" charset="-122"/>
+                <a:cs typeface="微软雅黑" pitchFamily="34" charset="-120"/>
+              </a:rPr>
+              <a:t>代替传统地址空间隔离</a:t>
+            </a:r>
+            <a:r>
+              <a:rPr dirty="0">
+                <a:latin typeface="微软雅黑" pitchFamily="34" charset="0"/>
+                <a:ea typeface="微软雅黑" pitchFamily="34" charset="-122"/>
+                <a:cs typeface="微软雅黑" pitchFamily="34" charset="-120"/>
+              </a:rPr>
+              <a:t>,保证</a:t>
+            </a:r>
+            <a:r>
+              <a:rPr dirty="0">
+                <a:solidFill>
+                  <a:srgbClr val="FF0000"/>
+                </a:solidFill>
+                <a:latin typeface="微软雅黑" pitchFamily="34" charset="0"/>
+                <a:ea typeface="微软雅黑" pitchFamily="34" charset="-122"/>
+                <a:cs typeface="微软雅黑" pitchFamily="34" charset="-120"/>
+              </a:rPr>
+              <a:t>服务间隔离</a:t>
+            </a:r>
+            <a:r>
+              <a:rPr dirty="0">
+                <a:latin typeface="微软雅黑" pitchFamily="34" charset="0"/>
+                <a:ea typeface="微软雅黑" pitchFamily="34" charset="-122"/>
+                <a:cs typeface="微软雅黑" pitchFamily="34" charset="-120"/>
+              </a:rPr>
+              <a:t>性的同时,</a:t>
+            </a:r>
+            <a:r>
+              <a:rPr dirty="0">
+                <a:solidFill>
+                  <a:srgbClr val="FF0000"/>
+                </a:solidFill>
+                <a:latin typeface="微软雅黑" pitchFamily="34" charset="0"/>
+                <a:ea typeface="微软雅黑" pitchFamily="34" charset="-122"/>
+                <a:cs typeface="微软雅黑" pitchFamily="34" charset="-120"/>
+              </a:rPr>
+              <a:t>避免IPC 产生的性能开销</a:t>
+            </a:r>
+            <a:r>
+              <a:rPr dirty="0">
+                <a:latin typeface="微软雅黑" pitchFamily="34" charset="0"/>
+                <a:ea typeface="微软雅黑" pitchFamily="34" charset="-122"/>
+                <a:cs typeface="微软雅黑" pitchFamily="34" charset="-120"/>
+              </a:rPr>
+              <a:t>;</a:t>
+            </a:r>
+            <a:endParaRPr dirty="0">
+              <a:latin typeface="微软雅黑" pitchFamily="34" charset="0"/>
+              <a:ea typeface="微软雅黑" pitchFamily="34" charset="-122"/>
+              <a:cs typeface="微软雅黑" pitchFamily="34" charset="-120"/>
+            </a:endParaRPr>
+          </a:p>
+          <a:p>
+            <a:pPr marL="285750" indent="-285750" algn="l">
               <a:lnSpc>
                 <a:spcPct val="150000"/>
               </a:lnSpc>
-              <a:buSzPct val="100000"/>
+              <a:buFont typeface="Arial" panose="020B0604020202020204" pitchFamily="34" charset="0"/>
               <a:buChar char="•"/>
             </a:pPr>
-            <a:r>
-              <a:rPr lang="zh-CN" dirty="0">
-                <a:ea typeface="宋体" charset="0"/>
-              </a:rPr>
-              <a:t>线程模型</a:t>
-            </a:r>
-            <a:endParaRPr lang="zh-CN" dirty="0">
-              <a:ea typeface="宋体" charset="0"/>
+            <a:endParaRPr dirty="0">
+              <a:latin typeface="微软雅黑" pitchFamily="34" charset="0"/>
+              <a:ea typeface="微软雅黑" pitchFamily="34" charset="-122"/>
+              <a:cs typeface="微软雅黑" pitchFamily="34" charset="-120"/>
             </a:endParaRPr>
           </a:p>
           <a:p>
-            <a:pPr marL="190500" lvl="0" indent="-190500" algn="l">
+            <a:pPr marL="285750" indent="-285750" algn="l">
               <a:lnSpc>
                 <a:spcPct val="150000"/>
               </a:lnSpc>
-              <a:buSzPct val="100000"/>
+              <a:buFont typeface="Arial" panose="020B0604020202020204" pitchFamily="34" charset="0"/>
               <a:buChar char="•"/>
             </a:pPr>
             <a:r>
-              <a:rPr lang="zh-CN" altLang="en-US" dirty="0">
-                <a:ea typeface="宋体" charset="0"/>
-              </a:rPr>
-              <a:t>基于</a:t>
-            </a:r>
-            <a:r>
-              <a:rPr lang="en-US" dirty="0">
-                <a:ea typeface="宋体" charset="0"/>
-              </a:rPr>
-              <a:t>Rust</a:t>
-            </a:r>
-            <a:r>
-              <a:rPr lang="zh-CN" altLang="en-US" dirty="0">
-                <a:ea typeface="宋体" charset="0"/>
-              </a:rPr>
-              <a:t>语言的内核设计</a:t>
-            </a:r>
-            <a:endParaRPr lang="zh-CN" altLang="en-US" dirty="0">
-              <a:ea typeface="宋体" charset="0"/>
+              <a:rPr dirty="0">
+                <a:latin typeface="微软雅黑" pitchFamily="34" charset="0"/>
+                <a:ea typeface="微软雅黑" pitchFamily="34" charset="-122"/>
+                <a:cs typeface="微软雅黑" pitchFamily="34" charset="-120"/>
+              </a:rPr>
+              <a:t>在</a:t>
+            </a:r>
+            <a:r>
+              <a:rPr lang="zh-CN" dirty="0">
+                <a:latin typeface="微软雅黑" pitchFamily="34" charset="0"/>
+                <a:ea typeface="微软雅黑" pitchFamily="34" charset="-122"/>
+                <a:cs typeface="微软雅黑" pitchFamily="34" charset="-120"/>
+              </a:rPr>
+              <a:t>第一点基础上</a:t>
+            </a:r>
+            <a:r>
+              <a:rPr dirty="0">
+                <a:latin typeface="微软雅黑" pitchFamily="34" charset="0"/>
+                <a:ea typeface="微软雅黑" pitchFamily="34" charset="-122"/>
+                <a:cs typeface="微软雅黑" pitchFamily="34" charset="-120"/>
+              </a:rPr>
+              <a:t>,</a:t>
+            </a:r>
+            <a:r>
+              <a:rPr lang="zh-CN" dirty="0">
+                <a:latin typeface="微软雅黑" pitchFamily="34" charset="0"/>
+                <a:ea typeface="微软雅黑" pitchFamily="34" charset="-122"/>
+                <a:cs typeface="微软雅黑" pitchFamily="34" charset="-120"/>
+              </a:rPr>
+              <a:t>设计一种</a:t>
+            </a:r>
+            <a:r>
+              <a:rPr dirty="0">
+                <a:solidFill>
+                  <a:srgbClr val="FF0000"/>
+                </a:solidFill>
+                <a:latin typeface="微软雅黑" pitchFamily="34" charset="0"/>
+                <a:ea typeface="微软雅黑" pitchFamily="34" charset="-122"/>
+                <a:cs typeface="微软雅黑" pitchFamily="34" charset="-120"/>
+              </a:rPr>
+              <a:t>内核服务故障恢复机制,</a:t>
+            </a:r>
+            <a:r>
+              <a:rPr dirty="0">
+                <a:latin typeface="微软雅黑" pitchFamily="34" charset="0"/>
+                <a:ea typeface="微软雅黑" pitchFamily="34" charset="-122"/>
+                <a:cs typeface="微软雅黑" pitchFamily="34" charset="-120"/>
+              </a:rPr>
+              <a:t>进一步提升内核可靠性,</a:t>
+            </a:r>
+            <a:r>
+              <a:rPr dirty="0">
+                <a:solidFill>
+                  <a:srgbClr val="FF0000"/>
+                </a:solidFill>
+                <a:latin typeface="微软雅黑" pitchFamily="34" charset="0"/>
+                <a:ea typeface="微软雅黑" pitchFamily="34" charset="-122"/>
+                <a:cs typeface="微软雅黑" pitchFamily="34" charset="-120"/>
+              </a:rPr>
+              <a:t>应对内存缺陷之外的其它缺陷</a:t>
+            </a:r>
+            <a:r>
+              <a:rPr dirty="0">
+                <a:latin typeface="微软雅黑" pitchFamily="34" charset="0"/>
+                <a:ea typeface="微软雅黑" pitchFamily="34" charset="-122"/>
+                <a:cs typeface="微软雅黑" pitchFamily="34" charset="-120"/>
+              </a:rPr>
+              <a:t>(如</a:t>
+            </a:r>
+            <a:r>
+              <a:rPr dirty="0">
+                <a:solidFill>
+                  <a:srgbClr val="FF0000"/>
+                </a:solidFill>
+                <a:latin typeface="微软雅黑" pitchFamily="34" charset="0"/>
+                <a:ea typeface="微软雅黑" pitchFamily="34" charset="-122"/>
+                <a:cs typeface="微软雅黑" pitchFamily="34" charset="-120"/>
+              </a:rPr>
+              <a:t>逻辑错误触发 panic</a:t>
+            </a:r>
+            <a:r>
+              <a:rPr dirty="0">
+                <a:latin typeface="微软雅黑" pitchFamily="34" charset="0"/>
+                <a:ea typeface="微软雅黑" pitchFamily="34" charset="-122"/>
+                <a:cs typeface="微软雅黑" pitchFamily="34" charset="-120"/>
+              </a:rPr>
+              <a:t>)。</a:t>
+            </a:r>
+            <a:endParaRPr dirty="0">
+              <a:latin typeface="微软雅黑" pitchFamily="34" charset="0"/>
+              <a:ea typeface="微软雅黑" pitchFamily="34" charset="-122"/>
+              <a:cs typeface="微软雅黑" pitchFamily="34" charset="-120"/>
             </a:endParaRPr>
           </a:p>
         </p:txBody>
@@ -4403,7 +4082,7 @@
                 <a:ea typeface="微软雅黑" pitchFamily="34" charset="-122"/>
                 <a:cs typeface="微软雅黑" pitchFamily="34" charset="-120"/>
               </a:rPr>
-              <a:t>相关工作：主流内核架构</a:t>
+              <a:t>绪论</a:t>
             </a:r>
             <a:endParaRPr lang="zh-CN" altLang="en-US" sz="2660" b="1" dirty="0">
               <a:solidFill>
@@ -4425,7 +4104,7 @@
         <p:spPr>
           <a:xfrm>
             <a:off x="904875" y="653415"/>
-            <a:ext cx="7715250" cy="4340860"/>
+            <a:ext cx="7715250" cy="2030730"/>
           </a:xfrm>
           <a:prstGeom prst="rect">
             <a:avLst/>
@@ -4436,206 +4115,83 @@
           <a:bodyPr wrap="square" rtlCol="0" anchor="t"/>
           <a:lstStyle/>
           <a:p>
-            <a:pPr marL="190500" lvl="0" indent="-190500" algn="l">
+            <a:pPr marL="190500" indent="-190500" algn="l">
               <a:lnSpc>
                 <a:spcPct val="150000"/>
               </a:lnSpc>
               <a:buSzPct val="100000"/>
               <a:buChar char="•"/>
             </a:pPr>
-            <a:endParaRPr lang="zh-CN" altLang="en-US" b="1" dirty="0">
+            <a:r>
+              <a:rPr lang="zh-CN" altLang="en-US" dirty="0">
+                <a:solidFill>
+                  <a:schemeClr val="tx1"/>
+                </a:solidFill>
+                <a:latin typeface="微软雅黑" pitchFamily="34" charset="0"/>
+                <a:ea typeface="微软雅黑" pitchFamily="34" charset="-122"/>
+                <a:cs typeface="微软雅黑" pitchFamily="34" charset="-120"/>
+              </a:rPr>
+              <a:t>研究背景</a:t>
+            </a:r>
+            <a:endParaRPr lang="en-US" dirty="0">
+              <a:solidFill>
+                <a:schemeClr val="tx1"/>
+              </a:solidFill>
+              <a:latin typeface="微软雅黑" pitchFamily="34" charset="0"/>
+              <a:ea typeface="微软雅黑" pitchFamily="34" charset="-122"/>
+              <a:cs typeface="微软雅黑" pitchFamily="34" charset="-120"/>
+            </a:endParaRPr>
+          </a:p>
+          <a:p>
+            <a:pPr marL="190500" indent="-190500" algn="l">
+              <a:lnSpc>
+                <a:spcPct val="150000"/>
+              </a:lnSpc>
+              <a:buSzPct val="100000"/>
+              <a:buChar char="•"/>
+            </a:pPr>
+            <a:r>
+              <a:rPr lang="zh-CN" altLang="en-US" dirty="0">
+                <a:solidFill>
+                  <a:schemeClr val="tx1"/>
+                </a:solidFill>
+                <a:ea typeface="宋体" charset="0"/>
+              </a:rPr>
+              <a:t>项目设计目标</a:t>
+            </a:r>
+            <a:endParaRPr lang="zh-CN" altLang="en-US" dirty="0">
+              <a:solidFill>
+                <a:schemeClr val="tx1"/>
+              </a:solidFill>
               <a:ea typeface="宋体" charset="0"/>
             </a:endParaRPr>
           </a:p>
-        </p:txBody>
-      </p:sp>
-      <p:sp>
-        <p:nvSpPr>
-          <p:cNvPr id="5" name="文本框 4"/>
-          <p:cNvSpPr txBox="1"/>
-          <p:nvPr/>
-        </p:nvSpPr>
-        <p:spPr>
-          <a:xfrm>
-            <a:off x="579755" y="824865"/>
-            <a:ext cx="8035290" cy="1537335"/>
-          </a:xfrm>
-          <a:prstGeom prst="rect">
-            <a:avLst/>
-          </a:prstGeom>
-          <a:noFill/>
-        </p:spPr>
-        <p:txBody>
-          <a:bodyPr wrap="square" rtlCol="0">
-            <a:noAutofit/>
-          </a:bodyPr>
-          <a:p>
-            <a:pPr marL="285750" indent="-285750">
-              <a:buFont typeface="Arial" panose="02080604020202020204" pitchFamily="34" charset="0"/>
+          <a:p>
+            <a:pPr marL="190500" indent="-190500" algn="l">
+              <a:lnSpc>
+                <a:spcPct val="150000"/>
+              </a:lnSpc>
+              <a:buSzPct val="100000"/>
               <a:buChar char="•"/>
             </a:pPr>
             <a:r>
-              <a:rPr lang="zh-CN" altLang="en-US" sz="1600"/>
-              <a:t>宏内核：所有内核服务全部集成在内核态，</a:t>
-            </a:r>
-            <a:r>
-              <a:rPr lang="zh-CN" altLang="en-US" sz="1600">
+              <a:rPr lang="zh-CN" altLang="en-US" dirty="0">
                 <a:solidFill>
                   <a:srgbClr val="FF0000"/>
                 </a:solidFill>
-              </a:rPr>
-              <a:t>性能好</a:t>
-            </a:r>
-            <a:r>
-              <a:rPr lang="zh-CN" altLang="en-US" sz="1600"/>
-              <a:t>，</a:t>
-            </a:r>
-            <a:r>
-              <a:rPr lang="zh-CN" altLang="en-US" sz="1600">
-                <a:solidFill>
-                  <a:srgbClr val="FF0000"/>
-                </a:solidFill>
-              </a:rPr>
-              <a:t>可靠性、可拓展性差</a:t>
-            </a:r>
-            <a:r>
-              <a:rPr lang="zh-CN" altLang="en-US" sz="1600"/>
-              <a:t>。</a:t>
-            </a:r>
-            <a:endParaRPr lang="zh-CN" altLang="en-US" sz="1600"/>
-          </a:p>
-          <a:p>
-            <a:pPr marL="285750" indent="-285750">
-              <a:buFont typeface="Arial" panose="02080604020202020204" pitchFamily="34" charset="0"/>
-              <a:buChar char="•"/>
-            </a:pPr>
-            <a:endParaRPr lang="zh-CN" altLang="en-US" sz="1600"/>
-          </a:p>
-          <a:p>
-            <a:pPr marL="285750" indent="-285750">
-              <a:buFont typeface="Arial" panose="02080604020202020204" pitchFamily="34" charset="0"/>
-              <a:buChar char="•"/>
-            </a:pPr>
-            <a:r>
-              <a:rPr lang="zh-CN" altLang="en-US" sz="1600"/>
-              <a:t>微内核：核心服务在内核态，非核心服务用户态，</a:t>
-            </a:r>
-            <a:r>
-              <a:rPr lang="zh-CN" altLang="en-US" sz="1600">
-                <a:solidFill>
-                  <a:srgbClr val="FF0000"/>
-                </a:solidFill>
-              </a:rPr>
-              <a:t>可靠性强</a:t>
-            </a:r>
-            <a:r>
-              <a:rPr lang="zh-CN" altLang="en-US" sz="1600"/>
-              <a:t>，</a:t>
-            </a:r>
-            <a:r>
-              <a:rPr lang="zh-CN" altLang="en-US" sz="1600">
-                <a:solidFill>
-                  <a:srgbClr val="FF0000"/>
-                </a:solidFill>
-              </a:rPr>
-              <a:t>性能较差</a:t>
-            </a:r>
-            <a:r>
-              <a:rPr lang="zh-CN" altLang="en-US" sz="1600"/>
-              <a:t>。</a:t>
-            </a:r>
-            <a:endParaRPr lang="zh-CN" altLang="en-US" sz="1600"/>
-          </a:p>
-          <a:p>
-            <a:pPr indent="0">
-              <a:buFont typeface="Arial" panose="02080604020202020204" pitchFamily="34" charset="0"/>
-              <a:buNone/>
-            </a:pPr>
-            <a:endParaRPr lang="zh-CN" altLang="en-US" sz="1600"/>
-          </a:p>
-          <a:p>
-            <a:pPr marL="285750" indent="-285750">
-              <a:buFont typeface="Arial" panose="02080604020202020204" pitchFamily="34" charset="0"/>
-              <a:buChar char="•"/>
-            </a:pPr>
-            <a:r>
-              <a:rPr lang="zh-CN" altLang="en-US" sz="1600"/>
-              <a:t>混合内核：折中方案，非核心服务以</a:t>
-            </a:r>
-            <a:r>
-              <a:rPr lang="zh-CN" altLang="en-US" sz="1600">
-                <a:solidFill>
-                  <a:srgbClr val="FF0000"/>
-                </a:solidFill>
-              </a:rPr>
-              <a:t>独立内核线程</a:t>
-            </a:r>
-            <a:r>
-              <a:rPr lang="zh-CN" altLang="en-US" sz="1600"/>
-              <a:t>的方式运行在内核态，</a:t>
-            </a:r>
-            <a:r>
-              <a:rPr lang="zh-CN" altLang="en-US" sz="1600">
-                <a:solidFill>
-                  <a:srgbClr val="FF0000"/>
-                </a:solidFill>
-              </a:rPr>
-              <a:t>避免</a:t>
-            </a:r>
-            <a:r>
-              <a:rPr lang="en-US" altLang="zh-CN" sz="1600">
-                <a:solidFill>
-                  <a:srgbClr val="FF0000"/>
-                </a:solidFill>
-              </a:rPr>
-              <a:t>IPC</a:t>
-            </a:r>
-            <a:r>
-              <a:rPr lang="zh-CN" altLang="en-US" sz="1600">
-                <a:solidFill>
-                  <a:srgbClr val="FF0000"/>
-                </a:solidFill>
                 <a:ea typeface="宋体" charset="0"/>
               </a:rPr>
-              <a:t>开销</a:t>
-            </a:r>
-            <a:r>
-              <a:rPr lang="zh-CN" altLang="en-US" sz="1600">
-                <a:ea typeface="宋体" charset="0"/>
-              </a:rPr>
-              <a:t>。</a:t>
-            </a:r>
-            <a:endParaRPr lang="zh-CN" altLang="en-US" sz="1600"/>
-          </a:p>
-          <a:p>
-            <a:endParaRPr lang="zh-CN" altLang="en-US" sz="1600"/>
-          </a:p>
-        </p:txBody>
-      </p:sp>
-      <p:pic>
-        <p:nvPicPr>
-          <p:cNvPr id="7" name="图片 6" descr="三种架构"/>
-          <p:cNvPicPr>
-            <a:picLocks noChangeAspect="1"/>
-          </p:cNvPicPr>
-          <p:nvPr/>
-        </p:nvPicPr>
-        <p:blipFill>
-          <a:blip r:embed="rId2"/>
-          <a:stretch>
-            <a:fillRect/>
-          </a:stretch>
-        </p:blipFill>
-        <p:spPr>
-          <a:xfrm>
-            <a:off x="1045845" y="2339340"/>
-            <a:ext cx="7400290" cy="2752090"/>
-          </a:xfrm>
-          <a:prstGeom prst="rect">
-            <a:avLst/>
-          </a:prstGeom>
-        </p:spPr>
-      </p:pic>
+              <a:t>本项目工作</a:t>
+            </a:r>
+            <a:endParaRPr lang="zh-CN" altLang="en-US" dirty="0">
+              <a:solidFill>
+                <a:srgbClr val="FF0000"/>
+              </a:solidFill>
+              <a:ea typeface="宋体" charset="0"/>
+            </a:endParaRPr>
+          </a:p>
+        </p:txBody>
+      </p:sp>
     </p:spTree>
   </p:cSld>
   <p:clrMapOvr>
@@ -4709,7 +4265,7 @@
               <a:buNone/>
             </a:pPr>
             <a:r>
-              <a:rPr lang="zh-CN" altLang="x-none" sz="2660" b="1" dirty="0">
+              <a:rPr lang="en-US" sz="2660" b="1" dirty="0">
                 <a:solidFill>
                   <a:srgbClr val="1C3C5F"/>
                 </a:solidFill>
@@ -4717,29 +4273,44 @@
                 <a:ea typeface="微软雅黑" pitchFamily="34" charset="-122"/>
                 <a:cs typeface="微软雅黑" pitchFamily="34" charset="-120"/>
               </a:rPr>
-              <a:t>相关工作：线程模型</a:t>
-            </a:r>
-            <a:endParaRPr lang="zh-CN" altLang="x-none" sz="2660" b="1" dirty="0">
-              <a:solidFill>
-                <a:srgbClr val="1C3C5F"/>
-              </a:solidFill>
-              <a:latin typeface="微软雅黑" pitchFamily="34" charset="0"/>
-              <a:ea typeface="微软雅黑" pitchFamily="34" charset="-122"/>
-              <a:cs typeface="微软雅黑" pitchFamily="34" charset="-120"/>
-            </a:endParaRPr>
-          </a:p>
-        </p:txBody>
-      </p:sp>
-      <p:sp>
-        <p:nvSpPr>
-          <p:cNvPr id="5" name="Text 1"/>
-          <p:cNvSpPr/>
+              <a:t>本</a:t>
+            </a:r>
+            <a:r>
+              <a:rPr lang="zh-CN" altLang="en-US" sz="2660" b="1" dirty="0">
+                <a:solidFill>
+                  <a:srgbClr val="1C3C5F"/>
+                </a:solidFill>
+                <a:latin typeface="微软雅黑" pitchFamily="34" charset="0"/>
+                <a:ea typeface="宋体" charset="0"/>
+                <a:cs typeface="微软雅黑" pitchFamily="34" charset="-120"/>
+              </a:rPr>
+              <a:t>项目</a:t>
+            </a:r>
+            <a:r>
+              <a:rPr lang="en-US" sz="2660" b="1" dirty="0">
+                <a:solidFill>
+                  <a:srgbClr val="1C3C5F"/>
+                </a:solidFill>
+                <a:latin typeface="微软雅黑" pitchFamily="34" charset="0"/>
+                <a:ea typeface="微软雅黑" pitchFamily="34" charset="-122"/>
+                <a:cs typeface="微软雅黑" pitchFamily="34" charset="-120"/>
+              </a:rPr>
+              <a:t>工作</a:t>
+            </a:r>
+            <a:endParaRPr lang="en-US" sz="2660" dirty="0"/>
+          </a:p>
+        </p:txBody>
+      </p:sp>
+      <p:sp>
+        <p:nvSpPr>
+          <p:cNvPr id="9" name="文本框 8"/>
+          <p:cNvSpPr txBox="1"/>
           <p:nvPr/>
         </p:nvSpPr>
         <p:spPr>
           <a:xfrm>
-            <a:off x="1228725" y="1252538"/>
-            <a:ext cx="7062787" cy="3071813"/>
+            <a:off x="548640" y="1002665"/>
+            <a:ext cx="7845425" cy="3692525"/>
           </a:xfrm>
           <a:prstGeom prst="rect">
             <a:avLst/>
@@ -4747,145 +4318,185 @@
           <a:noFill/>
         </p:spPr>
         <p:txBody>
-          <a:bodyPr wrap="square" rtlCol="0" anchor="ctr"/>
-          <a:lstStyle/>
-          <a:p>
-            <a:pPr marL="0" indent="0" algn="l">
-              <a:lnSpc>
-                <a:spcPct val="150000"/>
-              </a:lnSpc>
-              <a:buNone/>
-            </a:pPr>
-            <a:endParaRPr lang="en-US" b="1" dirty="0"/>
-          </a:p>
-        </p:txBody>
-      </p:sp>
-      <p:pic>
-        <p:nvPicPr>
-          <p:cNvPr id="6" name="图片 5" descr="121threadmodel"/>
-          <p:cNvPicPr>
-            <a:picLocks noChangeAspect="1"/>
-          </p:cNvPicPr>
-          <p:nvPr/>
-        </p:nvPicPr>
-        <p:blipFill>
-          <a:blip r:embed="rId2"/>
-          <a:stretch>
-            <a:fillRect/>
-          </a:stretch>
-        </p:blipFill>
-        <p:spPr>
-          <a:xfrm>
-            <a:off x="349250" y="2658110"/>
-            <a:ext cx="3609340" cy="2197735"/>
-          </a:xfrm>
-          <a:prstGeom prst="rect">
-            <a:avLst/>
-          </a:prstGeom>
-        </p:spPr>
-      </p:pic>
-      <p:pic>
-        <p:nvPicPr>
-          <p:cNvPr id="7" name="图片 6" descr="many2manythreadmodel"/>
-          <p:cNvPicPr>
-            <a:picLocks noChangeAspect="1"/>
-          </p:cNvPicPr>
-          <p:nvPr/>
-        </p:nvPicPr>
-        <p:blipFill>
-          <a:blip r:embed="rId3"/>
-          <a:stretch>
-            <a:fillRect/>
-          </a:stretch>
-        </p:blipFill>
-        <p:spPr>
-          <a:xfrm>
-            <a:off x="4983480" y="2658110"/>
-            <a:ext cx="3520440" cy="2138680"/>
-          </a:xfrm>
-          <a:prstGeom prst="rect">
-            <a:avLst/>
-          </a:prstGeom>
-        </p:spPr>
-      </p:pic>
-      <p:sp>
-        <p:nvSpPr>
-          <p:cNvPr id="8" name="文本框 7"/>
-          <p:cNvSpPr txBox="1"/>
-          <p:nvPr/>
-        </p:nvSpPr>
-        <p:spPr>
-          <a:xfrm>
-            <a:off x="258445" y="970280"/>
-            <a:ext cx="8509635" cy="1746885"/>
-          </a:xfrm>
-          <a:prstGeom prst="rect">
-            <a:avLst/>
-          </a:prstGeom>
-          <a:noFill/>
-        </p:spPr>
-        <p:txBody>
           <a:bodyPr wrap="square" rtlCol="0">
-            <a:noAutofit/>
+            <a:spAutoFit/>
           </a:bodyPr>
           <a:p>
-            <a:r>
-              <a:rPr lang="zh-CN" altLang="en-US" sz="1600"/>
-              <a:t>一对一线程模型：一个用户线程配备一个内核线程（有独立内核栈），内核需要</a:t>
-            </a:r>
-            <a:r>
-              <a:rPr lang="zh-CN" altLang="en-US" sz="1600">
+            <a:pPr marL="285750" indent="-285750" algn="l">
+              <a:buFont typeface="Wingdings" panose="05000000000000000000" charset="0"/>
+              <a:buChar char=""/>
+            </a:pPr>
+            <a:r>
+              <a:rPr lang="zh-CN" altLang="en-US"/>
+              <a:t>设计实现了一个</a:t>
+            </a:r>
+            <a:r>
+              <a:rPr lang="zh-CN" altLang="en-US">
                 <a:solidFill>
                   <a:srgbClr val="FF0000"/>
                 </a:solidFill>
               </a:rPr>
-              <a:t>限制用户线程数量、内核线程数量多，上下文开销大。</a:t>
-            </a:r>
-            <a:endParaRPr lang="zh-CN" altLang="en-US" sz="1600"/>
-          </a:p>
-          <a:p>
-            <a:endParaRPr lang="en-US" altLang="zh-CN" sz="1600"/>
-          </a:p>
-          <a:p>
-            <a:r>
-              <a:rPr lang="zh-CN" altLang="en-US" sz="1600">
-                <a:ea typeface="宋体" charset="0"/>
-              </a:rPr>
-              <a:t>多对多线程模型：每个内核线程服务多个用户线程，</a:t>
-            </a:r>
-            <a:r>
-              <a:rPr lang="zh-CN" altLang="en-US" sz="1600">
+              <a:t>混合内核架构</a:t>
+            </a:r>
+            <a:r>
+              <a:rPr lang="zh-CN" altLang="en-US">
+                <a:solidFill>
+                  <a:schemeClr val="tx1"/>
+                </a:solidFill>
+              </a:rPr>
+              <a:t>；</a:t>
+            </a:r>
+            <a:endParaRPr lang="zh-CN" altLang="en-US"/>
+          </a:p>
+          <a:p>
+            <a:pPr marL="285750" indent="-285750" algn="l">
+              <a:buFont typeface="Wingdings" panose="05000000000000000000" charset="0"/>
+              <a:buChar char=""/>
+            </a:pPr>
+            <a:endParaRPr lang="zh-CN" altLang="en-US"/>
+          </a:p>
+          <a:p>
+            <a:pPr marL="285750" indent="-285750" algn="l">
+              <a:buFont typeface="Wingdings" panose="05000000000000000000" charset="0"/>
+              <a:buChar char=""/>
+            </a:pPr>
+            <a:r>
+              <a:rPr lang="zh-CN" altLang="en-US"/>
+              <a:t>基于Rust无栈异步协程机制和内核服务线程模型实现了一个</a:t>
+            </a:r>
+            <a:r>
+              <a:rPr lang="zh-CN" altLang="en-US">
                 <a:solidFill>
                   <a:srgbClr val="FF0000"/>
                 </a:solidFill>
-                <a:ea typeface="宋体" charset="0"/>
-              </a:rPr>
-              <a:t>节省内存</a:t>
-            </a:r>
-            <a:r>
-              <a:rPr lang="zh-CN" altLang="en-US" sz="1600">
-                <a:ea typeface="宋体" charset="0"/>
-              </a:rPr>
+              </a:rPr>
+              <a:t>多对多线程模型</a:t>
+            </a:r>
+            <a:r>
+              <a:rPr lang="zh-CN" altLang="en-US"/>
+              <a:t>；</a:t>
+            </a:r>
+            <a:endParaRPr lang="zh-CN" altLang="en-US"/>
+          </a:p>
+          <a:p>
+            <a:pPr marL="285750" indent="-285750" algn="l">
+              <a:buFont typeface="Wingdings" panose="05000000000000000000" charset="0"/>
+              <a:buChar char=""/>
+            </a:pPr>
+            <a:endParaRPr lang="zh-CN" altLang="en-US"/>
+          </a:p>
+          <a:p>
+            <a:pPr marL="285750" indent="-285750" algn="l">
+              <a:buFont typeface="Wingdings" panose="05000000000000000000" charset="0"/>
+              <a:buChar char=""/>
+            </a:pPr>
+            <a:r>
+              <a:rPr lang="zh-CN" altLang="en-US"/>
+              <a:t>为了进行对比，实现了宏内核、混合内核两种内核对象，内核可以以</a:t>
+            </a:r>
+            <a:r>
+              <a:rPr lang="zh-CN" altLang="en-US">
+                <a:solidFill>
+                  <a:srgbClr val="FF0000"/>
+                </a:solidFill>
+              </a:rPr>
+              <a:t>两种架构模式运行</a:t>
+            </a:r>
+            <a:r>
+              <a:rPr lang="zh-CN" altLang="en-US"/>
+              <a:t>；</a:t>
+            </a:r>
+            <a:endParaRPr lang="zh-CN" altLang="en-US"/>
+          </a:p>
+          <a:p>
+            <a:pPr marL="285750" indent="-285750" algn="l">
+              <a:buFont typeface="Wingdings" panose="05000000000000000000" charset="0"/>
+              <a:buChar char=""/>
+            </a:pPr>
+            <a:endParaRPr lang="zh-CN" altLang="en-US"/>
+          </a:p>
+          <a:p>
+            <a:pPr marL="285750" indent="-285750" algn="l">
+              <a:buFont typeface="Wingdings" panose="05000000000000000000" charset="0"/>
+              <a:buChar char=""/>
+            </a:pPr>
+            <a:r>
+              <a:rPr lang="zh-CN" altLang="en-US"/>
+              <a:t>直接实现</a:t>
+            </a:r>
+            <a:r>
+              <a:rPr lang="zh-CN" altLang="en-US">
+                <a:solidFill>
+                  <a:srgbClr val="FF0000"/>
+                </a:solidFill>
+              </a:rPr>
+              <a:t>Linux系统调用</a:t>
+            </a:r>
+            <a:r>
+              <a:rPr lang="zh-CN" altLang="en-US"/>
+              <a:t>；</a:t>
+            </a:r>
+            <a:endParaRPr lang="zh-CN" altLang="en-US"/>
+          </a:p>
+          <a:p>
+            <a:pPr marL="285750" indent="-285750" algn="l">
+              <a:buFont typeface="Wingdings" panose="05000000000000000000" charset="0"/>
+              <a:buChar char=""/>
+            </a:pPr>
+            <a:endParaRPr lang="zh-CN" altLang="en-US"/>
+          </a:p>
+          <a:p>
+            <a:pPr marL="285750" indent="-285750" algn="l">
+              <a:buFont typeface="Wingdings" panose="05000000000000000000" charset="0"/>
+              <a:buChar char=""/>
+            </a:pPr>
+            <a:r>
+              <a:rPr lang="zh-CN" altLang="en-US"/>
+              <a:t>初步完成了</a:t>
+            </a:r>
+            <a:r>
+              <a:rPr lang="zh-CN" altLang="en-US">
+                <a:solidFill>
+                  <a:srgbClr val="FF0000"/>
+                </a:solidFill>
+              </a:rPr>
+              <a:t>musl-libc支持</a:t>
+            </a:r>
+            <a:r>
+              <a:rPr lang="zh-CN" altLang="en-US"/>
               <a:t>，</a:t>
             </a:r>
             <a:r>
-              <a:rPr lang="zh-CN" altLang="en-US" sz="1600">
+              <a:rPr lang="zh-CN" altLang="en-US">
                 <a:solidFill>
                   <a:srgbClr val="FF0000"/>
                 </a:solidFill>
-                <a:ea typeface="宋体" charset="0"/>
-              </a:rPr>
-              <a:t>节省上下文切换开销</a:t>
-            </a:r>
-            <a:r>
-              <a:rPr lang="zh-CN" altLang="en-US" sz="1600">
-                <a:ea typeface="宋体" charset="0"/>
-              </a:rPr>
-              <a:t>。</a:t>
-            </a:r>
-            <a:endParaRPr lang="zh-CN" altLang="en-US" sz="1600">
-              <a:ea typeface="宋体" charset="0"/>
-            </a:endParaRPr>
+              </a:rPr>
+              <a:t>支持c语言应用程序</a:t>
+            </a:r>
+            <a:r>
+              <a:rPr lang="zh-CN" altLang="en-US"/>
+              <a:t>（静态链接）；</a:t>
+            </a:r>
+            <a:endParaRPr lang="zh-CN" altLang="en-US"/>
+          </a:p>
+          <a:p>
+            <a:pPr marL="285750" indent="-285750" algn="l">
+              <a:buFont typeface="Wingdings" panose="05000000000000000000" charset="0"/>
+              <a:buChar char=""/>
+            </a:pPr>
+            <a:endParaRPr lang="zh-CN" altLang="en-US"/>
+          </a:p>
+          <a:p>
+            <a:pPr marL="285750" indent="-285750" algn="l">
+              <a:buFont typeface="Wingdings" panose="05000000000000000000" charset="0"/>
+              <a:buChar char=""/>
+            </a:pPr>
+            <a:r>
+              <a:rPr lang="zh-CN" altLang="en-US"/>
+              <a:t>正在逐步完成对sqlite3, busybox等典型Linux应用程序的支持；</a:t>
+            </a:r>
+            <a:endParaRPr lang="zh-CN" altLang="en-US"/>
           </a:p>
         </p:txBody>
       </p:sp>
@@ -4958,14 +4569,11 @@
           <a:bodyPr wrap="square" rtlCol="0" anchor="ctr"/>
           <a:lstStyle/>
           <a:p>
-            <a:pPr marL="0" algn="l">
-              <a:buClrTx/>
-              <a:buSzTx/>
-              <a:buFontTx/>
+            <a:pPr marL="0" indent="0" algn="l">
               <a:buNone/>
             </a:pPr>
             <a:r>
-              <a:rPr lang="zh-CN" altLang="x-none" sz="2660" b="1" dirty="0">
+              <a:rPr lang="en-US" sz="2660" b="1" dirty="0">
                 <a:solidFill>
                   <a:srgbClr val="1C3C5F"/>
                 </a:solidFill>
@@ -4973,251 +4581,60 @@
                 <a:ea typeface="微软雅黑" pitchFamily="34" charset="-122"/>
                 <a:cs typeface="微软雅黑" pitchFamily="34" charset="-120"/>
               </a:rPr>
-              <a:t>相关工作：基于Rust的内核设计</a:t>
-            </a:r>
-            <a:endParaRPr lang="zh-CN" altLang="x-none" sz="2660" b="1" dirty="0">
-              <a:solidFill>
-                <a:srgbClr val="1C3C5F"/>
-              </a:solidFill>
-              <a:latin typeface="微软雅黑" pitchFamily="34" charset="0"/>
-              <a:ea typeface="微软雅黑" pitchFamily="34" charset="-122"/>
-              <a:cs typeface="微软雅黑" pitchFamily="34" charset="-120"/>
-            </a:endParaRPr>
-          </a:p>
-        </p:txBody>
-      </p:sp>
-      <p:sp>
-        <p:nvSpPr>
-          <p:cNvPr id="6" name="文本框 5"/>
-          <p:cNvSpPr txBox="1"/>
+              <a:t>本文工作</a:t>
+            </a:r>
+            <a:endParaRPr lang="en-US" sz="2660" dirty="0"/>
+          </a:p>
+        </p:txBody>
+      </p:sp>
+      <p:pic>
+        <p:nvPicPr>
+          <p:cNvPr id="5" name="图片 4"/>
+          <p:cNvPicPr>
+            <a:picLocks noChangeAspect="1"/>
+          </p:cNvPicPr>
           <p:nvPr/>
-        </p:nvSpPr>
+        </p:nvPicPr>
+        <p:blipFill>
+          <a:blip r:embed="rId2"/>
+          <a:stretch>
+            <a:fillRect/>
+          </a:stretch>
+        </p:blipFill>
         <p:spPr>
           <a:xfrm>
-            <a:off x="720725" y="1074420"/>
-            <a:ext cx="8200390" cy="3806190"/>
+            <a:off x="256540" y="850900"/>
+            <a:ext cx="4102100" cy="3759200"/>
           </a:xfrm>
           <a:prstGeom prst="rect">
             <a:avLst/>
           </a:prstGeom>
-          <a:noFill/>
         </p:spPr>
-        <p:txBody>
-          <a:bodyPr wrap="square" rtlCol="0">
-            <a:noAutofit/>
-          </a:bodyPr>
-          <a:p>
-            <a:pPr marL="285750" indent="-285750">
-              <a:buFont typeface="Arial" panose="02080604020202020204" pitchFamily="34" charset="0"/>
-              <a:buChar char="•"/>
-            </a:pPr>
-            <a:r>
-              <a:rPr lang="en-US" altLang="zh-CN"/>
-              <a:t>Theseus</a:t>
-            </a:r>
-            <a:r>
-              <a:rPr lang="zh-CN" altLang="en-US">
-                <a:ea typeface="宋体" charset="0"/>
-              </a:rPr>
-              <a:t>：使用</a:t>
-            </a:r>
-            <a:r>
-              <a:rPr lang="en-US" altLang="zh-CN">
-                <a:ea typeface="宋体" charset="0"/>
-              </a:rPr>
-              <a:t>Rust</a:t>
-            </a:r>
-            <a:r>
-              <a:rPr lang="zh-CN" altLang="en-US">
-                <a:latin typeface="华文楷体" charset="0"/>
-                <a:ea typeface="华文楷体" charset="0"/>
-              </a:rPr>
-              <a:t>内存</a:t>
-            </a:r>
-            <a:r>
-              <a:rPr lang="zh-CN" altLang="en-US">
-                <a:ea typeface="宋体" charset="0"/>
-              </a:rPr>
-              <a:t>安全特性实现单地址空间隔离。</a:t>
-            </a:r>
-            <a:endParaRPr lang="zh-CN" altLang="en-US">
-              <a:ea typeface="宋体" charset="0"/>
-            </a:endParaRPr>
-          </a:p>
-          <a:p>
-            <a:pPr marL="285750" indent="-285750">
-              <a:buFont typeface="Arial" panose="02080604020202020204" pitchFamily="34" charset="0"/>
-              <a:buChar char="•"/>
-            </a:pPr>
-            <a:endParaRPr lang="zh-CN" altLang="en-US">
-              <a:ea typeface="宋体" charset="0"/>
-            </a:endParaRPr>
-          </a:p>
-          <a:p>
-            <a:pPr marL="285750" indent="-285750">
-              <a:buFont typeface="Arial" panose="02080604020202020204" pitchFamily="34" charset="0"/>
-              <a:buChar char="•"/>
-            </a:pPr>
-            <a:endParaRPr lang="zh-CN" altLang="en-US">
-              <a:ea typeface="宋体" charset="0"/>
-            </a:endParaRPr>
-          </a:p>
-          <a:p>
-            <a:pPr marL="285750" indent="-285750">
-              <a:buFont typeface="Arial" panose="02080604020202020204" pitchFamily="34" charset="0"/>
-              <a:buChar char="•"/>
-            </a:pPr>
-            <a:r>
-              <a:rPr lang="en-US" altLang="zh-CN">
-                <a:ea typeface="宋体" charset="0"/>
-              </a:rPr>
-              <a:t>Redox</a:t>
-            </a:r>
-            <a:r>
-              <a:rPr lang="zh-CN" altLang="en-US">
-                <a:ea typeface="宋体" charset="0"/>
-              </a:rPr>
-              <a:t>：使用</a:t>
-            </a:r>
-            <a:r>
-              <a:rPr lang="en-US" altLang="zh-CN">
-                <a:ea typeface="宋体" charset="0"/>
-              </a:rPr>
-              <a:t>Rust</a:t>
-            </a:r>
-            <a:r>
-              <a:rPr lang="zh-CN" altLang="en-US">
-                <a:ea typeface="宋体" charset="0"/>
-              </a:rPr>
-              <a:t>实现的微内核。</a:t>
-            </a:r>
-            <a:endParaRPr lang="zh-CN" altLang="en-US">
-              <a:ea typeface="宋体" charset="0"/>
-            </a:endParaRPr>
-          </a:p>
-          <a:p>
-            <a:pPr marL="285750" indent="-285750">
-              <a:buFont typeface="Arial" panose="02080604020202020204" pitchFamily="34" charset="0"/>
-              <a:buChar char="•"/>
-            </a:pPr>
-            <a:endParaRPr lang="zh-CN" altLang="en-US">
-              <a:ea typeface="宋体" charset="0"/>
-            </a:endParaRPr>
-          </a:p>
-          <a:p>
-            <a:pPr marL="285750" indent="-285750">
-              <a:buFont typeface="Arial" panose="02080604020202020204" pitchFamily="34" charset="0"/>
-              <a:buChar char="•"/>
-            </a:pPr>
-            <a:endParaRPr lang="zh-CN" altLang="en-US">
-              <a:ea typeface="宋体" charset="0"/>
-            </a:endParaRPr>
-          </a:p>
-          <a:p>
-            <a:pPr marL="285750" indent="-285750">
-              <a:buFont typeface="Arial" panose="02080604020202020204" pitchFamily="34" charset="0"/>
-              <a:buChar char="•"/>
-            </a:pPr>
-            <a:r>
-              <a:rPr lang="en-US">
-                <a:ea typeface="宋体" charset="0"/>
-              </a:rPr>
-              <a:t>Asterinas</a:t>
-            </a:r>
-            <a:r>
-              <a:rPr lang="zh-CN" altLang="en-US">
-                <a:ea typeface="宋体" charset="0"/>
-              </a:rPr>
-              <a:t>：使用</a:t>
-            </a:r>
-            <a:r>
-              <a:rPr lang="en-US" altLang="zh-CN">
-                <a:ea typeface="宋体" charset="0"/>
-              </a:rPr>
-              <a:t>Rust</a:t>
-            </a:r>
-            <a:r>
-              <a:rPr lang="zh-CN" altLang="en-US">
-                <a:ea typeface="宋体" charset="0"/>
-              </a:rPr>
-              <a:t>重新实现</a:t>
-            </a:r>
-            <a:r>
-              <a:rPr lang="en-US" altLang="zh-CN">
-                <a:ea typeface="宋体" charset="0"/>
-              </a:rPr>
-              <a:t>Linux</a:t>
-            </a:r>
-            <a:r>
-              <a:rPr lang="zh-CN" altLang="en-US">
-                <a:ea typeface="宋体" charset="0"/>
-              </a:rPr>
-              <a:t>。利用内存安全特性增强可靠性。</a:t>
-            </a:r>
-            <a:endParaRPr lang="zh-CN" altLang="en-US">
-              <a:ea typeface="宋体" charset="0"/>
-            </a:endParaRPr>
-          </a:p>
-          <a:p>
-            <a:pPr marL="285750" indent="-285750">
-              <a:buFont typeface="Arial" panose="02080604020202020204" pitchFamily="34" charset="0"/>
-              <a:buChar char="•"/>
-            </a:pPr>
-            <a:endParaRPr lang="zh-CN" altLang="en-US">
-              <a:ea typeface="宋体" charset="0"/>
-            </a:endParaRPr>
-          </a:p>
-          <a:p>
-            <a:pPr marL="285750" indent="-285750">
-              <a:buFont typeface="Arial" panose="02080604020202020204" pitchFamily="34" charset="0"/>
-              <a:buChar char="•"/>
-            </a:pPr>
-            <a:endParaRPr lang="zh-CN" altLang="en-US">
-              <a:ea typeface="宋体" charset="0"/>
-            </a:endParaRPr>
-          </a:p>
-          <a:p>
-            <a:pPr marL="285750" indent="-285750">
-              <a:buFont typeface="Arial" panose="02080604020202020204" pitchFamily="34" charset="0"/>
-              <a:buChar char="•"/>
-            </a:pPr>
-            <a:r>
-              <a:rPr lang="zh-CN" altLang="en-US">
-                <a:ea typeface="宋体" charset="0"/>
-              </a:rPr>
-              <a:t>总结：多为利用内存安全特性避免内存缺陷。而</a:t>
-            </a:r>
-            <a:r>
-              <a:rPr lang="zh-CN" altLang="en-US">
-                <a:solidFill>
-                  <a:srgbClr val="FF0000"/>
-                </a:solidFill>
-                <a:ea typeface="宋体" charset="0"/>
-              </a:rPr>
-              <a:t>没有解决其它缺陷</a:t>
-            </a:r>
-            <a:r>
-              <a:rPr lang="zh-CN" altLang="en-US">
-                <a:ea typeface="宋体" charset="0"/>
-              </a:rPr>
-              <a:t>(如逻辑错误触发 panic)。</a:t>
-            </a:r>
-            <a:endParaRPr lang="zh-CN" altLang="en-US">
-              <a:ea typeface="宋体" charset="0"/>
-            </a:endParaRPr>
-          </a:p>
-          <a:p>
-            <a:endParaRPr lang="zh-CN" altLang="en-US">
-              <a:ea typeface="宋体" charset="0"/>
-            </a:endParaRPr>
-          </a:p>
-          <a:p>
-            <a:endParaRPr lang="zh-CN" altLang="en-US">
-              <a:ea typeface="宋体" charset="0"/>
-            </a:endParaRPr>
-          </a:p>
-        </p:txBody>
-      </p:sp>
+      </p:pic>
+      <p:pic>
+        <p:nvPicPr>
+          <p:cNvPr id="6" name="图片 5"/>
+          <p:cNvPicPr>
+            <a:picLocks noChangeAspect="1"/>
+          </p:cNvPicPr>
+          <p:nvPr/>
+        </p:nvPicPr>
+        <p:blipFill>
+          <a:blip r:embed="rId3"/>
+          <a:stretch>
+            <a:fillRect/>
+          </a:stretch>
+        </p:blipFill>
+        <p:spPr>
+          <a:xfrm>
+            <a:off x="4561840" y="850900"/>
+            <a:ext cx="4206875" cy="3759200"/>
+          </a:xfrm>
+          <a:prstGeom prst="rect">
+            <a:avLst/>
+          </a:prstGeom>
+        </p:spPr>
+      </p:pic>
     </p:spTree>
   </p:cSld>
   <p:clrMapOvr>
@@ -5243,40 +4660,16 @@
           <a:chExt cx="0" cy="0"/>
         </a:xfrm>
       </p:grpSpPr>
-      <p:pic>
-        <p:nvPicPr>
-          <p:cNvPr id="2" name="Image 0" descr="preencoded.png"/>
-          <p:cNvPicPr>
-            <a:picLocks noChangeAspect="1"/>
-          </p:cNvPicPr>
+      <p:sp>
+        <p:nvSpPr>
+          <p:cNvPr id="2" name="Text 0"/>
+          <p:cNvSpPr/>
           <p:nvPr/>
-        </p:nvPicPr>
-        <p:blipFill>
-          <a:blip r:embed="rId1"/>
-          <a:stretch>
-            <a:fillRect/>
-          </a:stretch>
-        </p:blipFill>
+        </p:nvSpPr>
         <p:spPr>
           <a:xfrm>
-            <a:off x="0" y="0"/>
-            <a:ext cx="9144000" cy="1276350"/>
-          </a:xfrm>
-          <a:prstGeom prst="rect">
-            <a:avLst/>
-          </a:prstGeom>
-        </p:spPr>
-      </p:pic>
-      <p:sp>
-        <p:nvSpPr>
-          <p:cNvPr id="3" name="Text 0"/>
-          <p:cNvSpPr/>
-          <p:nvPr/>
-        </p:nvSpPr>
-        <p:spPr>
-          <a:xfrm>
-            <a:off x="962025" y="133350"/>
-            <a:ext cx="7806690" cy="552450"/>
+            <a:off x="509588" y="1952625"/>
+            <a:ext cx="1452563" cy="1243013"/>
           </a:xfrm>
           <a:prstGeom prst="rect">
             <a:avLst/>
@@ -5287,41 +4680,34 @@
           <a:bodyPr wrap="square" rtlCol="0" anchor="ctr"/>
           <a:lstStyle/>
           <a:p>
-            <a:pPr marL="0" indent="0" algn="l">
+            <a:pPr marL="0" indent="0" algn="ctr">
               <a:buNone/>
             </a:pPr>
             <a:r>
-              <a:rPr lang="zh-CN" altLang="en-US" sz="2660" b="1" dirty="0">
-                <a:solidFill>
-                  <a:srgbClr val="1C3C5F"/>
+              <a:rPr lang="en-US" sz="5760" b="1" dirty="0">
+                <a:solidFill>
+                  <a:srgbClr val="FFFFFF"/>
                 </a:solidFill>
                 <a:latin typeface="微软雅黑" pitchFamily="34" charset="0"/>
                 <a:ea typeface="微软雅黑" pitchFamily="34" charset="-122"/>
                 <a:cs typeface="微软雅黑" pitchFamily="34" charset="-120"/>
               </a:rPr>
-              <a:t>绪论</a:t>
-            </a:r>
-            <a:endParaRPr lang="zh-CN" altLang="en-US" sz="2660" b="1" dirty="0">
-              <a:solidFill>
-                <a:srgbClr val="1C3C5F"/>
-              </a:solidFill>
-              <a:latin typeface="微软雅黑" pitchFamily="34" charset="0"/>
-              <a:ea typeface="微软雅黑" pitchFamily="34" charset="-122"/>
-              <a:cs typeface="微软雅黑" pitchFamily="34" charset="-120"/>
-            </a:endParaRPr>
-          </a:p>
-        </p:txBody>
-      </p:sp>
-      <p:sp>
-        <p:nvSpPr>
-          <p:cNvPr id="4" name="Text 1"/>
+              <a:t>02</a:t>
+            </a:r>
+            <a:endParaRPr lang="en-US" sz="5760" dirty="0"/>
+          </a:p>
+        </p:txBody>
+      </p:sp>
+      <p:sp>
+        <p:nvSpPr>
+          <p:cNvPr id="3" name="Text 1"/>
           <p:cNvSpPr/>
           <p:nvPr/>
         </p:nvSpPr>
         <p:spPr>
           <a:xfrm>
-            <a:off x="904875" y="653415"/>
-            <a:ext cx="7715250" cy="2030730"/>
+            <a:off x="3267075" y="2128838"/>
+            <a:ext cx="5101590" cy="1647825"/>
           </a:xfrm>
           <a:prstGeom prst="rect">
             <a:avLst/>
@@ -5332,97 +4718,27 @@
           <a:bodyPr wrap="square" rtlCol="0" anchor="t"/>
           <a:lstStyle/>
           <a:p>
-            <a:pPr marL="190500" indent="-190500" algn="l">
-              <a:lnSpc>
-                <a:spcPct val="150000"/>
-              </a:lnSpc>
-              <a:buSzPct val="100000"/>
-              <a:buChar char="•"/>
-            </a:pPr>
-            <a:r>
-              <a:rPr lang="zh-CN" altLang="en-US" dirty="0">
-                <a:solidFill>
-                  <a:schemeClr val="tx1"/>
-                </a:solidFill>
-                <a:latin typeface="微软雅黑" pitchFamily="34" charset="0"/>
-                <a:ea typeface="微软雅黑" pitchFamily="34" charset="-122"/>
-                <a:cs typeface="微软雅黑" pitchFamily="34" charset="-120"/>
-              </a:rPr>
-              <a:t>研究背景</a:t>
-            </a:r>
-            <a:endParaRPr lang="en-US" dirty="0">
+            <a:pPr marL="0" indent="0" algn="l">
+              <a:buNone/>
+            </a:pPr>
+            <a:r>
+              <a:rPr lang="zh-CN" altLang="en-US" sz="3500" b="1" dirty="0">
+                <a:solidFill>
+                  <a:srgbClr val="1C3C5F"/>
+                </a:solidFill>
+                <a:latin typeface="微软雅黑" pitchFamily="34" charset="0"/>
+                <a:ea typeface="宋体" charset="0"/>
+                <a:cs typeface="微软雅黑" pitchFamily="34" charset="-120"/>
+              </a:rPr>
+              <a:t>可靠性增强内核架构设计</a:t>
+            </a:r>
+            <a:endParaRPr lang="zh-CN" altLang="en-US" sz="3500" b="1" dirty="0">
               <a:solidFill>
-                <a:schemeClr val="tx1"/>
+                <a:srgbClr val="1C3C5F"/>
               </a:solidFill>
               <a:latin typeface="微软雅黑" pitchFamily="34" charset="0"/>
-              <a:ea typeface="微软雅黑" pitchFamily="34" charset="-122"/>
+              <a:ea typeface="宋体" charset="0"/>
               <a:cs typeface="微软雅黑" pitchFamily="34" charset="-120"/>
-            </a:endParaRPr>
-          </a:p>
-          <a:p>
-            <a:pPr marL="190500" indent="-190500" algn="l">
-              <a:lnSpc>
-                <a:spcPct val="150000"/>
-              </a:lnSpc>
-              <a:buSzPct val="100000"/>
-              <a:buChar char="•"/>
-            </a:pPr>
-            <a:r>
-              <a:rPr lang="zh-CN" altLang="en-US" dirty="0">
-                <a:solidFill>
-                  <a:schemeClr val="tx1"/>
-                </a:solidFill>
-                <a:ea typeface="宋体" charset="0"/>
-              </a:rPr>
-              <a:t>相关工作</a:t>
-            </a:r>
-            <a:endParaRPr lang="zh-CN" altLang="en-US" dirty="0">
-              <a:solidFill>
-                <a:schemeClr val="tx1"/>
-              </a:solidFill>
-              <a:ea typeface="宋体" charset="0"/>
-            </a:endParaRPr>
-          </a:p>
-          <a:p>
-            <a:pPr marL="190500" indent="-190500" algn="l">
-              <a:lnSpc>
-                <a:spcPct val="150000"/>
-              </a:lnSpc>
-              <a:buSzPct val="100000"/>
-              <a:buChar char="•"/>
-            </a:pPr>
-            <a:r>
-              <a:rPr lang="zh-CN" altLang="en-US" dirty="0">
-                <a:solidFill>
-                  <a:srgbClr val="FF0000"/>
-                </a:solidFill>
-                <a:ea typeface="宋体" charset="0"/>
-              </a:rPr>
-              <a:t>研究目的</a:t>
-            </a:r>
-            <a:endParaRPr lang="zh-CN" altLang="en-US" dirty="0">
-              <a:solidFill>
-                <a:srgbClr val="FF0000"/>
-              </a:solidFill>
-              <a:ea typeface="宋体" charset="0"/>
-            </a:endParaRPr>
-          </a:p>
-          <a:p>
-            <a:pPr marL="190500" indent="-190500" algn="l">
-              <a:lnSpc>
-                <a:spcPct val="150000"/>
-              </a:lnSpc>
-              <a:buSzPct val="100000"/>
-              <a:buChar char="•"/>
-            </a:pPr>
-            <a:r>
-              <a:rPr lang="zh-CN" altLang="en-US" dirty="0">
-                <a:ea typeface="宋体" charset="0"/>
-              </a:rPr>
-              <a:t>本文工作</a:t>
-            </a:r>
-            <a:endParaRPr lang="zh-CN" altLang="en-US" dirty="0">
-              <a:ea typeface="宋体" charset="0"/>
             </a:endParaRPr>
           </a:p>
         </p:txBody>
@@ -5508,32 +4824,40 @@
                 <a:ea typeface="微软雅黑" pitchFamily="34" charset="-122"/>
                 <a:cs typeface="微软雅黑" pitchFamily="34" charset="-120"/>
               </a:rPr>
-              <a:t>研究目的</a:t>
+              <a:t>可靠性增强</a:t>
+            </a:r>
+            <a:r>
+              <a:rPr lang="zh-CN" altLang="en-US" sz="2660" b="1" dirty="0">
+                <a:solidFill>
+                  <a:srgbClr val="1C3C5F"/>
+                </a:solidFill>
+                <a:latin typeface="微软雅黑" pitchFamily="34" charset="0"/>
+                <a:ea typeface="宋体" charset="0"/>
+                <a:cs typeface="微软雅黑" pitchFamily="34" charset="-120"/>
+              </a:rPr>
+              <a:t>内核架构</a:t>
+            </a:r>
+            <a:r>
+              <a:rPr lang="en-US" sz="2660" b="1" dirty="0">
+                <a:solidFill>
+                  <a:srgbClr val="1C3C5F"/>
+                </a:solidFill>
+                <a:latin typeface="微软雅黑" pitchFamily="34" charset="0"/>
+                <a:ea typeface="微软雅黑" pitchFamily="34" charset="-122"/>
+                <a:cs typeface="微软雅黑" pitchFamily="34" charset="-120"/>
+              </a:rPr>
+              <a:t>设计</a:t>
             </a:r>
             <a:endParaRPr lang="en-US" sz="2660" dirty="0"/>
           </a:p>
         </p:txBody>
       </p:sp>
-      <p:pic>
-        <p:nvPicPr>
-          <p:cNvPr id="4" name="Image 1" descr="preencoded.png"/>
-          <p:cNvPicPr>
-            <a:picLocks noChangeAspect="1"/>
-          </p:cNvPicPr>
+      <p:sp>
+        <p:nvSpPr>
+          <p:cNvPr id="4" name="Text 1"/>
+          <p:cNvSpPr/>
           <p:nvPr/>
-        </p:nvPicPr>
-        <p:blipFill>
-          <a:blip r:embed="rId2">
-            <a:extLst>
-              <a:ext uri="{96DAC541-7B7A-43D3-8B79-37D633B846F1}">
-                <asvg:svgBlip xmlns:asvg="http://schemas.microsoft.com/office/drawing/2016/SVG/main" r:embed="rId3"/>
-              </a:ext>
-            </a:extLst>
-          </a:blip>
-          <a:stretch>
-            <a:fillRect/>
-          </a:stretch>
-        </p:blipFill>
+        </p:nvSpPr>
         <p:spPr>
           <a:xfrm>
             <a:off x="904875" y="1062038"/>
@@ -5542,230 +4866,174 @@
           <a:prstGeom prst="rect">
             <a:avLst/>
           </a:prstGeom>
-        </p:spPr>
-      </p:pic>
-      <p:sp>
-        <p:nvSpPr>
-          <p:cNvPr id="5" name="Text 1"/>
-          <p:cNvSpPr/>
-          <p:nvPr/>
-        </p:nvSpPr>
-        <p:spPr>
-          <a:xfrm>
-            <a:off x="625475" y="846455"/>
-            <a:ext cx="8142605" cy="3478530"/>
-          </a:xfrm>
-          <a:prstGeom prst="rect">
-            <a:avLst/>
-          </a:prstGeom>
           <a:noFill/>
         </p:spPr>
         <p:txBody>
-          <a:bodyPr wrap="square" rtlCol="0" anchor="ctr"/>
-          <a:lstStyle/>
-          <a:p>
-            <a:pPr marL="285750" indent="-285750" algn="l">
+          <a:bodyPr wrap="square" rtlCol="0" anchor="t"/>
+          <a:lstStyle/>
+          <a:p>
+            <a:pPr marL="190500" indent="-190500" algn="l">
               <a:lnSpc>
                 <a:spcPct val="150000"/>
               </a:lnSpc>
-              <a:buFont typeface="Arial" panose="02080604020202020204" pitchFamily="34" charset="0"/>
+              <a:buSzPct val="100000"/>
               <a:buChar char="•"/>
             </a:pPr>
             <a:r>
-              <a:rPr lang="zh-CN" dirty="0">
+              <a:rPr lang="zh-CN" altLang="en-US" b="1" dirty="0">
+                <a:solidFill>
+                  <a:schemeClr val="tx1"/>
+                </a:solidFill>
+                <a:latin typeface="微软雅黑" pitchFamily="34" charset="0"/>
+                <a:ea typeface="宋体" charset="0"/>
+                <a:cs typeface="微软雅黑" pitchFamily="34" charset="-120"/>
+                <a:sym typeface="+mn-ea"/>
+              </a:rPr>
+              <a:t>项目总体架构</a:t>
+            </a:r>
+            <a:endParaRPr lang="zh-CN" altLang="en-US" b="1" dirty="0">
+              <a:solidFill>
+                <a:schemeClr val="tx1"/>
+              </a:solidFill>
+              <a:latin typeface="微软雅黑" pitchFamily="34" charset="0"/>
+              <a:ea typeface="宋体" charset="0"/>
+              <a:cs typeface="微软雅黑" pitchFamily="34" charset="-120"/>
+              <a:sym typeface="+mn-ea"/>
+            </a:endParaRPr>
+          </a:p>
+          <a:p>
+            <a:pPr marL="190500" indent="-190500" algn="l">
+              <a:lnSpc>
+                <a:spcPct val="150000"/>
+              </a:lnSpc>
+              <a:buSzPct val="100000"/>
+              <a:buChar char="•"/>
+            </a:pPr>
+            <a:endParaRPr lang="en-US" b="1" dirty="0">
+              <a:solidFill>
+                <a:srgbClr val="FF0000"/>
+              </a:solidFill>
+              <a:latin typeface="微软雅黑" pitchFamily="34" charset="0"/>
+              <a:ea typeface="微软雅黑" pitchFamily="34" charset="-122"/>
+              <a:cs typeface="微软雅黑" pitchFamily="34" charset="-120"/>
+              <a:sym typeface="+mn-ea"/>
+            </a:endParaRPr>
+          </a:p>
+          <a:p>
+            <a:pPr marL="190500" indent="-190500" algn="l">
+              <a:lnSpc>
+                <a:spcPct val="150000"/>
+              </a:lnSpc>
+              <a:buSzPct val="100000"/>
+              <a:buChar char="•"/>
+            </a:pPr>
+            <a:endParaRPr lang="en-US" b="1" dirty="0">
+              <a:solidFill>
+                <a:srgbClr val="FF0000"/>
+              </a:solidFill>
+              <a:latin typeface="微软雅黑" pitchFamily="34" charset="0"/>
+              <a:ea typeface="微软雅黑" pitchFamily="34" charset="-122"/>
+              <a:cs typeface="微软雅黑" pitchFamily="34" charset="-120"/>
+              <a:sym typeface="+mn-ea"/>
+            </a:endParaRPr>
+          </a:p>
+          <a:p>
+            <a:pPr marL="190500" indent="-190500" algn="l">
+              <a:lnSpc>
+                <a:spcPct val="150000"/>
+              </a:lnSpc>
+              <a:buSzPct val="100000"/>
+              <a:buChar char="•"/>
+            </a:pPr>
+            <a:r>
+              <a:rPr lang="en-US" b="1" dirty="0">
+                <a:solidFill>
+                  <a:schemeClr val="tx1"/>
+                </a:solidFill>
                 <a:latin typeface="微软雅黑" pitchFamily="34" charset="0"/>
                 <a:ea typeface="微软雅黑" pitchFamily="34" charset="-122"/>
                 <a:cs typeface="微软雅黑" pitchFamily="34" charset="-120"/>
-              </a:rPr>
-              <a:t>实现一个混合内核，</a:t>
-            </a:r>
-            <a:r>
-              <a:rPr dirty="0">
-                <a:latin typeface="微软雅黑" pitchFamily="34" charset="0"/>
-                <a:ea typeface="微软雅黑" pitchFamily="34" charset="-122"/>
-                <a:cs typeface="微软雅黑" pitchFamily="34" charset="-120"/>
-              </a:rPr>
-              <a:t>内存安全特性</a:t>
-            </a:r>
-            <a:r>
-              <a:rPr dirty="0">
-                <a:solidFill>
-                  <a:srgbClr val="FF0000"/>
-                </a:solidFill>
-                <a:latin typeface="微软雅黑" pitchFamily="34" charset="0"/>
-                <a:ea typeface="微软雅黑" pitchFamily="34" charset="-122"/>
-                <a:cs typeface="微软雅黑" pitchFamily="34" charset="-120"/>
-              </a:rPr>
-              <a:t>代替传统地址空间隔离</a:t>
-            </a:r>
-            <a:r>
-              <a:rPr dirty="0">
-                <a:latin typeface="微软雅黑" pitchFamily="34" charset="0"/>
-                <a:ea typeface="微软雅黑" pitchFamily="34" charset="-122"/>
-                <a:cs typeface="微软雅黑" pitchFamily="34" charset="-120"/>
-              </a:rPr>
-              <a:t>,保证</a:t>
-            </a:r>
-            <a:r>
-              <a:rPr dirty="0">
-                <a:solidFill>
-                  <a:srgbClr val="FF0000"/>
-                </a:solidFill>
-                <a:latin typeface="微软雅黑" pitchFamily="34" charset="0"/>
-                <a:ea typeface="微软雅黑" pitchFamily="34" charset="-122"/>
-                <a:cs typeface="微软雅黑" pitchFamily="34" charset="-120"/>
-              </a:rPr>
-              <a:t>服务间隔离</a:t>
-            </a:r>
-            <a:r>
-              <a:rPr dirty="0">
-                <a:latin typeface="微软雅黑" pitchFamily="34" charset="0"/>
-                <a:ea typeface="微软雅黑" pitchFamily="34" charset="-122"/>
-                <a:cs typeface="微软雅黑" pitchFamily="34" charset="-120"/>
-              </a:rPr>
-              <a:t>性的同时,</a:t>
-            </a:r>
-            <a:r>
-              <a:rPr dirty="0">
-                <a:solidFill>
-                  <a:srgbClr val="FF0000"/>
-                </a:solidFill>
-                <a:latin typeface="微软雅黑" pitchFamily="34" charset="0"/>
-                <a:ea typeface="微软雅黑" pitchFamily="34" charset="-122"/>
-                <a:cs typeface="微软雅黑" pitchFamily="34" charset="-120"/>
-              </a:rPr>
-              <a:t>避免IPC 产生的性能开销</a:t>
-            </a:r>
-            <a:r>
-              <a:rPr dirty="0">
-                <a:latin typeface="微软雅黑" pitchFamily="34" charset="0"/>
-                <a:ea typeface="微软雅黑" pitchFamily="34" charset="-122"/>
-                <a:cs typeface="微软雅黑" pitchFamily="34" charset="-120"/>
-              </a:rPr>
-              <a:t>;</a:t>
-            </a:r>
-            <a:endParaRPr dirty="0">
+                <a:sym typeface="+mn-ea"/>
+              </a:rPr>
+              <a:t>多对多线程模型</a:t>
+            </a:r>
+            <a:r>
+              <a:rPr lang="zh-CN" altLang="en-US" b="1" dirty="0">
+                <a:solidFill>
+                  <a:schemeClr val="tx1"/>
+                </a:solidFill>
+                <a:latin typeface="微软雅黑" pitchFamily="34" charset="0"/>
+                <a:ea typeface="宋体" charset="0"/>
+                <a:cs typeface="微软雅黑" pitchFamily="34" charset="-120"/>
+                <a:sym typeface="+mn-ea"/>
+              </a:rPr>
+              <a:t>的混合内核架构</a:t>
+            </a:r>
+            <a:endParaRPr lang="en-US" b="1" dirty="0">
+              <a:solidFill>
+                <a:schemeClr val="tx1"/>
+              </a:solidFill>
+              <a:latin typeface="微软雅黑" pitchFamily="34" charset="0"/>
+              <a:ea typeface="微软雅黑" pitchFamily="34" charset="-122"/>
+              <a:cs typeface="微软雅黑" pitchFamily="34" charset="-120"/>
+              <a:sym typeface="+mn-ea"/>
+            </a:endParaRPr>
+          </a:p>
+          <a:p>
+            <a:pPr marL="190500" indent="-190500" algn="l">
+              <a:lnSpc>
+                <a:spcPct val="150000"/>
+              </a:lnSpc>
+              <a:buSzPct val="100000"/>
+              <a:buChar char="•"/>
+            </a:pPr>
+            <a:endParaRPr lang="en-US" b="1" dirty="0">
+              <a:solidFill>
+                <a:srgbClr val="383838"/>
+              </a:solidFill>
+              <a:latin typeface="微软雅黑" pitchFamily="34" charset="0"/>
+              <a:ea typeface="微软雅黑" pitchFamily="34" charset="-122"/>
+              <a:cs typeface="微软雅黑" pitchFamily="34" charset="-120"/>
+              <a:sym typeface="+mn-ea"/>
+            </a:endParaRPr>
+          </a:p>
+          <a:p>
+            <a:pPr marL="190500" indent="-190500" algn="l">
+              <a:lnSpc>
+                <a:spcPct val="150000"/>
+              </a:lnSpc>
+              <a:buSzPct val="100000"/>
+              <a:buChar char="•"/>
+            </a:pPr>
+            <a:endParaRPr lang="en-US" b="1" dirty="0">
+              <a:solidFill>
+                <a:srgbClr val="383838"/>
+              </a:solidFill>
               <a:latin typeface="微软雅黑" pitchFamily="34" charset="0"/>
               <a:ea typeface="微软雅黑" pitchFamily="34" charset="-122"/>
               <a:cs typeface="微软雅黑" pitchFamily="34" charset="-120"/>
             </a:endParaRPr>
           </a:p>
           <a:p>
-            <a:pPr marL="285750" indent="-285750" algn="l">
+            <a:pPr marL="190500" indent="-190500" algn="l">
               <a:lnSpc>
                 <a:spcPct val="150000"/>
               </a:lnSpc>
-              <a:buFont typeface="Arial" panose="02080604020202020204" pitchFamily="34" charset="0"/>
+              <a:buSzPct val="100000"/>
               <a:buChar char="•"/>
             </a:pPr>
-            <a:endParaRPr dirty="0">
-              <a:latin typeface="微软雅黑" pitchFamily="34" charset="0"/>
-              <a:ea typeface="微软雅黑" pitchFamily="34" charset="-122"/>
-              <a:cs typeface="微软雅黑" pitchFamily="34" charset="-120"/>
-            </a:endParaRPr>
-          </a:p>
-          <a:p>
-            <a:pPr marL="285750" indent="-285750" algn="l">
-              <a:lnSpc>
-                <a:spcPct val="150000"/>
-              </a:lnSpc>
-              <a:buFont typeface="Arial" panose="02080604020202020204" pitchFamily="34" charset="0"/>
-              <a:buChar char="•"/>
-            </a:pPr>
-            <a:r>
-              <a:rPr dirty="0">
+            <a:r>
+              <a:rPr lang="en-US" b="1" dirty="0">
+                <a:solidFill>
+                  <a:srgbClr val="383838"/>
+                </a:solidFill>
                 <a:latin typeface="微软雅黑" pitchFamily="34" charset="0"/>
                 <a:ea typeface="微软雅黑" pitchFamily="34" charset="-122"/>
                 <a:cs typeface="微软雅黑" pitchFamily="34" charset="-120"/>
               </a:rPr>
-              <a:t>在</a:t>
-            </a:r>
-            <a:r>
-              <a:rPr lang="zh-CN" dirty="0">
-                <a:latin typeface="微软雅黑" pitchFamily="34" charset="0"/>
-                <a:ea typeface="微软雅黑" pitchFamily="34" charset="-122"/>
-                <a:cs typeface="微软雅黑" pitchFamily="34" charset="-120"/>
-              </a:rPr>
-              <a:t>第一点基础上</a:t>
-            </a:r>
-            <a:r>
-              <a:rPr dirty="0">
-                <a:latin typeface="微软雅黑" pitchFamily="34" charset="0"/>
-                <a:ea typeface="微软雅黑" pitchFamily="34" charset="-122"/>
-                <a:cs typeface="微软雅黑" pitchFamily="34" charset="-120"/>
-              </a:rPr>
-              <a:t>,</a:t>
-            </a:r>
-            <a:r>
-              <a:rPr lang="zh-CN" dirty="0">
-                <a:latin typeface="微软雅黑" pitchFamily="34" charset="0"/>
-                <a:ea typeface="微软雅黑" pitchFamily="34" charset="-122"/>
-                <a:cs typeface="微软雅黑" pitchFamily="34" charset="-120"/>
-              </a:rPr>
-              <a:t>设计一种</a:t>
-            </a:r>
-            <a:r>
-              <a:rPr dirty="0">
-                <a:solidFill>
-                  <a:srgbClr val="FF0000"/>
-                </a:solidFill>
-                <a:latin typeface="微软雅黑" pitchFamily="34" charset="0"/>
-                <a:ea typeface="微软雅黑" pitchFamily="34" charset="-122"/>
-                <a:cs typeface="微软雅黑" pitchFamily="34" charset="-120"/>
-              </a:rPr>
-              <a:t>内核服务故障恢复机制,</a:t>
-            </a:r>
-            <a:r>
-              <a:rPr dirty="0">
-                <a:latin typeface="微软雅黑" pitchFamily="34" charset="0"/>
-                <a:ea typeface="微软雅黑" pitchFamily="34" charset="-122"/>
-                <a:cs typeface="微软雅黑" pitchFamily="34" charset="-120"/>
-              </a:rPr>
-              <a:t>进一步提升内核可靠性,</a:t>
-            </a:r>
-            <a:r>
-              <a:rPr dirty="0">
-                <a:solidFill>
-                  <a:srgbClr val="FF0000"/>
-                </a:solidFill>
-                <a:latin typeface="微软雅黑" pitchFamily="34" charset="0"/>
-                <a:ea typeface="微软雅黑" pitchFamily="34" charset="-122"/>
-                <a:cs typeface="微软雅黑" pitchFamily="34" charset="-120"/>
-              </a:rPr>
-              <a:t>应对内存缺陷之外的其它缺陷</a:t>
-            </a:r>
-            <a:r>
-              <a:rPr dirty="0">
-                <a:latin typeface="微软雅黑" pitchFamily="34" charset="0"/>
-                <a:ea typeface="微软雅黑" pitchFamily="34" charset="-122"/>
-                <a:cs typeface="微软雅黑" pitchFamily="34" charset="-120"/>
-              </a:rPr>
-              <a:t>(如</a:t>
-            </a:r>
-            <a:r>
-              <a:rPr dirty="0">
-                <a:solidFill>
-                  <a:srgbClr val="FF0000"/>
-                </a:solidFill>
-                <a:latin typeface="微软雅黑" pitchFamily="34" charset="0"/>
-                <a:ea typeface="微软雅黑" pitchFamily="34" charset="-122"/>
-                <a:cs typeface="微软雅黑" pitchFamily="34" charset="-120"/>
-              </a:rPr>
-              <a:t>逻辑错误触发 panic</a:t>
-            </a:r>
-            <a:r>
-              <a:rPr dirty="0">
-                <a:latin typeface="微软雅黑" pitchFamily="34" charset="0"/>
-                <a:ea typeface="微软雅黑" pitchFamily="34" charset="-122"/>
-                <a:cs typeface="微软雅黑" pitchFamily="34" charset="-120"/>
-              </a:rPr>
-              <a:t>)。</a:t>
-            </a:r>
-            <a:endParaRPr dirty="0">
-              <a:latin typeface="微软雅黑" pitchFamily="34" charset="0"/>
-              <a:ea typeface="微软雅黑" pitchFamily="34" charset="-122"/>
-              <a:cs typeface="微软雅黑" pitchFamily="34" charset="-120"/>
-            </a:endParaRPr>
+              <a:t>内核服务线程故障恢复</a:t>
+            </a:r>
+            <a:endParaRPr lang="en-US" b="1" dirty="0"/>
           </a:p>
         </p:txBody>
       </p:sp>
@@ -5842,37 +5110,94 @@
               <a:buNone/>
             </a:pPr>
             <a:r>
+              <a:rPr lang="en-US" sz="2660" b="1" dirty="0">
+                <a:solidFill>
+                  <a:srgbClr val="1C3C5F"/>
+                </a:solidFill>
+                <a:latin typeface="微软雅黑" pitchFamily="34" charset="0"/>
+                <a:ea typeface="微软雅黑" pitchFamily="34" charset="-122"/>
+                <a:cs typeface="微软雅黑" pitchFamily="34" charset="-120"/>
+              </a:rPr>
+              <a:t>可靠性增强</a:t>
+            </a:r>
+            <a:r>
               <a:rPr lang="zh-CN" altLang="en-US" sz="2660" b="1" dirty="0">
                 <a:solidFill>
                   <a:srgbClr val="1C3C5F"/>
                 </a:solidFill>
                 <a:latin typeface="微软雅黑" pitchFamily="34" charset="0"/>
+                <a:ea typeface="宋体" charset="0"/>
+                <a:cs typeface="微软雅黑" pitchFamily="34" charset="-120"/>
+              </a:rPr>
+              <a:t>内核架构</a:t>
+            </a:r>
+            <a:r>
+              <a:rPr lang="en-US" sz="2660" b="1" dirty="0">
+                <a:solidFill>
+                  <a:srgbClr val="1C3C5F"/>
+                </a:solidFill>
+                <a:latin typeface="微软雅黑" pitchFamily="34" charset="0"/>
                 <a:ea typeface="微软雅黑" pitchFamily="34" charset="-122"/>
                 <a:cs typeface="微软雅黑" pitchFamily="34" charset="-120"/>
               </a:rPr>
-              <a:t>绪论</a:t>
+              <a:t>设计</a:t>
+            </a:r>
+            <a:r>
+              <a:rPr lang="zh-CN" altLang="en-US" sz="2660" b="1" dirty="0">
+                <a:solidFill>
+                  <a:srgbClr val="1C3C5F"/>
+                </a:solidFill>
+                <a:latin typeface="微软雅黑" pitchFamily="34" charset="0"/>
+                <a:ea typeface="宋体" charset="0"/>
+                <a:cs typeface="微软雅黑" pitchFamily="34" charset="-120"/>
+              </a:rPr>
+              <a:t>：项目总体架构</a:t>
             </a:r>
             <a:endParaRPr lang="zh-CN" altLang="en-US" sz="2660" b="1" dirty="0">
               <a:solidFill>
                 <a:srgbClr val="1C3C5F"/>
               </a:solidFill>
               <a:latin typeface="微软雅黑" pitchFamily="34" charset="0"/>
-              <a:ea typeface="微软雅黑" pitchFamily="34" charset="-122"/>
+              <a:ea typeface="宋体" charset="0"/>
               <a:cs typeface="微软雅黑" pitchFamily="34" charset="-120"/>
             </a:endParaRPr>
           </a:p>
         </p:txBody>
       </p:sp>
-      <p:sp>
-        <p:nvSpPr>
-          <p:cNvPr id="4" name="Text 1"/>
-          <p:cNvSpPr/>
+      <p:pic>
+        <p:nvPicPr>
+          <p:cNvPr id="5" name="图片 4" descr="项目总体架构"/>
+          <p:cNvPicPr>
+            <a:picLocks noChangeAspect="1"/>
+          </p:cNvPicPr>
           <p:nvPr/>
-        </p:nvSpPr>
+        </p:nvPicPr>
+        <p:blipFill>
+          <a:blip r:embed="rId2"/>
+          <a:stretch>
+            <a:fillRect/>
+          </a:stretch>
+        </p:blipFill>
         <p:spPr>
           <a:xfrm>
-            <a:off x="904875" y="653415"/>
-            <a:ext cx="7715250" cy="2030730"/>
+            <a:off x="4566285" y="685800"/>
+            <a:ext cx="4272280" cy="4359275"/>
+          </a:xfrm>
+          <a:prstGeom prst="rect">
+            <a:avLst/>
+          </a:prstGeom>
+        </p:spPr>
+      </p:pic>
+      <p:sp>
+        <p:nvSpPr>
+          <p:cNvPr id="6" name="文本框 5"/>
+          <p:cNvSpPr txBox="1"/>
+          <p:nvPr/>
+        </p:nvSpPr>
+        <p:spPr>
+          <a:xfrm>
+            <a:off x="285750" y="1000125"/>
+            <a:ext cx="3867785" cy="3892550"/>
           </a:xfrm>
           <a:prstGeom prst="rect">
             <a:avLst/>
@@ -5880,107 +5205,92 @@
           <a:noFill/>
         </p:spPr>
         <p:txBody>
-          <a:bodyPr wrap="square" rtlCol="0" anchor="t"/>
-          <a:lstStyle/>
-          <a:p>
-            <a:pPr marL="190500" indent="-190500" algn="l">
-              <a:lnSpc>
-                <a:spcPct val="150000"/>
-              </a:lnSpc>
-              <a:buSzPct val="100000"/>
-              <a:buChar char="•"/>
-            </a:pPr>
-            <a:r>
-              <a:rPr lang="zh-CN" altLang="en-US" dirty="0">
-                <a:solidFill>
-                  <a:schemeClr val="tx1"/>
-                </a:solidFill>
-                <a:latin typeface="微软雅黑" pitchFamily="34" charset="0"/>
-                <a:ea typeface="微软雅黑" pitchFamily="34" charset="-122"/>
-                <a:cs typeface="微软雅黑" pitchFamily="34" charset="-120"/>
-              </a:rPr>
-              <a:t>研究背景</a:t>
-            </a:r>
-            <a:endParaRPr lang="en-US" dirty="0">
-              <a:solidFill>
-                <a:schemeClr val="tx1"/>
-              </a:solidFill>
-              <a:latin typeface="微软雅黑" pitchFamily="34" charset="0"/>
-              <a:ea typeface="微软雅黑" pitchFamily="34" charset="-122"/>
-              <a:cs typeface="微软雅黑" pitchFamily="34" charset="-120"/>
-            </a:endParaRPr>
-          </a:p>
-          <a:p>
-            <a:pPr marL="190500" indent="-190500" algn="l">
-              <a:lnSpc>
-                <a:spcPct val="150000"/>
-              </a:lnSpc>
-              <a:buSzPct val="100000"/>
-              <a:buChar char="•"/>
-            </a:pPr>
-            <a:r>
-              <a:rPr lang="zh-CN" altLang="en-US" dirty="0">
-                <a:solidFill>
-                  <a:schemeClr val="tx1"/>
-                </a:solidFill>
-                <a:ea typeface="宋体" charset="0"/>
-              </a:rPr>
-              <a:t>相关工作</a:t>
-            </a:r>
-            <a:endParaRPr lang="zh-CN" altLang="en-US" dirty="0">
-              <a:solidFill>
-                <a:schemeClr val="tx1"/>
-              </a:solidFill>
-              <a:ea typeface="宋体" charset="0"/>
-            </a:endParaRPr>
-          </a:p>
-          <a:p>
-            <a:pPr marL="190500" indent="-190500" algn="l">
-              <a:lnSpc>
-                <a:spcPct val="150000"/>
-              </a:lnSpc>
-              <a:buSzPct val="100000"/>
-              <a:buChar char="•"/>
-            </a:pPr>
-            <a:r>
-              <a:rPr lang="zh-CN" altLang="en-US" dirty="0">
-                <a:solidFill>
-                  <a:schemeClr val="tx1"/>
-                </a:solidFill>
-                <a:ea typeface="宋体" charset="0"/>
-              </a:rPr>
-              <a:t>研究目的</a:t>
-            </a:r>
-            <a:endParaRPr lang="zh-CN" altLang="en-US" dirty="0">
-              <a:solidFill>
-                <a:schemeClr val="tx1"/>
-              </a:solidFill>
-              <a:ea typeface="宋体" charset="0"/>
-            </a:endParaRPr>
-          </a:p>
-          <a:p>
-            <a:pPr marL="190500" indent="-190500" algn="l">
-              <a:lnSpc>
-                <a:spcPct val="150000"/>
-              </a:lnSpc>
-              <a:buSzPct val="100000"/>
-              <a:buChar char="•"/>
-            </a:pPr>
-            <a:r>
-              <a:rPr lang="zh-CN" altLang="en-US" dirty="0">
-                <a:solidFill>
-                  <a:srgbClr val="FF0000"/>
-                </a:solidFill>
-                <a:ea typeface="宋体" charset="0"/>
-              </a:rPr>
-              <a:t>本文工作</a:t>
-            </a:r>
-            <a:endParaRPr lang="zh-CN" altLang="en-US" dirty="0">
-              <a:solidFill>
-                <a:srgbClr val="FF0000"/>
-              </a:solidFill>
-              <a:ea typeface="宋体" charset="0"/>
-            </a:endParaRPr>
+          <a:bodyPr wrap="square" rtlCol="0">
+            <a:noAutofit/>
+          </a:bodyPr>
+          <a:p>
+            <a:pPr marL="285750" indent="-285750" algn="l">
+              <a:buClrTx/>
+              <a:buSzTx/>
+              <a:buFont typeface="Wingdings" panose="05000000000000000000" charset="0"/>
+              <a:buChar char=""/>
+            </a:pPr>
+            <a:r>
+              <a:rPr lang="zh-CN" altLang="en-US" b="1"/>
+              <a:t>编译时利用Rust feature选择宏内核或混合内核</a:t>
+            </a:r>
+            <a:endParaRPr lang="zh-CN" altLang="en-US" b="1"/>
+          </a:p>
+          <a:p>
+            <a:pPr marL="285750" indent="-285750" algn="l">
+              <a:buClrTx/>
+              <a:buSzTx/>
+              <a:buFont typeface="Wingdings" panose="05000000000000000000" charset="0"/>
+              <a:buChar char=""/>
+            </a:pPr>
+            <a:endParaRPr lang="zh-CN" altLang="en-US" b="1"/>
+          </a:p>
+          <a:p>
+            <a:pPr marL="285750" indent="-285750" algn="l">
+              <a:buClrTx/>
+              <a:buSzTx/>
+              <a:buFont typeface="Wingdings" panose="05000000000000000000" charset="0"/>
+              <a:buChar char=""/>
+            </a:pPr>
+            <a:endParaRPr lang="zh-CN" altLang="en-US" b="1"/>
+          </a:p>
+          <a:p>
+            <a:pPr marL="285750" indent="-285750" algn="l">
+              <a:buClrTx/>
+              <a:buSzTx/>
+              <a:buFont typeface="Wingdings" panose="05000000000000000000" charset="0"/>
+              <a:buChar char=""/>
+            </a:pPr>
+            <a:r>
+              <a:rPr lang="zh-CN" altLang="en-US" b="1"/>
+              <a:t>直接提供Linux系统调用</a:t>
+            </a:r>
+            <a:endParaRPr lang="zh-CN" altLang="en-US" b="1"/>
+          </a:p>
+          <a:p>
+            <a:pPr marL="285750" indent="-285750" algn="l">
+              <a:buClrTx/>
+              <a:buSzTx/>
+              <a:buFont typeface="Wingdings" panose="05000000000000000000" charset="0"/>
+              <a:buChar char=""/>
+            </a:pPr>
+            <a:endParaRPr lang="zh-CN" altLang="en-US" b="1"/>
+          </a:p>
+          <a:p>
+            <a:pPr marL="285750" indent="-285750" algn="l">
+              <a:buClrTx/>
+              <a:buSzTx/>
+              <a:buFont typeface="Wingdings" panose="05000000000000000000" charset="0"/>
+              <a:buChar char=""/>
+            </a:pPr>
+            <a:endParaRPr lang="zh-CN" altLang="en-US" b="1"/>
+          </a:p>
+          <a:p>
+            <a:pPr marL="285750" indent="-285750" algn="l">
+              <a:buClrTx/>
+              <a:buSzTx/>
+              <a:buFont typeface="Wingdings" panose="05000000000000000000" charset="0"/>
+              <a:buChar char=""/>
+            </a:pPr>
+            <a:endParaRPr lang="zh-CN" altLang="en-US" b="1"/>
+          </a:p>
+          <a:p>
+            <a:pPr marL="285750" indent="-285750" algn="l">
+              <a:buClrTx/>
+              <a:buSzTx/>
+              <a:buFont typeface="Wingdings" panose="05000000000000000000" charset="0"/>
+              <a:buChar char=""/>
+            </a:pPr>
+            <a:r>
+              <a:rPr lang="zh-CN" altLang="en-US" b="1"/>
+              <a:t>初步支持musl-libc和C语言应用程序</a:t>
+            </a:r>
+            <a:endParaRPr lang="zh-CN" altLang="en-US" b="1"/>
           </a:p>
         </p:txBody>
       </p:sp>
@@ -6057,352 +5367,179 @@
               <a:buNone/>
             </a:pPr>
             <a:r>
-              <a:rPr lang="en-US" sz="2660" b="1" dirty="0">
+              <a:rPr lang="en-US" sz="2400" b="1" dirty="0">
                 <a:solidFill>
                   <a:srgbClr val="1C3C5F"/>
                 </a:solidFill>
                 <a:latin typeface="微软雅黑" pitchFamily="34" charset="0"/>
                 <a:ea typeface="微软雅黑" pitchFamily="34" charset="-122"/>
                 <a:cs typeface="微软雅黑" pitchFamily="34" charset="-120"/>
-              </a:rPr>
-              <a:t>本文工作</a:t>
-            </a:r>
-            <a:endParaRPr lang="en-US" sz="2660" dirty="0"/>
+                <a:sym typeface="+mn-ea"/>
+              </a:rPr>
+              <a:t>可靠性增强</a:t>
+            </a:r>
+            <a:r>
+              <a:rPr lang="zh-CN" altLang="en-US" sz="2400" b="1" dirty="0">
+                <a:solidFill>
+                  <a:srgbClr val="1C3C5F"/>
+                </a:solidFill>
+                <a:latin typeface="微软雅黑" pitchFamily="34" charset="0"/>
+                <a:ea typeface="宋体" charset="0"/>
+                <a:cs typeface="微软雅黑" pitchFamily="34" charset="-120"/>
+                <a:sym typeface="+mn-ea"/>
+              </a:rPr>
+              <a:t>内核架构</a:t>
+            </a:r>
+            <a:r>
+              <a:rPr lang="en-US" sz="2400" b="1" dirty="0">
+                <a:solidFill>
+                  <a:srgbClr val="1C3C5F"/>
+                </a:solidFill>
+                <a:latin typeface="微软雅黑" pitchFamily="34" charset="0"/>
+                <a:ea typeface="微软雅黑" pitchFamily="34" charset="-122"/>
+                <a:cs typeface="微软雅黑" pitchFamily="34" charset="-120"/>
+                <a:sym typeface="+mn-ea"/>
+              </a:rPr>
+              <a:t>设计</a:t>
+            </a:r>
+            <a:r>
+              <a:rPr lang="zh-CN" altLang="en-US" sz="2400" b="1" dirty="0">
+                <a:solidFill>
+                  <a:srgbClr val="1C3C5F"/>
+                </a:solidFill>
+                <a:latin typeface="微软雅黑" pitchFamily="34" charset="0"/>
+                <a:ea typeface="宋体" charset="0"/>
+                <a:cs typeface="微软雅黑" pitchFamily="34" charset="-120"/>
+                <a:sym typeface="+mn-ea"/>
+              </a:rPr>
+              <a:t>：多对多线程模型的混合内核</a:t>
+            </a:r>
+            <a:endParaRPr lang="en-US" sz="2400" dirty="0"/>
+          </a:p>
+        </p:txBody>
+      </p:sp>
+      <p:sp>
+        <p:nvSpPr>
+          <p:cNvPr id="5" name="文本框 4"/>
+          <p:cNvSpPr txBox="1"/>
+          <p:nvPr/>
+        </p:nvSpPr>
+        <p:spPr>
+          <a:xfrm>
+            <a:off x="201295" y="812800"/>
+            <a:ext cx="3269615" cy="4029710"/>
+          </a:xfrm>
+          <a:prstGeom prst="rect">
+            <a:avLst/>
+          </a:prstGeom>
+          <a:noFill/>
+        </p:spPr>
+        <p:txBody>
+          <a:bodyPr wrap="square" rtlCol="0" anchor="t">
+            <a:noAutofit/>
+          </a:bodyPr>
+          <a:p>
+            <a:pPr marL="285750" indent="-285750">
+              <a:buFont typeface="Wingdings" panose="05000000000000000000" charset="0"/>
+              <a:buChar char=""/>
+            </a:pPr>
+            <a:r>
+              <a:rPr lang="zh-CN" altLang="en-US" b="1"/>
+              <a:t>内核服务线程提供非核心服务（如文件系统、驱动程序等）</a:t>
+            </a:r>
+            <a:endParaRPr lang="zh-CN" altLang="en-US" b="1"/>
+          </a:p>
+          <a:p>
+            <a:pPr marL="285750" indent="-285750">
+              <a:buFont typeface="Wingdings" panose="05000000000000000000" charset="0"/>
+              <a:buChar char=""/>
+            </a:pPr>
+            <a:endParaRPr lang="zh-CN" altLang="en-US" b="1"/>
+          </a:p>
+          <a:p>
+            <a:pPr marL="285750" indent="-285750">
+              <a:buFont typeface="Wingdings" panose="05000000000000000000" charset="0"/>
+              <a:buChar char=""/>
+            </a:pPr>
+            <a:endParaRPr lang="zh-CN" altLang="en-US" b="1"/>
+          </a:p>
+          <a:p>
+            <a:pPr marL="285750" indent="-285750">
+              <a:buFont typeface="Wingdings" panose="05000000000000000000" charset="0"/>
+              <a:buChar char=""/>
+            </a:pPr>
+            <a:endParaRPr lang="zh-CN" altLang="en-US" b="1"/>
+          </a:p>
+          <a:p>
+            <a:pPr marL="285750" indent="-285750">
+              <a:buFont typeface="Wingdings" panose="05000000000000000000" charset="0"/>
+              <a:buChar char=""/>
+            </a:pPr>
+            <a:endParaRPr lang="zh-CN" altLang="en-US" b="1"/>
+          </a:p>
+          <a:p>
+            <a:pPr marL="285750" indent="-285750">
+              <a:buFont typeface="Wingdings" panose="05000000000000000000" charset="0"/>
+              <a:buChar char=""/>
+            </a:pPr>
+            <a:endParaRPr lang="zh-CN" altLang="en-US" b="1"/>
+          </a:p>
+          <a:p>
+            <a:pPr marL="285750" indent="-285750">
+              <a:buFont typeface="Wingdings" panose="05000000000000000000" charset="0"/>
+              <a:buChar char=""/>
+            </a:pPr>
+            <a:r>
+              <a:rPr lang="zh-CN" altLang="en-US" b="1"/>
+              <a:t>协程执行线程执行所有用户线程</a:t>
+            </a:r>
+            <a:endParaRPr lang="zh-CN" altLang="en-US" b="1"/>
+          </a:p>
+          <a:p>
+            <a:pPr marL="285750" indent="-285750">
+              <a:buFont typeface="Wingdings" panose="05000000000000000000" charset="0"/>
+              <a:buChar char=""/>
+            </a:pPr>
+            <a:endParaRPr lang="zh-CN" altLang="en-US" b="1"/>
+          </a:p>
+          <a:p>
+            <a:pPr marL="285750" indent="-285750">
+              <a:buFont typeface="Wingdings" panose="05000000000000000000" charset="0"/>
+              <a:buChar char=""/>
+            </a:pPr>
+            <a:endParaRPr lang="zh-CN" altLang="en-US" b="1">
+              <a:solidFill>
+                <a:srgbClr val="FF0000"/>
+              </a:solidFill>
+              <a:ea typeface="宋体" charset="0"/>
+            </a:endParaRPr>
           </a:p>
         </p:txBody>
       </p:sp>
       <p:pic>
         <p:nvPicPr>
-          <p:cNvPr id="4" name="Image 1" descr="preencoded.png"/>
+          <p:cNvPr id="6" name="图片 5" descr="混合内核"/>
           <p:cNvPicPr>
             <a:picLocks noChangeAspect="1"/>
           </p:cNvPicPr>
           <p:nvPr/>
         </p:nvPicPr>
         <p:blipFill>
-          <a:blip r:embed="rId2">
-            <a:extLst>
-              <a:ext uri="{96DAC541-7B7A-43D3-8B79-37D633B846F1}">
-                <asvg:svgBlip xmlns:asvg="http://schemas.microsoft.com/office/drawing/2016/SVG/main" r:embed="rId3"/>
-              </a:ext>
-            </a:extLst>
-          </a:blip>
+          <a:blip r:embed="rId2"/>
           <a:stretch>
             <a:fillRect/>
           </a:stretch>
         </p:blipFill>
         <p:spPr>
           <a:xfrm>
-            <a:off x="1038532" y="1062038"/>
-            <a:ext cx="7449207" cy="3333750"/>
+            <a:off x="3584575" y="685800"/>
+            <a:ext cx="5263515" cy="4223385"/>
           </a:xfrm>
           <a:prstGeom prst="rect">
             <a:avLst/>
           </a:prstGeom>
         </p:spPr>
       </p:pic>
-      <p:sp>
-        <p:nvSpPr>
-          <p:cNvPr id="5" name="Text 1"/>
-          <p:cNvSpPr/>
-          <p:nvPr/>
-        </p:nvSpPr>
-        <p:spPr>
-          <a:xfrm>
-            <a:off x="4156710" y="1430020"/>
-            <a:ext cx="3916045" cy="501015"/>
-          </a:xfrm>
-          <a:prstGeom prst="rect">
-            <a:avLst/>
-          </a:prstGeom>
-          <a:noFill/>
-        </p:spPr>
-        <p:txBody>
-          <a:bodyPr wrap="square" rtlCol="0" anchor="ctr"/>
-          <a:lstStyle/>
-          <a:p>
-            <a:pPr marL="0" indent="0" algn="r">
-              <a:lnSpc>
-                <a:spcPct val="150000"/>
-              </a:lnSpc>
-              <a:buNone/>
-            </a:pPr>
-            <a:r>
-              <a:rPr lang="en-US" sz="1400" dirty="0">
-                <a:solidFill>
-                  <a:srgbClr val="000000"/>
-                </a:solidFill>
-                <a:latin typeface="微软雅黑" pitchFamily="34" charset="0"/>
-                <a:ea typeface="微软雅黑" pitchFamily="34" charset="-122"/>
-                <a:cs typeface="微软雅黑" pitchFamily="34" charset="-120"/>
-              </a:rPr>
-              <a:t>本课题基于Rust语言，从头设计实现了一个</a:t>
-            </a:r>
-            <a:r>
-              <a:rPr lang="en-US" sz="1400" dirty="0">
-                <a:solidFill>
-                  <a:srgbClr val="FF0000"/>
-                </a:solidFill>
-                <a:latin typeface="微软雅黑" pitchFamily="34" charset="0"/>
-                <a:ea typeface="微软雅黑" pitchFamily="34" charset="-122"/>
-                <a:cs typeface="微软雅黑" pitchFamily="34" charset="-120"/>
-              </a:rPr>
-              <a:t>多对多线程模型</a:t>
-            </a:r>
-            <a:r>
-              <a:rPr lang="en-US" sz="1400" dirty="0">
-                <a:solidFill>
-                  <a:srgbClr val="000000"/>
-                </a:solidFill>
-                <a:latin typeface="微软雅黑" pitchFamily="34" charset="0"/>
-                <a:ea typeface="微软雅黑" pitchFamily="34" charset="-122"/>
-                <a:cs typeface="微软雅黑" pitchFamily="34" charset="-120"/>
-              </a:rPr>
-              <a:t>的</a:t>
-            </a:r>
-            <a:r>
-              <a:rPr lang="en-US" sz="1400" dirty="0">
-                <a:solidFill>
-                  <a:srgbClr val="FF0000"/>
-                </a:solidFill>
-                <a:latin typeface="微软雅黑" pitchFamily="34" charset="0"/>
-                <a:ea typeface="微软雅黑" pitchFamily="34" charset="-122"/>
-                <a:cs typeface="微软雅黑" pitchFamily="34" charset="-120"/>
-              </a:rPr>
-              <a:t>混合内核</a:t>
-            </a:r>
-            <a:r>
-              <a:rPr lang="en-US" sz="1400" dirty="0">
-                <a:solidFill>
-                  <a:srgbClr val="000000"/>
-                </a:solidFill>
-                <a:latin typeface="微软雅黑" pitchFamily="34" charset="0"/>
-                <a:ea typeface="微软雅黑" pitchFamily="34" charset="-122"/>
-                <a:cs typeface="微软雅黑" pitchFamily="34" charset="-120"/>
-              </a:rPr>
-              <a:t>，我们称其为</a:t>
-            </a:r>
-            <a:r>
-              <a:rPr lang="en-US" sz="1400" dirty="0">
-                <a:solidFill>
-                  <a:srgbClr val="FF0000"/>
-                </a:solidFill>
-                <a:latin typeface="微软雅黑" pitchFamily="34" charset="0"/>
-                <a:ea typeface="微软雅黑" pitchFamily="34" charset="-122"/>
-                <a:cs typeface="微软雅黑" pitchFamily="34" charset="-120"/>
-              </a:rPr>
-              <a:t>nCore</a:t>
-            </a:r>
-            <a:r>
-              <a:rPr lang="en-US" sz="1400" dirty="0">
-                <a:solidFill>
-                  <a:srgbClr val="000000"/>
-                </a:solidFill>
-                <a:latin typeface="微软雅黑" pitchFamily="34" charset="0"/>
-                <a:ea typeface="微软雅黑" pitchFamily="34" charset="-122"/>
-                <a:cs typeface="微软雅黑" pitchFamily="34" charset="-120"/>
-              </a:rPr>
-              <a:t>。</a:t>
-            </a:r>
-            <a:endParaRPr lang="en-US" sz="1400" dirty="0">
-              <a:solidFill>
-                <a:srgbClr val="000000"/>
-              </a:solidFill>
-              <a:latin typeface="微软雅黑" pitchFamily="34" charset="0"/>
-              <a:ea typeface="微软雅黑" pitchFamily="34" charset="-122"/>
-              <a:cs typeface="微软雅黑" pitchFamily="34" charset="-120"/>
-            </a:endParaRPr>
-          </a:p>
-        </p:txBody>
-      </p:sp>
-      <p:sp>
-        <p:nvSpPr>
-          <p:cNvPr id="6" name="Text 2"/>
-          <p:cNvSpPr/>
-          <p:nvPr/>
-        </p:nvSpPr>
-        <p:spPr>
-          <a:xfrm>
-            <a:off x="3876040" y="2156460"/>
-            <a:ext cx="4196715" cy="501015"/>
-          </a:xfrm>
-          <a:prstGeom prst="rect">
-            <a:avLst/>
-          </a:prstGeom>
-          <a:noFill/>
-        </p:spPr>
-        <p:txBody>
-          <a:bodyPr wrap="square" rtlCol="0" anchor="ctr"/>
-          <a:lstStyle/>
-          <a:p>
-            <a:pPr marL="0" indent="0" algn="r">
-              <a:lnSpc>
-                <a:spcPct val="150000"/>
-              </a:lnSpc>
-              <a:buNone/>
-            </a:pPr>
-            <a:r>
-              <a:rPr lang="en-US" sz="1400" dirty="0">
-                <a:solidFill>
-                  <a:srgbClr val="000000"/>
-                </a:solidFill>
-                <a:latin typeface="微软雅黑" pitchFamily="34" charset="0"/>
-                <a:ea typeface="微软雅黑" pitchFamily="34" charset="-122"/>
-                <a:cs typeface="微软雅黑" pitchFamily="34" charset="-120"/>
-              </a:rPr>
-              <a:t>并在此基础上实现了一种简单的内核服务线程</a:t>
-            </a:r>
-            <a:r>
-              <a:rPr lang="en-US" sz="1400" dirty="0">
-                <a:solidFill>
-                  <a:srgbClr val="FF0000"/>
-                </a:solidFill>
-                <a:latin typeface="微软雅黑" pitchFamily="34" charset="0"/>
-                <a:ea typeface="微软雅黑" pitchFamily="34" charset="-122"/>
-                <a:cs typeface="微软雅黑" pitchFamily="34" charset="-120"/>
-              </a:rPr>
-              <a:t>故障恢复机制</a:t>
-            </a:r>
-            <a:r>
-              <a:rPr lang="en-US" sz="1400" dirty="0">
-                <a:solidFill>
-                  <a:srgbClr val="000000"/>
-                </a:solidFill>
-                <a:latin typeface="微软雅黑" pitchFamily="34" charset="0"/>
-                <a:ea typeface="微软雅黑" pitchFamily="34" charset="-122"/>
-                <a:cs typeface="微软雅黑" pitchFamily="34" charset="-120"/>
-              </a:rPr>
-              <a:t>。</a:t>
-            </a:r>
-            <a:endParaRPr lang="en-US" sz="1400" dirty="0">
-              <a:solidFill>
-                <a:srgbClr val="000000"/>
-              </a:solidFill>
-              <a:latin typeface="微软雅黑" pitchFamily="34" charset="0"/>
-              <a:ea typeface="微软雅黑" pitchFamily="34" charset="-122"/>
-              <a:cs typeface="微软雅黑" pitchFamily="34" charset="-120"/>
-            </a:endParaRPr>
-          </a:p>
-        </p:txBody>
-      </p:sp>
-      <p:sp>
-        <p:nvSpPr>
-          <p:cNvPr id="7" name="Text 3"/>
-          <p:cNvSpPr/>
-          <p:nvPr/>
-        </p:nvSpPr>
-        <p:spPr>
-          <a:xfrm>
-            <a:off x="3508375" y="2864485"/>
-            <a:ext cx="4564380" cy="501015"/>
-          </a:xfrm>
-          <a:prstGeom prst="rect">
-            <a:avLst/>
-          </a:prstGeom>
-          <a:noFill/>
-        </p:spPr>
-        <p:txBody>
-          <a:bodyPr wrap="square" rtlCol="0" anchor="ctr"/>
-          <a:lstStyle/>
-          <a:p>
-            <a:pPr marL="0" indent="0" algn="r">
-              <a:lnSpc>
-                <a:spcPct val="150000"/>
-              </a:lnSpc>
-              <a:buNone/>
-            </a:pPr>
-            <a:r>
-              <a:rPr lang="en-US" sz="1400" dirty="0">
-                <a:solidFill>
-                  <a:srgbClr val="000000"/>
-                </a:solidFill>
-                <a:latin typeface="微软雅黑" pitchFamily="34" charset="0"/>
-                <a:ea typeface="微软雅黑" pitchFamily="34" charset="-122"/>
-                <a:cs typeface="微软雅黑" pitchFamily="34" charset="-120"/>
-              </a:rPr>
-              <a:t>支持内存管理、多线程管理、文件系统、同步互斥、Shell等用户程序等多个功能模块。</a:t>
-            </a:r>
-            <a:endParaRPr lang="en-US" sz="1400" dirty="0">
-              <a:solidFill>
-                <a:srgbClr val="000000"/>
-              </a:solidFill>
-              <a:latin typeface="微软雅黑" pitchFamily="34" charset="0"/>
-              <a:ea typeface="微软雅黑" pitchFamily="34" charset="-122"/>
-              <a:cs typeface="微软雅黑" pitchFamily="34" charset="-120"/>
-            </a:endParaRPr>
-          </a:p>
-        </p:txBody>
-      </p:sp>
-      <p:sp>
-        <p:nvSpPr>
-          <p:cNvPr id="8" name="Text 4"/>
-          <p:cNvSpPr/>
-          <p:nvPr/>
-        </p:nvSpPr>
-        <p:spPr>
-          <a:xfrm>
-            <a:off x="3381375" y="3586480"/>
-            <a:ext cx="4691380" cy="501015"/>
-          </a:xfrm>
-          <a:prstGeom prst="rect">
-            <a:avLst/>
-          </a:prstGeom>
-          <a:noFill/>
-        </p:spPr>
-        <p:txBody>
-          <a:bodyPr wrap="square" rtlCol="0" anchor="ctr"/>
-          <a:lstStyle/>
-          <a:p>
-            <a:pPr marL="0" indent="0" algn="r">
-              <a:lnSpc>
-                <a:spcPct val="150000"/>
-              </a:lnSpc>
-              <a:buNone/>
-            </a:pPr>
-            <a:r>
-              <a:rPr lang="en-US" sz="1400" dirty="0">
-                <a:solidFill>
-                  <a:srgbClr val="000000"/>
-                </a:solidFill>
-                <a:latin typeface="微软雅黑" pitchFamily="34" charset="0"/>
-                <a:ea typeface="微软雅黑" pitchFamily="34" charset="-122"/>
-                <a:cs typeface="微软雅黑" pitchFamily="34" charset="-120"/>
-              </a:rPr>
-              <a:t>代码量在</a:t>
-            </a:r>
-            <a:r>
-              <a:rPr lang="en-US" sz="1400" dirty="0">
-                <a:solidFill>
-                  <a:srgbClr val="FF0000"/>
-                </a:solidFill>
-                <a:latin typeface="微软雅黑" pitchFamily="34" charset="0"/>
-                <a:ea typeface="微软雅黑" pitchFamily="34" charset="-122"/>
-                <a:cs typeface="微软雅黑" pitchFamily="34" charset="-120"/>
-              </a:rPr>
-              <a:t>6500</a:t>
-            </a:r>
-            <a:r>
-              <a:rPr lang="en-US" sz="1400" dirty="0">
-                <a:solidFill>
-                  <a:srgbClr val="000000"/>
-                </a:solidFill>
-                <a:latin typeface="微软雅黑" pitchFamily="34" charset="0"/>
-                <a:ea typeface="微软雅黑" pitchFamily="34" charset="-122"/>
-                <a:cs typeface="微软雅黑" pitchFamily="34" charset="-120"/>
-              </a:rPr>
-              <a:t>行左右。</a:t>
-            </a:r>
-            <a:endParaRPr lang="en-US" sz="1400" dirty="0">
-              <a:solidFill>
-                <a:srgbClr val="000000"/>
-              </a:solidFill>
-              <a:latin typeface="微软雅黑" pitchFamily="34" charset="0"/>
-              <a:ea typeface="微软雅黑" pitchFamily="34" charset="-122"/>
-              <a:cs typeface="微软雅黑" pitchFamily="34" charset="-120"/>
-            </a:endParaRPr>
-          </a:p>
-        </p:txBody>
-      </p:sp>
     </p:spTree>
   </p:cSld>
   <p:clrMapOvr>
@@ -6484,15 +5621,173 @@
                 <a:ea typeface="微软雅黑" pitchFamily="34" charset="-122"/>
                 <a:cs typeface="微软雅黑" pitchFamily="34" charset="-120"/>
               </a:rPr>
-              <a:t>本文工作</a:t>
+              <a:t>内核服务线程设计</a:t>
             </a:r>
             <a:endParaRPr lang="en-US" sz="2660" dirty="0"/>
+          </a:p>
+        </p:txBody>
+      </p:sp>
+      <p:sp>
+        <p:nvSpPr>
+          <p:cNvPr id="4" name="Text 1"/>
+          <p:cNvSpPr/>
+          <p:nvPr/>
+        </p:nvSpPr>
+        <p:spPr>
+          <a:xfrm>
+            <a:off x="130175" y="944880"/>
+            <a:ext cx="2310765" cy="3956050"/>
+          </a:xfrm>
+          <a:prstGeom prst="rect">
+            <a:avLst/>
+          </a:prstGeom>
+          <a:noFill/>
+        </p:spPr>
+        <p:txBody>
+          <a:bodyPr wrap="square" rtlCol="0" anchor="t"/>
+          <a:lstStyle/>
+          <a:p>
+            <a:pPr marL="190500" indent="-190500" algn="l">
+              <a:lnSpc>
+                <a:spcPct val="150000"/>
+              </a:lnSpc>
+              <a:buSzPct val="100000"/>
+              <a:buChar char="•"/>
+            </a:pPr>
+            <a:r>
+              <a:rPr lang="en-US" b="1" dirty="0">
+                <a:solidFill>
+                  <a:srgbClr val="383838"/>
+                </a:solidFill>
+                <a:latin typeface="微软雅黑" pitchFamily="34" charset="0"/>
+                <a:ea typeface="微软雅黑" pitchFamily="34" charset="-122"/>
+                <a:cs typeface="微软雅黑" pitchFamily="34" charset="-120"/>
+              </a:rPr>
+              <a:t>提供一种特定的内核服务</a:t>
+            </a:r>
+            <a:endParaRPr lang="en-US" b="1" dirty="0">
+              <a:solidFill>
+                <a:srgbClr val="383838"/>
+              </a:solidFill>
+              <a:latin typeface="微软雅黑" pitchFamily="34" charset="0"/>
+              <a:ea typeface="微软雅黑" pitchFamily="34" charset="-122"/>
+              <a:cs typeface="微软雅黑" pitchFamily="34" charset="-120"/>
+            </a:endParaRPr>
+          </a:p>
+          <a:p>
+            <a:pPr marL="190500" indent="-190500" algn="l">
+              <a:lnSpc>
+                <a:spcPct val="150000"/>
+              </a:lnSpc>
+              <a:buSzPct val="100000"/>
+              <a:buChar char="•"/>
+            </a:pPr>
+            <a:endParaRPr lang="en-US" b="1" dirty="0"/>
+          </a:p>
+          <a:p>
+            <a:pPr marL="190500" indent="-190500" algn="l">
+              <a:lnSpc>
+                <a:spcPct val="150000"/>
+              </a:lnSpc>
+              <a:buSzPct val="100000"/>
+              <a:buChar char="•"/>
+            </a:pPr>
+            <a:r>
+              <a:rPr lang="en-US" b="1" dirty="0">
+                <a:solidFill>
+                  <a:srgbClr val="383838"/>
+                </a:solidFill>
+                <a:latin typeface="微软雅黑" pitchFamily="34" charset="0"/>
+                <a:ea typeface="微软雅黑" pitchFamily="34" charset="-122"/>
+                <a:cs typeface="微软雅黑" pitchFamily="34" charset="-120"/>
+              </a:rPr>
+              <a:t>拥有</a:t>
+            </a:r>
+            <a:r>
+              <a:rPr lang="en-US" b="1" dirty="0">
+                <a:solidFill>
+                  <a:srgbClr val="FF0000"/>
+                </a:solidFill>
+                <a:latin typeface="微软雅黑" pitchFamily="34" charset="0"/>
+                <a:ea typeface="微软雅黑" pitchFamily="34" charset="-122"/>
+                <a:cs typeface="微软雅黑" pitchFamily="34" charset="-120"/>
+              </a:rPr>
+              <a:t>独立的内核栈和控制流</a:t>
+            </a:r>
+            <a:endParaRPr lang="en-US" b="1" dirty="0">
+              <a:solidFill>
+                <a:srgbClr val="FF0000"/>
+              </a:solidFill>
+              <a:latin typeface="微软雅黑" pitchFamily="34" charset="0"/>
+              <a:ea typeface="微软雅黑" pitchFamily="34" charset="-122"/>
+              <a:cs typeface="微软雅黑" pitchFamily="34" charset="-120"/>
+            </a:endParaRPr>
+          </a:p>
+          <a:p>
+            <a:pPr marL="190500" indent="-190500" algn="l">
+              <a:lnSpc>
+                <a:spcPct val="150000"/>
+              </a:lnSpc>
+              <a:buSzPct val="100000"/>
+              <a:buChar char="•"/>
+            </a:pPr>
+            <a:endParaRPr lang="en-US" b="1" dirty="0"/>
+          </a:p>
+          <a:p>
+            <a:pPr marL="190500" indent="-190500" algn="l">
+              <a:lnSpc>
+                <a:spcPct val="150000"/>
+              </a:lnSpc>
+              <a:buSzPct val="100000"/>
+              <a:buChar char="•"/>
+            </a:pPr>
+            <a:r>
+              <a:rPr lang="en-US" b="1" dirty="0">
+                <a:solidFill>
+                  <a:srgbClr val="383838"/>
+                </a:solidFill>
+                <a:latin typeface="微软雅黑" pitchFamily="34" charset="0"/>
+                <a:ea typeface="微软雅黑" pitchFamily="34" charset="-122"/>
+                <a:cs typeface="微软雅黑" pitchFamily="34" charset="-120"/>
+              </a:rPr>
+              <a:t>崩溃时</a:t>
+            </a:r>
+            <a:r>
+              <a:rPr lang="en-US" b="1" dirty="0">
+                <a:solidFill>
+                  <a:srgbClr val="FF0000"/>
+                </a:solidFill>
+                <a:latin typeface="微软雅黑" pitchFamily="34" charset="0"/>
+                <a:ea typeface="微软雅黑" pitchFamily="34" charset="-122"/>
+                <a:cs typeface="微软雅黑" pitchFamily="34" charset="-120"/>
+              </a:rPr>
+              <a:t>不影响其他内核线程和内核</a:t>
+            </a:r>
+            <a:r>
+              <a:rPr lang="zh-CN" altLang="en-US" b="1" dirty="0">
+                <a:solidFill>
+                  <a:srgbClr val="FF0000"/>
+                </a:solidFill>
+                <a:latin typeface="微软雅黑" pitchFamily="34" charset="0"/>
+                <a:ea typeface="宋体" charset="0"/>
+                <a:cs typeface="微软雅黑" pitchFamily="34" charset="-120"/>
+              </a:rPr>
+              <a:t>，可尝试重启</a:t>
+            </a:r>
+            <a:endParaRPr lang="zh-CN" altLang="en-US" b="1" dirty="0">
+              <a:solidFill>
+                <a:srgbClr val="FF0000"/>
+              </a:solidFill>
+              <a:latin typeface="微软雅黑" pitchFamily="34" charset="0"/>
+              <a:ea typeface="宋体" charset="0"/>
+              <a:cs typeface="微软雅黑" pitchFamily="34" charset="-120"/>
+            </a:endParaRPr>
           </a:p>
         </p:txBody>
       </p:sp>
       <p:pic>
         <p:nvPicPr>
-          <p:cNvPr id="10" name="图片 9"/>
+          <p:cNvPr id="5" name="Image 1" descr="preencoded.png"/>
           <p:cNvPicPr>
             <a:picLocks noChangeAspect="1"/>
           </p:cNvPicPr>
@@ -6506,36 +5801,19 @@
         </p:blipFill>
         <p:spPr>
           <a:xfrm>
-            <a:off x="271145" y="1201420"/>
-            <a:ext cx="4138930" cy="3409315"/>
+            <a:off x="2513330" y="995045"/>
+            <a:ext cx="6558280" cy="3432175"/>
           </a:xfrm>
           <a:prstGeom prst="rect">
             <a:avLst/>
           </a:prstGeom>
-        </p:spPr>
-      </p:pic>
-      <p:pic>
-        <p:nvPicPr>
-          <p:cNvPr id="11" name="图片 10"/>
-          <p:cNvPicPr>
-            <a:picLocks noChangeAspect="1"/>
-          </p:cNvPicPr>
-          <p:nvPr/>
-        </p:nvPicPr>
-        <p:blipFill>
-          <a:blip r:embed="rId3"/>
-          <a:stretch>
-            <a:fillRect/>
-          </a:stretch>
-        </p:blipFill>
-        <p:spPr>
-          <a:xfrm>
-            <a:off x="4754880" y="871855"/>
-            <a:ext cx="4389120" cy="3978275"/>
-          </a:xfrm>
-          <a:prstGeom prst="rect">
-            <a:avLst/>
-          </a:prstGeom>
+          <a:effectLst>
+            <a:outerShdw blurRad="50800" dist="1270" dir="60000" algn="bl" rotWithShape="0">
+              <a:srgbClr val="000000">
+                <a:alpha val="12000"/>
+              </a:srgbClr>
+            </a:outerShdw>
+          </a:effectLst>
         </p:spPr>
       </p:pic>
     </p:spTree>
@@ -6650,15 +5928,15 @@
               <a:buChar char="•"/>
             </a:pPr>
             <a:r>
-              <a:rPr lang="en-US" sz="2400" dirty="0">
+              <a:rPr lang="zh-CN" altLang="en-US" sz="2400" dirty="0">
                 <a:solidFill>
                   <a:srgbClr val="000000"/>
                 </a:solidFill>
                 <a:latin typeface="微软雅黑" pitchFamily="34" charset="0"/>
-                <a:ea typeface="微软雅黑" pitchFamily="34" charset="-122"/>
-                <a:cs typeface="微软雅黑" pitchFamily="34" charset="-120"/>
-              </a:rPr>
-              <a:t>内核服务可靠性增强设计</a:t>
+                <a:ea typeface="宋体" charset="0"/>
+                <a:cs typeface="微软雅黑" pitchFamily="34" charset="-120"/>
+              </a:rPr>
+              <a:t>可靠性增强内核架构设计</a:t>
             </a:r>
             <a:endParaRPr lang="en-US" sz="2400" dirty="0"/>
           </a:p>
@@ -6731,16 +6009,40 @@
           <a:chExt cx="0" cy="0"/>
         </a:xfrm>
       </p:grpSpPr>
-      <p:sp>
-        <p:nvSpPr>
-          <p:cNvPr id="2" name="Text 0"/>
+      <p:pic>
+        <p:nvPicPr>
+          <p:cNvPr id="2" name="Image 0" descr="preencoded.png"/>
+          <p:cNvPicPr>
+            <a:picLocks noChangeAspect="1"/>
+          </p:cNvPicPr>
+          <p:nvPr/>
+        </p:nvPicPr>
+        <p:blipFill>
+          <a:blip r:embed="rId1"/>
+          <a:stretch>
+            <a:fillRect/>
+          </a:stretch>
+        </p:blipFill>
+        <p:spPr>
+          <a:xfrm>
+            <a:off x="0" y="0"/>
+            <a:ext cx="9144000" cy="1276350"/>
+          </a:xfrm>
+          <a:prstGeom prst="rect">
+            <a:avLst/>
+          </a:prstGeom>
+        </p:spPr>
+      </p:pic>
+      <p:sp>
+        <p:nvSpPr>
+          <p:cNvPr id="3" name="Text 0"/>
           <p:cNvSpPr/>
           <p:nvPr/>
         </p:nvSpPr>
         <p:spPr>
           <a:xfrm>
-            <a:off x="509588" y="1952625"/>
-            <a:ext cx="1452563" cy="1243013"/>
+            <a:off x="962025" y="133350"/>
+            <a:ext cx="7806690" cy="552450"/>
           </a:xfrm>
           <a:prstGeom prst="rect">
             <a:avLst/>
@@ -6751,34 +6053,34 @@
           <a:bodyPr wrap="square" rtlCol="0" anchor="ctr"/>
           <a:lstStyle/>
           <a:p>
-            <a:pPr marL="0" indent="0" algn="ctr">
+            <a:pPr marL="0" indent="0" algn="l">
               <a:buNone/>
             </a:pPr>
             <a:r>
-              <a:rPr lang="en-US" sz="5760" b="1" dirty="0">
-                <a:solidFill>
-                  <a:srgbClr val="FFFFFF"/>
+              <a:rPr lang="en-US" sz="2660" b="1" dirty="0">
+                <a:solidFill>
+                  <a:srgbClr val="1C3C5F"/>
                 </a:solidFill>
                 <a:latin typeface="微软雅黑" pitchFamily="34" charset="0"/>
                 <a:ea typeface="微软雅黑" pitchFamily="34" charset="-122"/>
                 <a:cs typeface="微软雅黑" pitchFamily="34" charset="-120"/>
               </a:rPr>
-              <a:t>02</a:t>
-            </a:r>
-            <a:endParaRPr lang="en-US" sz="5760" dirty="0"/>
-          </a:p>
-        </p:txBody>
-      </p:sp>
-      <p:sp>
-        <p:nvSpPr>
-          <p:cNvPr id="3" name="Text 1"/>
+              <a:t>协程执行器线程设计</a:t>
+            </a:r>
+            <a:endParaRPr lang="en-US" sz="2660" dirty="0"/>
+          </a:p>
+        </p:txBody>
+      </p:sp>
+      <p:sp>
+        <p:nvSpPr>
+          <p:cNvPr id="4" name="Text 1"/>
           <p:cNvSpPr/>
           <p:nvPr/>
         </p:nvSpPr>
         <p:spPr>
           <a:xfrm>
-            <a:off x="3267075" y="2128838"/>
-            <a:ext cx="5101590" cy="1647825"/>
+            <a:off x="127000" y="1061720"/>
+            <a:ext cx="2452370" cy="3453130"/>
           </a:xfrm>
           <a:prstGeom prst="rect">
             <a:avLst/>
@@ -6789,24 +6091,142 @@
           <a:bodyPr wrap="square" rtlCol="0" anchor="t"/>
           <a:lstStyle/>
           <a:p>
-            <a:pPr marL="0" indent="0" algn="l">
-              <a:buNone/>
-            </a:pPr>
-            <a:r>
-              <a:rPr lang="en-US" sz="3500" b="1" dirty="0">
-                <a:solidFill>
-                  <a:srgbClr val="1C3C5F"/>
+            <a:pPr marL="190500" indent="-190500" algn="l">
+              <a:lnSpc>
+                <a:spcPct val="150000"/>
+              </a:lnSpc>
+              <a:buSzPct val="100000"/>
+              <a:buChar char="•"/>
+            </a:pPr>
+            <a:r>
+              <a:rPr lang="en-US" sz="1680" b="1" dirty="0">
+                <a:solidFill>
+                  <a:srgbClr val="383838"/>
                 </a:solidFill>
                 <a:latin typeface="微软雅黑" pitchFamily="34" charset="0"/>
                 <a:ea typeface="微软雅黑" pitchFamily="34" charset="-122"/>
                 <a:cs typeface="微软雅黑" pitchFamily="34" charset="-120"/>
               </a:rPr>
-              <a:t>内核服务可靠性增强设计</a:t>
-            </a:r>
-            <a:endParaRPr lang="en-US" sz="3500" dirty="0"/>
-          </a:p>
-        </p:txBody>
-      </p:sp>
+              <a:t>以Rust无栈异步协程代替传统内核线程</a:t>
+            </a:r>
+            <a:endParaRPr lang="en-US" sz="1680" b="1" dirty="0">
+              <a:solidFill>
+                <a:srgbClr val="383838"/>
+              </a:solidFill>
+              <a:latin typeface="微软雅黑" pitchFamily="34" charset="0"/>
+              <a:ea typeface="微软雅黑" pitchFamily="34" charset="-122"/>
+              <a:cs typeface="微软雅黑" pitchFamily="34" charset="-120"/>
+            </a:endParaRPr>
+          </a:p>
+          <a:p>
+            <a:pPr marL="190500" indent="-190500" algn="l">
+              <a:lnSpc>
+                <a:spcPct val="150000"/>
+              </a:lnSpc>
+              <a:buSzPct val="100000"/>
+              <a:buChar char="•"/>
+            </a:pPr>
+            <a:endParaRPr lang="en-US" sz="1680" b="1" dirty="0"/>
+          </a:p>
+          <a:p>
+            <a:pPr marL="190500" indent="-190500" algn="l">
+              <a:lnSpc>
+                <a:spcPct val="150000"/>
+              </a:lnSpc>
+              <a:buSzPct val="100000"/>
+              <a:buChar char="•"/>
+            </a:pPr>
+            <a:r>
+              <a:rPr lang="en-US" sz="1680" b="1" dirty="0">
+                <a:solidFill>
+                  <a:srgbClr val="FF0000"/>
+                </a:solidFill>
+                <a:latin typeface="微软雅黑" pitchFamily="34" charset="0"/>
+                <a:ea typeface="微软雅黑" pitchFamily="34" charset="-122"/>
+                <a:cs typeface="微软雅黑" pitchFamily="34" charset="-120"/>
+              </a:rPr>
+              <a:t>降低上下文切换开销</a:t>
+            </a:r>
+            <a:endParaRPr lang="en-US" sz="1680" b="1" dirty="0">
+              <a:solidFill>
+                <a:srgbClr val="383838"/>
+              </a:solidFill>
+              <a:latin typeface="微软雅黑" pitchFamily="34" charset="0"/>
+              <a:ea typeface="微软雅黑" pitchFamily="34" charset="-122"/>
+              <a:cs typeface="微软雅黑" pitchFamily="34" charset="-120"/>
+            </a:endParaRPr>
+          </a:p>
+          <a:p>
+            <a:pPr marL="190500" indent="-190500" algn="l">
+              <a:lnSpc>
+                <a:spcPct val="150000"/>
+              </a:lnSpc>
+              <a:buSzPct val="100000"/>
+              <a:buChar char="•"/>
+            </a:pPr>
+            <a:endParaRPr lang="en-US" sz="1680" b="1" dirty="0"/>
+          </a:p>
+          <a:p>
+            <a:pPr marL="190500" indent="-190500" algn="l">
+              <a:lnSpc>
+                <a:spcPct val="150000"/>
+              </a:lnSpc>
+              <a:buSzPct val="100000"/>
+              <a:buChar char="•"/>
+            </a:pPr>
+            <a:r>
+              <a:rPr lang="en-US" sz="1680" b="1" dirty="0">
+                <a:solidFill>
+                  <a:srgbClr val="FF0000"/>
+                </a:solidFill>
+                <a:latin typeface="微软雅黑" pitchFamily="34" charset="0"/>
+                <a:ea typeface="微软雅黑" pitchFamily="34" charset="-122"/>
+                <a:cs typeface="微软雅黑" pitchFamily="34" charset="-120"/>
+              </a:rPr>
+              <a:t>节省内存</a:t>
+            </a:r>
+            <a:endParaRPr lang="en-US" sz="1680" b="1" dirty="0">
+              <a:solidFill>
+                <a:srgbClr val="FF0000"/>
+              </a:solidFill>
+              <a:latin typeface="微软雅黑" pitchFamily="34" charset="0"/>
+              <a:ea typeface="微软雅黑" pitchFamily="34" charset="-122"/>
+              <a:cs typeface="微软雅黑" pitchFamily="34" charset="-120"/>
+            </a:endParaRPr>
+          </a:p>
+        </p:txBody>
+      </p:sp>
+      <p:pic>
+        <p:nvPicPr>
+          <p:cNvPr id="5" name="Image 1" descr="preencoded.png"/>
+          <p:cNvPicPr>
+            <a:picLocks noChangeAspect="1"/>
+          </p:cNvPicPr>
+          <p:nvPr/>
+        </p:nvPicPr>
+        <p:blipFill>
+          <a:blip r:embed="rId2"/>
+          <a:stretch>
+            <a:fillRect/>
+          </a:stretch>
+        </p:blipFill>
+        <p:spPr>
+          <a:xfrm>
+            <a:off x="2610485" y="718820"/>
+            <a:ext cx="6162040" cy="4402455"/>
+          </a:xfrm>
+          <a:prstGeom prst="rect">
+            <a:avLst/>
+          </a:prstGeom>
+          <a:effectLst>
+            <a:outerShdw blurRad="50800" dist="1270" dir="60000" algn="bl" rotWithShape="0">
+              <a:srgbClr val="000000">
+                <a:alpha val="12000"/>
+              </a:srgbClr>
+            </a:outerShdw>
+          </a:effectLst>
+        </p:spPr>
+      </p:pic>
     </p:spTree>
   </p:cSld>
   <p:clrMapOvr>
@@ -6888,7 +6308,7 @@
                 <a:ea typeface="微软雅黑" pitchFamily="34" charset="-122"/>
                 <a:cs typeface="微软雅黑" pitchFamily="34" charset="-120"/>
               </a:rPr>
-              <a:t>内核服务可靠性增强设计</a:t>
+              <a:t>内核服务线程故障恢复</a:t>
             </a:r>
             <a:endParaRPr lang="en-US" sz="2660" dirty="0"/>
           </a:p>
@@ -6902,8 +6322,8 @@
         </p:nvSpPr>
         <p:spPr>
           <a:xfrm>
-            <a:off x="904875" y="1062038"/>
-            <a:ext cx="7715250" cy="3452813"/>
+            <a:off x="565150" y="4119245"/>
+            <a:ext cx="7386955" cy="861695"/>
           </a:xfrm>
           <a:prstGeom prst="rect">
             <a:avLst/>
@@ -6922,26 +6342,17 @@
               <a:buChar char="•"/>
             </a:pPr>
             <a:r>
-              <a:rPr lang="en-US" b="1" dirty="0">
-                <a:solidFill>
-                  <a:srgbClr val="FF0000"/>
+              <a:rPr lang="en-US" sz="1680" b="1" dirty="0">
+                <a:solidFill>
+                  <a:srgbClr val="383838"/>
                 </a:solidFill>
                 <a:latin typeface="微软雅黑" pitchFamily="34" charset="0"/>
                 <a:ea typeface="微软雅黑" pitchFamily="34" charset="-122"/>
                 <a:cs typeface="微软雅黑" pitchFamily="34" charset="-120"/>
-                <a:sym typeface="+mn-ea"/>
-              </a:rPr>
-              <a:t>多对多线程模型</a:t>
-            </a:r>
-            <a:endParaRPr lang="en-US" b="1" dirty="0">
-              <a:solidFill>
-                <a:srgbClr val="FF0000"/>
-              </a:solidFill>
-              <a:latin typeface="微软雅黑" pitchFamily="34" charset="0"/>
-              <a:ea typeface="微软雅黑" pitchFamily="34" charset="-122"/>
-              <a:cs typeface="微软雅黑" pitchFamily="34" charset="-120"/>
-              <a:sym typeface="+mn-ea"/>
-            </a:endParaRPr>
+              </a:rPr>
+              <a:t>内核服务线程故障时，其丢弃出错的请求，内核重置内核栈和控制流。</a:t>
+            </a:r>
+            <a:endParaRPr lang="en-US" sz="1680" b="1" dirty="0"/>
           </a:p>
           <a:p>
             <a:pPr marL="190500" indent="-190500" algn="l">
@@ -6951,43 +6362,8 @@
               <a:buSzPct val="100000"/>
               <a:buChar char="•"/>
             </a:pPr>
-            <a:endParaRPr lang="en-US" b="1" dirty="0">
-              <a:solidFill>
-                <a:srgbClr val="383838"/>
-              </a:solidFill>
-              <a:latin typeface="微软雅黑" pitchFamily="34" charset="0"/>
-              <a:ea typeface="微软雅黑" pitchFamily="34" charset="-122"/>
-              <a:cs typeface="微软雅黑" pitchFamily="34" charset="-120"/>
-              <a:sym typeface="+mn-ea"/>
-            </a:endParaRPr>
-          </a:p>
-          <a:p>
-            <a:pPr marL="190500" indent="-190500" algn="l">
-              <a:lnSpc>
-                <a:spcPct val="150000"/>
-              </a:lnSpc>
-              <a:buSzPct val="100000"/>
-              <a:buChar char="•"/>
-            </a:pPr>
-            <a:endParaRPr lang="en-US" b="1" dirty="0">
-              <a:solidFill>
-                <a:srgbClr val="383838"/>
-              </a:solidFill>
-              <a:latin typeface="微软雅黑" pitchFamily="34" charset="0"/>
-              <a:ea typeface="微软雅黑" pitchFamily="34" charset="-122"/>
-              <a:cs typeface="微软雅黑" pitchFamily="34" charset="-120"/>
-            </a:endParaRPr>
-          </a:p>
-          <a:p>
-            <a:pPr marL="190500" indent="-190500" algn="l">
-              <a:lnSpc>
-                <a:spcPct val="150000"/>
-              </a:lnSpc>
-              <a:buSzPct val="100000"/>
-              <a:buChar char="•"/>
-            </a:pPr>
-            <a:r>
-              <a:rPr lang="en-US" b="1" dirty="0">
+            <a:r>
+              <a:rPr lang="en-US" sz="1680" b="1" dirty="0">
                 <a:solidFill>
                   <a:srgbClr val="383838"/>
                 </a:solidFill>
@@ -6995,12 +6371,43 @@
                 <a:ea typeface="微软雅黑" pitchFamily="34" charset="-122"/>
                 <a:cs typeface="微软雅黑" pitchFamily="34" charset="-120"/>
               </a:rPr>
-              <a:t>内核服务线程故障恢复</a:t>
-            </a:r>
-            <a:endParaRPr lang="en-US" b="1" dirty="0"/>
-          </a:p>
-        </p:txBody>
-      </p:sp>
+              <a:t>任何内核服务线程故障不会影响内核和其余内核服务线程。</a:t>
+            </a:r>
+            <a:endParaRPr lang="en-US" sz="1680" b="1" dirty="0"/>
+          </a:p>
+        </p:txBody>
+      </p:sp>
+      <p:pic>
+        <p:nvPicPr>
+          <p:cNvPr id="5" name="Image 1" descr="preencoded.png"/>
+          <p:cNvPicPr>
+            <a:picLocks noChangeAspect="1"/>
+          </p:cNvPicPr>
+          <p:nvPr/>
+        </p:nvPicPr>
+        <p:blipFill>
+          <a:blip r:embed="rId2"/>
+          <a:stretch>
+            <a:fillRect/>
+          </a:stretch>
+        </p:blipFill>
+        <p:spPr>
+          <a:xfrm>
+            <a:off x="207010" y="864870"/>
+            <a:ext cx="8729980" cy="3202940"/>
+          </a:xfrm>
+          <a:prstGeom prst="rect">
+            <a:avLst/>
+          </a:prstGeom>
+          <a:effectLst>
+            <a:outerShdw blurRad="50800" dist="1270" dir="60000" algn="bl" rotWithShape="0">
+              <a:srgbClr val="000000">
+                <a:alpha val="12000"/>
+              </a:srgbClr>
+            </a:outerShdw>
+          </a:effectLst>
+        </p:spPr>
+      </p:pic>
     </p:spTree>
   </p:cSld>
   <p:clrMapOvr>
@@ -7026,40 +6433,16 @@
           <a:chExt cx="0" cy="0"/>
         </a:xfrm>
       </p:grpSpPr>
-      <p:pic>
-        <p:nvPicPr>
-          <p:cNvPr id="2" name="Image 0" descr="preencoded.png"/>
-          <p:cNvPicPr>
-            <a:picLocks noChangeAspect="1"/>
-          </p:cNvPicPr>
+      <p:sp>
+        <p:nvSpPr>
+          <p:cNvPr id="2" name="Text 0"/>
+          <p:cNvSpPr/>
           <p:nvPr/>
-        </p:nvPicPr>
-        <p:blipFill>
-          <a:blip r:embed="rId1"/>
-          <a:stretch>
-            <a:fillRect/>
-          </a:stretch>
-        </p:blipFill>
+        </p:nvSpPr>
         <p:spPr>
           <a:xfrm>
-            <a:off x="0" y="0"/>
-            <a:ext cx="9144000" cy="1276350"/>
-          </a:xfrm>
-          <a:prstGeom prst="rect">
-            <a:avLst/>
-          </a:prstGeom>
-        </p:spPr>
-      </p:pic>
-      <p:sp>
-        <p:nvSpPr>
-          <p:cNvPr id="3" name="Text 0"/>
-          <p:cNvSpPr/>
-          <p:nvPr/>
-        </p:nvSpPr>
-        <p:spPr>
-          <a:xfrm>
-            <a:off x="962025" y="133350"/>
-            <a:ext cx="7806690" cy="552450"/>
+            <a:off x="509588" y="1952625"/>
+            <a:ext cx="1452563" cy="1243013"/>
           </a:xfrm>
           <a:prstGeom prst="rect">
             <a:avLst/>
@@ -7070,65 +6453,34 @@
           <a:bodyPr wrap="square" rtlCol="0" anchor="ctr"/>
           <a:lstStyle/>
           <a:p>
-            <a:pPr marL="0" indent="0" algn="l">
+            <a:pPr marL="0" indent="0" algn="ctr">
               <a:buNone/>
             </a:pPr>
             <a:r>
-              <a:rPr lang="en-US" sz="2660" b="1" dirty="0">
-                <a:solidFill>
-                  <a:srgbClr val="1C3C5F"/>
+              <a:rPr lang="en-US" sz="5760" b="1" dirty="0">
+                <a:solidFill>
+                  <a:srgbClr val="FFFFFF"/>
                 </a:solidFill>
                 <a:latin typeface="微软雅黑" pitchFamily="34" charset="0"/>
                 <a:ea typeface="微软雅黑" pitchFamily="34" charset="-122"/>
                 <a:cs typeface="微软雅黑" pitchFamily="34" charset="-120"/>
               </a:rPr>
-              <a:t>多对多线程模型</a:t>
-            </a:r>
-            <a:endParaRPr lang="en-US" sz="2660" dirty="0"/>
-          </a:p>
-        </p:txBody>
-      </p:sp>
-      <p:pic>
-        <p:nvPicPr>
-          <p:cNvPr id="4" name="Image 1" descr="preencoded.png"/>
-          <p:cNvPicPr>
-            <a:picLocks noChangeAspect="1"/>
-          </p:cNvPicPr>
+              <a:t>03</a:t>
+            </a:r>
+            <a:endParaRPr lang="en-US" sz="5760" dirty="0"/>
+          </a:p>
+        </p:txBody>
+      </p:sp>
+      <p:sp>
+        <p:nvSpPr>
+          <p:cNvPr id="3" name="Text 1"/>
+          <p:cNvSpPr/>
           <p:nvPr/>
-        </p:nvPicPr>
-        <p:blipFill>
-          <a:blip r:embed="rId2"/>
-          <a:stretch>
-            <a:fillRect/>
-          </a:stretch>
-        </p:blipFill>
+        </p:nvSpPr>
         <p:spPr>
           <a:xfrm>
-            <a:off x="4652010" y="144780"/>
-            <a:ext cx="4358005" cy="4854575"/>
-          </a:xfrm>
-          <a:prstGeom prst="rect">
-            <a:avLst/>
-          </a:prstGeom>
-          <a:effectLst>
-            <a:outerShdw blurRad="50800" dist="1270" dir="60000" algn="bl" rotWithShape="0">
-              <a:srgbClr val="000000">
-                <a:alpha val="12000"/>
-              </a:srgbClr>
-            </a:outerShdw>
-          </a:effectLst>
-        </p:spPr>
-      </p:pic>
-      <p:sp>
-        <p:nvSpPr>
-          <p:cNvPr id="5" name="文本框 4"/>
-          <p:cNvSpPr txBox="1"/>
-          <p:nvPr/>
-        </p:nvSpPr>
-        <p:spPr>
-          <a:xfrm>
-            <a:off x="252095" y="812800"/>
-            <a:ext cx="4424045" cy="4029710"/>
+            <a:off x="3267075" y="2128838"/>
+            <a:ext cx="5101590" cy="1647825"/>
           </a:xfrm>
           <a:prstGeom prst="rect">
             <a:avLst/>
@@ -7136,109 +6488,30 @@
           <a:noFill/>
         </p:spPr>
         <p:txBody>
-          <a:bodyPr wrap="square" rtlCol="0" anchor="t">
-            <a:noAutofit/>
-          </a:bodyPr>
-          <a:p>
-            <a:pPr marL="285750" indent="-285750">
-              <a:buFont typeface="Wingdings" panose="05000000000000000000" charset="0"/>
-              <a:buChar char=""/>
-            </a:pPr>
-            <a:r>
-              <a:rPr lang="zh-CN" altLang="en-US" b="1"/>
-              <a:t>内核服务线程提供非核心服务（如文件系统、驱动程序等）</a:t>
-            </a:r>
-            <a:endParaRPr lang="zh-CN" altLang="en-US" b="1"/>
-          </a:p>
-          <a:p>
-            <a:pPr marL="285750" indent="-285750">
-              <a:buFont typeface="Wingdings" panose="05000000000000000000" charset="0"/>
-              <a:buChar char=""/>
-            </a:pPr>
-            <a:endParaRPr lang="zh-CN" altLang="en-US" b="1"/>
-          </a:p>
-          <a:p>
-            <a:pPr marL="285750" indent="-285750">
-              <a:buFont typeface="Wingdings" panose="05000000000000000000" charset="0"/>
-              <a:buChar char=""/>
-            </a:pPr>
-            <a:endParaRPr lang="zh-CN" altLang="en-US" b="1"/>
-          </a:p>
-          <a:p>
-            <a:pPr marL="285750" indent="-285750">
-              <a:buFont typeface="Wingdings" panose="05000000000000000000" charset="0"/>
-              <a:buChar char=""/>
-            </a:pPr>
-            <a:r>
-              <a:rPr lang="zh-CN" altLang="en-US" b="1"/>
-              <a:t>协程执行线程执行内核所有异步任务</a:t>
-            </a:r>
-            <a:endParaRPr lang="zh-CN" altLang="en-US" b="1"/>
-          </a:p>
-          <a:p>
-            <a:pPr marL="285750" indent="-285750">
-              <a:buFont typeface="Wingdings" panose="05000000000000000000" charset="0"/>
-              <a:buChar char=""/>
-            </a:pPr>
-            <a:endParaRPr lang="zh-CN" altLang="en-US" b="1"/>
-          </a:p>
-          <a:p>
-            <a:pPr marL="285750" indent="-285750">
-              <a:buFont typeface="Wingdings" panose="05000000000000000000" charset="0"/>
-              <a:buChar char=""/>
-            </a:pPr>
-            <a:endParaRPr lang="zh-CN" altLang="en-US" b="1"/>
-          </a:p>
-          <a:p>
-            <a:pPr marL="285750" indent="-285750">
-              <a:buFont typeface="Wingdings" panose="05000000000000000000" charset="0"/>
-              <a:buChar char=""/>
-            </a:pPr>
-            <a:r>
-              <a:rPr lang="zh-CN" altLang="en-US" b="1"/>
-              <a:t>微内核线程（根线程）提供核心服务（任务管理、内存管理等）</a:t>
-            </a:r>
-            <a:endParaRPr lang="zh-CN" altLang="en-US" b="1"/>
-          </a:p>
-          <a:p>
-            <a:pPr marL="285750" indent="-285750">
-              <a:buFont typeface="Wingdings" panose="05000000000000000000" charset="0"/>
-              <a:buChar char=""/>
-            </a:pPr>
-            <a:endParaRPr lang="en-US" altLang="zh-CN" b="1"/>
-          </a:p>
-          <a:p>
-            <a:pPr marL="285750" indent="-285750">
-              <a:buFont typeface="Wingdings" panose="05000000000000000000" charset="0"/>
-              <a:buChar char=""/>
-            </a:pPr>
-            <a:endParaRPr lang="en-US" altLang="zh-CN" b="1"/>
-          </a:p>
-          <a:p>
-            <a:pPr marL="285750" indent="-285750">
-              <a:buFont typeface="Wingdings" panose="05000000000000000000" charset="0"/>
-              <a:buChar char=""/>
-            </a:pPr>
-            <a:r>
-              <a:rPr lang="zh-CN" altLang="en-US" b="1">
+          <a:bodyPr wrap="square" rtlCol="0" anchor="t"/>
+          <a:lstStyle/>
+          <a:p>
+            <a:pPr marL="0" indent="0" algn="l">
+              <a:buNone/>
+            </a:pPr>
+            <a:r>
+              <a:rPr lang="zh-CN" altLang="en-US" sz="3500" b="1" dirty="0">
+                <a:solidFill>
+                  <a:srgbClr val="1C3C5F"/>
+                </a:solidFill>
+                <a:latin typeface="微软雅黑" pitchFamily="34" charset="0"/>
                 <a:ea typeface="宋体" charset="0"/>
-              </a:rPr>
-              <a:t>三种内核线程</a:t>
-            </a:r>
-            <a:r>
-              <a:rPr lang="zh-CN" altLang="en-US" b="1">
-                <a:solidFill>
-                  <a:srgbClr val="FF0000"/>
-                </a:solidFill>
-                <a:ea typeface="宋体" charset="0"/>
-              </a:rPr>
-              <a:t>共同服务所有用户线程</a:t>
-            </a:r>
-            <a:endParaRPr lang="zh-CN" altLang="en-US" b="1">
+                <a:cs typeface="微软雅黑" pitchFamily="34" charset="-120"/>
+              </a:rPr>
+              <a:t>用户程序支持</a:t>
+            </a:r>
+            <a:endParaRPr lang="zh-CN" altLang="en-US" sz="3500" b="1" dirty="0">
               <a:solidFill>
-                <a:srgbClr val="FF0000"/>
+                <a:srgbClr val="1C3C5F"/>
               </a:solidFill>
+              <a:latin typeface="微软雅黑" pitchFamily="34" charset="0"/>
               <a:ea typeface="宋体" charset="0"/>
+              <a:cs typeface="微软雅黑" pitchFamily="34" charset="-120"/>
             </a:endParaRPr>
           </a:p>
         </p:txBody>
@@ -7316,7 +6589,7 @@
               <a:buNone/>
             </a:pPr>
             <a:r>
-              <a:rPr lang="en-US" sz="2660" b="1" dirty="0">
+              <a:rPr lang="en-US" altLang="zh-CN" sz="2660" b="1" dirty="0">
                 <a:solidFill>
                   <a:srgbClr val="1C3C5F"/>
                 </a:solidFill>
@@ -7324,9 +6597,49 @@
                 <a:ea typeface="微软雅黑" pitchFamily="34" charset="-122"/>
                 <a:cs typeface="微软雅黑" pitchFamily="34" charset="-120"/>
               </a:rPr>
-              <a:t>内核服务线程设计</a:t>
-            </a:r>
-            <a:endParaRPr lang="en-US" sz="2660" dirty="0"/>
+              <a:t>musl-libc</a:t>
+            </a:r>
+            <a:r>
+              <a:rPr lang="zh-CN" altLang="en-US" sz="2660" b="1" dirty="0">
+                <a:solidFill>
+                  <a:srgbClr val="1C3C5F"/>
+                </a:solidFill>
+                <a:latin typeface="微软雅黑" pitchFamily="34" charset="0"/>
+                <a:ea typeface="宋体" charset="0"/>
+                <a:cs typeface="微软雅黑" pitchFamily="34" charset="-120"/>
+              </a:rPr>
+              <a:t>和</a:t>
+            </a:r>
+            <a:r>
+              <a:rPr lang="en-US" altLang="zh-CN" sz="2660" b="1" dirty="0">
+                <a:solidFill>
+                  <a:srgbClr val="1C3C5F"/>
+                </a:solidFill>
+                <a:latin typeface="微软雅黑" pitchFamily="34" charset="0"/>
+                <a:ea typeface="宋体" charset="0"/>
+                <a:cs typeface="微软雅黑" pitchFamily="34" charset="-120"/>
+              </a:rPr>
+              <a:t>C</a:t>
+            </a:r>
+            <a:r>
+              <a:rPr lang="zh-CN" altLang="en-US" sz="2660" b="1" dirty="0">
+                <a:solidFill>
+                  <a:srgbClr val="1C3C5F"/>
+                </a:solidFill>
+                <a:latin typeface="微软雅黑" pitchFamily="34" charset="0"/>
+                <a:ea typeface="宋体" charset="0"/>
+                <a:cs typeface="微软雅黑" pitchFamily="34" charset="-120"/>
+              </a:rPr>
+              <a:t>语言用户程序</a:t>
+            </a:r>
+            <a:endParaRPr lang="zh-CN" altLang="en-US" sz="2660" b="1" dirty="0">
+              <a:solidFill>
+                <a:srgbClr val="1C3C5F"/>
+              </a:solidFill>
+              <a:latin typeface="微软雅黑" pitchFamily="34" charset="0"/>
+              <a:ea typeface="宋体" charset="0"/>
+              <a:cs typeface="微软雅黑" pitchFamily="34" charset="-120"/>
+            </a:endParaRPr>
           </a:p>
         </p:txBody>
       </p:sp>
@@ -7338,8 +6651,8 @@
         </p:nvSpPr>
         <p:spPr>
           <a:xfrm>
-            <a:off x="130175" y="944880"/>
-            <a:ext cx="2310765" cy="3416300"/>
+            <a:off x="904875" y="1062038"/>
+            <a:ext cx="7715250" cy="3452813"/>
           </a:xfrm>
           <a:prstGeom prst="rect">
             <a:avLst/>
@@ -7358,7 +6671,7 @@
               <a:buChar char="•"/>
             </a:pPr>
             <a:r>
-              <a:rPr lang="en-US" b="1" dirty="0">
+              <a:rPr lang="zh-CN" altLang="en-US" b="1" dirty="0">
                 <a:solidFill>
                   <a:srgbClr val="383838"/>
                 </a:solidFill>
@@ -7366,8 +6679,113 @@
                 <a:ea typeface="微软雅黑" pitchFamily="34" charset="-122"/>
                 <a:cs typeface="微软雅黑" pitchFamily="34" charset="-120"/>
               </a:rPr>
-              <a:t>提供一种特定的内核服务</a:t>
-            </a:r>
+              <a:t>由于直接支持</a:t>
+            </a:r>
+            <a:r>
+              <a:rPr lang="en-US" altLang="zh-CN" b="1" dirty="0">
+                <a:solidFill>
+                  <a:srgbClr val="383838"/>
+                </a:solidFill>
+                <a:latin typeface="微软雅黑" pitchFamily="34" charset="0"/>
+                <a:ea typeface="微软雅黑" pitchFamily="34" charset="-122"/>
+                <a:cs typeface="微软雅黑" pitchFamily="34" charset="-120"/>
+              </a:rPr>
+              <a:t>Linux</a:t>
+            </a:r>
+            <a:r>
+              <a:rPr lang="zh-CN" altLang="en-US" b="1" dirty="0">
+                <a:solidFill>
+                  <a:srgbClr val="383838"/>
+                </a:solidFill>
+                <a:latin typeface="微软雅黑" pitchFamily="34" charset="0"/>
+                <a:ea typeface="宋体" charset="0"/>
+                <a:cs typeface="微软雅黑" pitchFamily="34" charset="-120"/>
+              </a:rPr>
+              <a:t>系统调用，只要符合</a:t>
+            </a:r>
+            <a:r>
+              <a:rPr lang="en-US" altLang="zh-CN" b="1" dirty="0">
+                <a:solidFill>
+                  <a:srgbClr val="383838"/>
+                </a:solidFill>
+                <a:latin typeface="微软雅黑" pitchFamily="34" charset="0"/>
+                <a:ea typeface="宋体" charset="0"/>
+                <a:cs typeface="微软雅黑" pitchFamily="34" charset="-120"/>
+              </a:rPr>
+              <a:t>Linux</a:t>
+            </a:r>
+            <a:r>
+              <a:rPr lang="zh-CN" altLang="en-US" b="1" dirty="0">
+                <a:solidFill>
+                  <a:srgbClr val="383838"/>
+                </a:solidFill>
+                <a:latin typeface="微软雅黑" pitchFamily="34" charset="0"/>
+                <a:ea typeface="宋体" charset="0"/>
+                <a:cs typeface="微软雅黑" pitchFamily="34" charset="-120"/>
+              </a:rPr>
+              <a:t>用户栈调用约定和</a:t>
+            </a:r>
+            <a:r>
+              <a:rPr lang="en-US" altLang="zh-CN" b="1" dirty="0">
+                <a:solidFill>
+                  <a:srgbClr val="383838"/>
+                </a:solidFill>
+                <a:latin typeface="微软雅黑" pitchFamily="34" charset="0"/>
+                <a:ea typeface="宋体" charset="0"/>
+                <a:cs typeface="微软雅黑" pitchFamily="34" charset="-120"/>
+              </a:rPr>
+              <a:t>musl</a:t>
+            </a:r>
+            <a:r>
+              <a:rPr lang="zh-CN" altLang="en-US" b="1" dirty="0">
+                <a:solidFill>
+                  <a:srgbClr val="383838"/>
+                </a:solidFill>
+                <a:latin typeface="微软雅黑" pitchFamily="34" charset="0"/>
+                <a:ea typeface="宋体" charset="0"/>
+                <a:cs typeface="微软雅黑" pitchFamily="34" charset="-120"/>
+              </a:rPr>
+              <a:t>线程库实现约定，就可以完成对</a:t>
+            </a:r>
+            <a:r>
+              <a:rPr lang="en-US" altLang="zh-CN" b="1" dirty="0">
+                <a:solidFill>
+                  <a:srgbClr val="383838"/>
+                </a:solidFill>
+                <a:latin typeface="微软雅黑" pitchFamily="34" charset="0"/>
+                <a:ea typeface="宋体" charset="0"/>
+                <a:cs typeface="微软雅黑" pitchFamily="34" charset="-120"/>
+              </a:rPr>
+              <a:t>musl</a:t>
+            </a:r>
+            <a:r>
+              <a:rPr lang="zh-CN" altLang="en-US" b="1" dirty="0">
+                <a:solidFill>
+                  <a:srgbClr val="383838"/>
+                </a:solidFill>
+                <a:latin typeface="微软雅黑" pitchFamily="34" charset="0"/>
+                <a:ea typeface="宋体" charset="0"/>
+                <a:cs typeface="微软雅黑" pitchFamily="34" charset="-120"/>
+              </a:rPr>
+              <a:t>的支持。</a:t>
+            </a:r>
+            <a:endParaRPr lang="zh-CN" altLang="en-US" b="1" dirty="0">
+              <a:solidFill>
+                <a:srgbClr val="383838"/>
+              </a:solidFill>
+              <a:latin typeface="微软雅黑" pitchFamily="34" charset="0"/>
+              <a:ea typeface="微软雅黑" pitchFamily="34" charset="-122"/>
+              <a:cs typeface="微软雅黑" pitchFamily="34" charset="-120"/>
+            </a:endParaRPr>
+          </a:p>
+          <a:p>
+            <a:pPr marL="190500" indent="-190500" algn="l">
+              <a:lnSpc>
+                <a:spcPct val="150000"/>
+              </a:lnSpc>
+              <a:buSzPct val="100000"/>
+              <a:buChar char="•"/>
+            </a:pPr>
             <a:endParaRPr lang="en-US" b="1" dirty="0">
               <a:solidFill>
                 <a:srgbClr val="383838"/>
@@ -7385,7 +6803,14 @@
               <a:buSzPct val="100000"/>
               <a:buChar char="•"/>
             </a:pPr>
-            <a:endParaRPr lang="en-US" b="1" dirty="0"/>
+            <a:endParaRPr lang="en-US" b="1" dirty="0">
+              <a:solidFill>
+                <a:srgbClr val="383838"/>
+              </a:solidFill>
+              <a:latin typeface="微软雅黑" pitchFamily="34" charset="0"/>
+              <a:ea typeface="微软雅黑" pitchFamily="34" charset="-122"/>
+              <a:cs typeface="微软雅黑" pitchFamily="34" charset="-120"/>
+            </a:endParaRPr>
           </a:p>
           <a:p>
             <a:pPr marL="190500" indent="-190500" algn="l">
@@ -7396,7 +6821,7 @@
               <a:buChar char="•"/>
             </a:pPr>
             <a:r>
-              <a:rPr lang="en-US" b="1" dirty="0">
+              <a:rPr lang="zh-CN" altLang="en-US" b="1" dirty="0">
                 <a:solidFill>
                   <a:srgbClr val="383838"/>
                 </a:solidFill>
@@ -7404,110 +6829,107 @@
                 <a:ea typeface="微软雅黑" pitchFamily="34" charset="-122"/>
                 <a:cs typeface="微软雅黑" pitchFamily="34" charset="-120"/>
               </a:rPr>
-              <a:t>拥有</a:t>
-            </a:r>
-            <a:r>
-              <a:rPr lang="en-US" b="1" dirty="0">
-                <a:solidFill>
-                  <a:srgbClr val="FF0000"/>
+              <a:t>实际测试时，在</a:t>
+            </a:r>
+            <a:r>
+              <a:rPr lang="en-US" altLang="zh-CN" b="1" dirty="0">
+                <a:solidFill>
+                  <a:srgbClr val="383838"/>
                 </a:solidFill>
                 <a:latin typeface="微软雅黑" pitchFamily="34" charset="0"/>
                 <a:ea typeface="微软雅黑" pitchFamily="34" charset="-122"/>
                 <a:cs typeface="微软雅黑" pitchFamily="34" charset="-120"/>
               </a:rPr>
-              <a:t>独立的内核栈和控制流</a:t>
-            </a:r>
-            <a:endParaRPr lang="en-US" b="1" dirty="0">
+              <a:t>Linux</a:t>
+            </a:r>
+            <a:r>
+              <a:rPr lang="zh-CN" altLang="en-US" b="1" dirty="0">
+                <a:solidFill>
+                  <a:srgbClr val="383838"/>
+                </a:solidFill>
+                <a:latin typeface="微软雅黑" pitchFamily="34" charset="0"/>
+                <a:ea typeface="宋体" charset="0"/>
+                <a:cs typeface="微软雅黑" pitchFamily="34" charset="-120"/>
+              </a:rPr>
+              <a:t>宿主机上编译好</a:t>
+            </a:r>
+            <a:r>
+              <a:rPr lang="en-US" altLang="zh-CN" b="1" dirty="0">
+                <a:solidFill>
+                  <a:srgbClr val="383838"/>
+                </a:solidFill>
+                <a:latin typeface="微软雅黑" pitchFamily="34" charset="0"/>
+                <a:ea typeface="宋体" charset="0"/>
+                <a:cs typeface="微软雅黑" pitchFamily="34" charset="-120"/>
+              </a:rPr>
+              <a:t>C</a:t>
+            </a:r>
+            <a:r>
+              <a:rPr lang="zh-CN" altLang="en-US" b="1" dirty="0">
+                <a:solidFill>
+                  <a:srgbClr val="383838"/>
+                </a:solidFill>
+                <a:latin typeface="微软雅黑" pitchFamily="34" charset="0"/>
+                <a:ea typeface="宋体" charset="0"/>
+                <a:cs typeface="微软雅黑" pitchFamily="34" charset="-120"/>
+              </a:rPr>
+              <a:t>程序确保可正常运行，再将</a:t>
+            </a:r>
+            <a:r>
+              <a:rPr lang="en-US" altLang="zh-CN" b="1" dirty="0">
+                <a:solidFill>
+                  <a:srgbClr val="383838"/>
+                </a:solidFill>
+                <a:latin typeface="微软雅黑" pitchFamily="34" charset="0"/>
+                <a:ea typeface="宋体" charset="0"/>
+                <a:cs typeface="微软雅黑" pitchFamily="34" charset="-120"/>
+              </a:rPr>
+              <a:t>elf</a:t>
+            </a:r>
+            <a:r>
+              <a:rPr lang="zh-CN" altLang="en-US" b="1" dirty="0">
+                <a:solidFill>
+                  <a:srgbClr val="383838"/>
+                </a:solidFill>
+                <a:latin typeface="微软雅黑" pitchFamily="34" charset="0"/>
+                <a:ea typeface="宋体" charset="0"/>
+                <a:cs typeface="微软雅黑" pitchFamily="34" charset="-120"/>
+              </a:rPr>
+              <a:t>文件打包到</a:t>
+            </a:r>
+            <a:r>
+              <a:rPr lang="en-US" altLang="zh-CN" b="1" dirty="0">
+                <a:solidFill>
+                  <a:srgbClr val="383838"/>
+                </a:solidFill>
+                <a:latin typeface="微软雅黑" pitchFamily="34" charset="0"/>
+                <a:ea typeface="宋体" charset="0"/>
+                <a:cs typeface="微软雅黑" pitchFamily="34" charset="-120"/>
+              </a:rPr>
+              <a:t>Rust</a:t>
+            </a:r>
+            <a:r>
+              <a:rPr lang="zh-CN" altLang="en-US" b="1" dirty="0">
+                <a:solidFill>
+                  <a:srgbClr val="383838"/>
+                </a:solidFill>
+                <a:latin typeface="微软雅黑" pitchFamily="34" charset="0"/>
+                <a:ea typeface="宋体" charset="0"/>
+                <a:cs typeface="微软雅黑" pitchFamily="34" charset="-120"/>
+              </a:rPr>
+              <a:t>内核中测试运行。</a:t>
+            </a:r>
+            <a:endParaRPr lang="zh-CN" altLang="en-US" b="1" dirty="0">
               <a:solidFill>
-                <a:srgbClr val="FF0000"/>
+                <a:srgbClr val="383838"/>
               </a:solidFill>
               <a:latin typeface="微软雅黑" pitchFamily="34" charset="0"/>
-              <a:ea typeface="微软雅黑" pitchFamily="34" charset="-122"/>
+              <a:ea typeface="宋体" charset="0"/>
               <a:cs typeface="微软雅黑" pitchFamily="34" charset="-120"/>
             </a:endParaRPr>
           </a:p>
-          <a:p>
-            <a:pPr marL="190500" indent="-190500" algn="l">
-              <a:lnSpc>
-                <a:spcPct val="150000"/>
-              </a:lnSpc>
-              <a:buSzPct val="100000"/>
-              <a:buChar char="•"/>
-            </a:pPr>
-            <a:endParaRPr lang="en-US" b="1" dirty="0"/>
-          </a:p>
-          <a:p>
-            <a:pPr marL="190500" indent="-190500" algn="l">
-              <a:lnSpc>
-                <a:spcPct val="150000"/>
-              </a:lnSpc>
-              <a:buSzPct val="100000"/>
-              <a:buChar char="•"/>
-            </a:pPr>
-            <a:r>
-              <a:rPr lang="en-US" b="1" dirty="0">
-                <a:solidFill>
-                  <a:srgbClr val="383838"/>
-                </a:solidFill>
-                <a:latin typeface="微软雅黑" pitchFamily="34" charset="0"/>
-                <a:ea typeface="微软雅黑" pitchFamily="34" charset="-122"/>
-                <a:cs typeface="微软雅黑" pitchFamily="34" charset="-120"/>
-              </a:rPr>
-              <a:t>崩溃时</a:t>
-            </a:r>
-            <a:r>
-              <a:rPr lang="en-US" b="1" dirty="0">
-                <a:solidFill>
-                  <a:srgbClr val="FF0000"/>
-                </a:solidFill>
-                <a:latin typeface="微软雅黑" pitchFamily="34" charset="0"/>
-                <a:ea typeface="微软雅黑" pitchFamily="34" charset="-122"/>
-                <a:cs typeface="微软雅黑" pitchFamily="34" charset="-120"/>
-              </a:rPr>
-              <a:t>不影响其他内核线程和内核</a:t>
-            </a:r>
-            <a:endParaRPr lang="en-US" b="1" dirty="0">
-              <a:solidFill>
-                <a:srgbClr val="FF0000"/>
-              </a:solidFill>
-              <a:latin typeface="微软雅黑" pitchFamily="34" charset="0"/>
-              <a:ea typeface="微软雅黑" pitchFamily="34" charset="-122"/>
-              <a:cs typeface="微软雅黑" pitchFamily="34" charset="-120"/>
-            </a:endParaRPr>
-          </a:p>
-        </p:txBody>
-      </p:sp>
-      <p:pic>
-        <p:nvPicPr>
-          <p:cNvPr id="5" name="Image 1" descr="preencoded.png"/>
-          <p:cNvPicPr>
-            <a:picLocks noChangeAspect="1"/>
-          </p:cNvPicPr>
-          <p:nvPr/>
-        </p:nvPicPr>
-        <p:blipFill>
-          <a:blip r:embed="rId2"/>
-          <a:stretch>
-            <a:fillRect/>
-          </a:stretch>
-        </p:blipFill>
-        <p:spPr>
-          <a:xfrm>
-            <a:off x="2513330" y="995045"/>
-            <a:ext cx="6558280" cy="3432175"/>
-          </a:xfrm>
-          <a:prstGeom prst="rect">
-            <a:avLst/>
-          </a:prstGeom>
-          <a:effectLst>
-            <a:outerShdw blurRad="50800" dist="1270" dir="60000" algn="bl" rotWithShape="0">
-              <a:srgbClr val="000000">
-                <a:alpha val="12000"/>
-              </a:srgbClr>
-            </a:outerShdw>
-          </a:effectLst>
-        </p:spPr>
-      </p:pic>
+        </p:txBody>
+      </p:sp>
     </p:spTree>
   </p:cSld>
   <p:clrMapOvr>
@@ -7589,9 +7011,49 @@
                 <a:ea typeface="微软雅黑" pitchFamily="34" charset="-122"/>
                 <a:cs typeface="微软雅黑" pitchFamily="34" charset="-120"/>
               </a:rPr>
-              <a:t>协程执行器线程设计</a:t>
-            </a:r>
-            <a:endParaRPr lang="en-US" sz="2660" dirty="0"/>
+              <a:t>Busybox</a:t>
+            </a:r>
+            <a:r>
+              <a:rPr lang="zh-CN" altLang="en-US" sz="2660" b="1" dirty="0">
+                <a:solidFill>
+                  <a:srgbClr val="1C3C5F"/>
+                </a:solidFill>
+                <a:latin typeface="微软雅黑" pitchFamily="34" charset="0"/>
+                <a:ea typeface="宋体" charset="0"/>
+                <a:cs typeface="微软雅黑" pitchFamily="34" charset="-120"/>
+              </a:rPr>
+              <a:t>和</a:t>
+            </a:r>
+            <a:r>
+              <a:rPr lang="en-US" altLang="zh-CN" sz="2660" b="1" dirty="0">
+                <a:solidFill>
+                  <a:srgbClr val="1C3C5F"/>
+                </a:solidFill>
+                <a:latin typeface="微软雅黑" pitchFamily="34" charset="0"/>
+                <a:ea typeface="宋体" charset="0"/>
+                <a:cs typeface="微软雅黑" pitchFamily="34" charset="-120"/>
+              </a:rPr>
+              <a:t>sqlite</a:t>
+            </a:r>
+            <a:r>
+              <a:rPr lang="zh-CN" altLang="en-US" sz="2660" b="1" dirty="0">
+                <a:solidFill>
+                  <a:srgbClr val="1C3C5F"/>
+                </a:solidFill>
+                <a:latin typeface="微软雅黑" pitchFamily="34" charset="0"/>
+                <a:ea typeface="宋体" charset="0"/>
+                <a:cs typeface="微软雅黑" pitchFamily="34" charset="-120"/>
+              </a:rPr>
+              <a:t>等较大程序</a:t>
+            </a:r>
+            <a:endParaRPr lang="zh-CN" altLang="en-US" sz="2660" b="1" dirty="0">
+              <a:solidFill>
+                <a:srgbClr val="1C3C5F"/>
+              </a:solidFill>
+              <a:latin typeface="微软雅黑" pitchFamily="34" charset="0"/>
+              <a:ea typeface="宋体" charset="0"/>
+              <a:cs typeface="微软雅黑" pitchFamily="34" charset="-120"/>
+            </a:endParaRPr>
           </a:p>
         </p:txBody>
       </p:sp>
@@ -7603,8 +7065,8 @@
         </p:nvSpPr>
         <p:spPr>
           <a:xfrm>
-            <a:off x="127000" y="1061720"/>
-            <a:ext cx="2452370" cy="3453130"/>
+            <a:off x="191135" y="1062355"/>
+            <a:ext cx="8520430" cy="3453130"/>
           </a:xfrm>
           <a:prstGeom prst="rect">
             <a:avLst/>
@@ -7623,15 +7085,187 @@
               <a:buChar char="•"/>
             </a:pPr>
             <a:r>
-              <a:rPr lang="en-US" sz="1680" b="1" dirty="0">
+              <a:rPr lang="zh-CN" altLang="en-US" sz="1680" b="1" dirty="0">
                 <a:solidFill>
                   <a:srgbClr val="383838"/>
                 </a:solidFill>
                 <a:latin typeface="微软雅黑" pitchFamily="34" charset="0"/>
-                <a:ea typeface="微软雅黑" pitchFamily="34" charset="-122"/>
-                <a:cs typeface="微软雅黑" pitchFamily="34" charset="-120"/>
-              </a:rPr>
-              <a:t>以Rust无栈异步协程代替传统内核线程</a:t>
+                <a:ea typeface="宋体" charset="0"/>
+                <a:cs typeface="微软雅黑" pitchFamily="34" charset="-120"/>
+              </a:rPr>
+              <a:t>使用</a:t>
+            </a:r>
+            <a:r>
+              <a:rPr lang="en-US" altLang="zh-CN" sz="1680" b="1" dirty="0">
+                <a:solidFill>
+                  <a:srgbClr val="383838"/>
+                </a:solidFill>
+                <a:latin typeface="微软雅黑" pitchFamily="34" charset="0"/>
+                <a:ea typeface="宋体" charset="0"/>
+                <a:cs typeface="微软雅黑" pitchFamily="34" charset="-120"/>
+              </a:rPr>
+              <a:t>strace</a:t>
+            </a:r>
+            <a:r>
+              <a:rPr lang="zh-CN" altLang="en-US" sz="1680" b="1" dirty="0">
+                <a:solidFill>
+                  <a:srgbClr val="383838"/>
+                </a:solidFill>
+                <a:latin typeface="微软雅黑" pitchFamily="34" charset="0"/>
+                <a:ea typeface="宋体" charset="0"/>
+                <a:cs typeface="微软雅黑" pitchFamily="34" charset="-120"/>
+              </a:rPr>
+              <a:t>命令查看</a:t>
+            </a:r>
+            <a:r>
+              <a:rPr lang="en-US" altLang="zh-CN" sz="1680" b="1" dirty="0">
+                <a:solidFill>
+                  <a:srgbClr val="383838"/>
+                </a:solidFill>
+                <a:latin typeface="微软雅黑" pitchFamily="34" charset="0"/>
+                <a:ea typeface="宋体" charset="0"/>
+                <a:cs typeface="微软雅黑" pitchFamily="34" charset="-120"/>
+              </a:rPr>
+              <a:t>elf</a:t>
+            </a:r>
+            <a:r>
+              <a:rPr lang="zh-CN" altLang="en-US" sz="1680" b="1" dirty="0">
+                <a:solidFill>
+                  <a:srgbClr val="383838"/>
+                </a:solidFill>
+                <a:latin typeface="微软雅黑" pitchFamily="34" charset="0"/>
+                <a:ea typeface="宋体" charset="0"/>
+                <a:cs typeface="微软雅黑" pitchFamily="34" charset="-120"/>
+              </a:rPr>
+              <a:t>文件使用的系统调用，再在内核中逐个实现。</a:t>
+            </a:r>
+            <a:endParaRPr lang="zh-CN" altLang="en-US" sz="1680" b="1" dirty="0">
+              <a:solidFill>
+                <a:srgbClr val="383838"/>
+              </a:solidFill>
+              <a:latin typeface="微软雅黑" pitchFamily="34" charset="0"/>
+              <a:ea typeface="宋体" charset="0"/>
+              <a:cs typeface="微软雅黑" pitchFamily="34" charset="-120"/>
+            </a:endParaRPr>
+          </a:p>
+          <a:p>
+            <a:pPr marL="190500" indent="-190500" algn="l">
+              <a:lnSpc>
+                <a:spcPct val="150000"/>
+              </a:lnSpc>
+              <a:buSzPct val="100000"/>
+              <a:buChar char="•"/>
+            </a:pPr>
+            <a:endParaRPr lang="zh-CN" altLang="en-US" sz="1680" b="1" dirty="0">
+              <a:solidFill>
+                <a:srgbClr val="383838"/>
+              </a:solidFill>
+              <a:latin typeface="微软雅黑" pitchFamily="34" charset="0"/>
+              <a:ea typeface="宋体" charset="0"/>
+              <a:cs typeface="微软雅黑" pitchFamily="34" charset="-120"/>
+            </a:endParaRPr>
+          </a:p>
+          <a:p>
+            <a:pPr marL="190500" indent="-190500" algn="l">
+              <a:lnSpc>
+                <a:spcPct val="150000"/>
+              </a:lnSpc>
+              <a:buSzPct val="100000"/>
+              <a:buChar char="•"/>
+            </a:pPr>
+            <a:endParaRPr lang="zh-CN" altLang="en-US" sz="1680" b="1" dirty="0">
+              <a:solidFill>
+                <a:srgbClr val="383838"/>
+              </a:solidFill>
+              <a:latin typeface="微软雅黑" pitchFamily="34" charset="0"/>
+              <a:ea typeface="宋体" charset="0"/>
+              <a:cs typeface="微软雅黑" pitchFamily="34" charset="-120"/>
+            </a:endParaRPr>
+          </a:p>
+          <a:p>
+            <a:pPr marL="190500" indent="-190500" algn="l">
+              <a:lnSpc>
+                <a:spcPct val="150000"/>
+              </a:lnSpc>
+              <a:buSzPct val="100000"/>
+              <a:buChar char="•"/>
+            </a:pPr>
+            <a:r>
+              <a:rPr lang="zh-CN" altLang="en-US" sz="1680" b="1" dirty="0">
+                <a:solidFill>
+                  <a:srgbClr val="383838"/>
+                </a:solidFill>
+                <a:latin typeface="微软雅黑" pitchFamily="34" charset="0"/>
+                <a:ea typeface="宋体" charset="0"/>
+                <a:cs typeface="微软雅黑" pitchFamily="34" charset="-120"/>
+              </a:rPr>
+              <a:t>完成</a:t>
+            </a:r>
+            <a:r>
+              <a:rPr lang="en-US" altLang="zh-CN" sz="1680" b="1" dirty="0">
+                <a:solidFill>
+                  <a:srgbClr val="383838"/>
+                </a:solidFill>
+                <a:latin typeface="微软雅黑" pitchFamily="34" charset="0"/>
+                <a:ea typeface="宋体" charset="0"/>
+                <a:cs typeface="微软雅黑" pitchFamily="34" charset="-120"/>
+              </a:rPr>
+              <a:t>busybox</a:t>
+            </a:r>
+            <a:r>
+              <a:rPr lang="zh-CN" altLang="en-US" sz="1680" b="1" dirty="0">
+                <a:solidFill>
+                  <a:srgbClr val="383838"/>
+                </a:solidFill>
+                <a:latin typeface="微软雅黑" pitchFamily="34" charset="0"/>
+                <a:ea typeface="宋体" charset="0"/>
+                <a:cs typeface="微软雅黑" pitchFamily="34" charset="-120"/>
+              </a:rPr>
+              <a:t>支持后，即可直接使用其中自带的</a:t>
+            </a:r>
+            <a:r>
+              <a:rPr lang="en-US" altLang="zh-CN" sz="1680" b="1" dirty="0">
+                <a:solidFill>
+                  <a:srgbClr val="383838"/>
+                </a:solidFill>
+                <a:latin typeface="微软雅黑" pitchFamily="34" charset="0"/>
+                <a:ea typeface="宋体" charset="0"/>
+                <a:cs typeface="微软雅黑" pitchFamily="34" charset="-120"/>
+              </a:rPr>
+              <a:t>ash</a:t>
+            </a:r>
+            <a:r>
+              <a:rPr lang="zh-CN" altLang="en-US" sz="1680" b="1" dirty="0">
+                <a:solidFill>
+                  <a:srgbClr val="383838"/>
+                </a:solidFill>
+                <a:latin typeface="微软雅黑" pitchFamily="34" charset="0"/>
+                <a:ea typeface="宋体" charset="0"/>
+                <a:cs typeface="微软雅黑" pitchFamily="34" charset="-120"/>
+              </a:rPr>
+              <a:t>作为内核的</a:t>
+            </a:r>
+            <a:r>
+              <a:rPr lang="en-US" altLang="zh-CN" sz="1680" b="1" dirty="0">
+                <a:solidFill>
+                  <a:srgbClr val="383838"/>
+                </a:solidFill>
+                <a:latin typeface="微软雅黑" pitchFamily="34" charset="0"/>
+                <a:ea typeface="宋体" charset="0"/>
+                <a:cs typeface="微软雅黑" pitchFamily="34" charset="-120"/>
+              </a:rPr>
+              <a:t>shell</a:t>
+            </a:r>
+            <a:r>
+              <a:rPr lang="zh-CN" altLang="en-US" sz="1680" b="1" dirty="0">
+                <a:solidFill>
+                  <a:srgbClr val="383838"/>
+                </a:solidFill>
+                <a:latin typeface="微软雅黑" pitchFamily="34" charset="0"/>
+                <a:ea typeface="宋体" charset="0"/>
+                <a:cs typeface="微软雅黑" pitchFamily="34" charset="-120"/>
+              </a:rPr>
+              <a:t>程序。</a:t>
             </a:r>
             <a:endParaRPr lang="en-US" sz="1680" b="1" dirty="0">
               <a:solidFill>
@@ -7660,25 +7294,7 @@
               <a:buSzPct val="100000"/>
               <a:buChar char="•"/>
             </a:pPr>
-            <a:r>
-              <a:rPr lang="en-US" sz="1680" b="1" dirty="0">
-                <a:solidFill>
-                  <a:srgbClr val="FF0000"/>
-                </a:solidFill>
-                <a:latin typeface="微软雅黑" pitchFamily="34" charset="0"/>
-                <a:ea typeface="微软雅黑" pitchFamily="34" charset="-122"/>
-                <a:cs typeface="微软雅黑" pitchFamily="34" charset="-120"/>
-              </a:rPr>
-              <a:t>降低上下文切换开销</a:t>
-            </a:r>
-            <a:endParaRPr lang="en-US" sz="1680" b="1" dirty="0">
-              <a:solidFill>
-                <a:srgbClr val="383838"/>
-              </a:solidFill>
-              <a:latin typeface="微软雅黑" pitchFamily="34" charset="0"/>
-              <a:ea typeface="微软雅黑" pitchFamily="34" charset="-122"/>
-              <a:cs typeface="微软雅黑" pitchFamily="34" charset="-120"/>
-            </a:endParaRPr>
+            <a:endParaRPr lang="en-US" sz="1680" b="1" dirty="0"/>
           </a:p>
           <a:p>
             <a:pPr marL="190500" indent="-190500" algn="l">
@@ -7688,69 +7304,28 @@
               <a:buSzPct val="100000"/>
               <a:buChar char="•"/>
             </a:pPr>
-            <a:endParaRPr lang="en-US" sz="1680" b="1" dirty="0"/>
-          </a:p>
-          <a:p>
-            <a:pPr marL="190500" indent="-190500" algn="l">
-              <a:lnSpc>
-                <a:spcPct val="150000"/>
-              </a:lnSpc>
-              <a:buSzPct val="100000"/>
-              <a:buChar char="•"/>
-            </a:pPr>
-            <a:r>
-              <a:rPr lang="en-US" sz="1680" b="1" dirty="0">
-                <a:solidFill>
-                  <a:srgbClr val="FF0000"/>
-                </a:solidFill>
-                <a:latin typeface="微软雅黑" pitchFamily="34" charset="0"/>
-                <a:ea typeface="微软雅黑" pitchFamily="34" charset="-122"/>
-                <a:cs typeface="微软雅黑" pitchFamily="34" charset="-120"/>
-              </a:rPr>
-              <a:t>节省内存</a:t>
-            </a:r>
-            <a:endParaRPr lang="en-US" sz="1680" b="1" dirty="0">
+            <a:r>
+              <a:rPr lang="zh-CN" altLang="en-US" sz="1680" b="1" dirty="0">
+                <a:solidFill>
+                  <a:srgbClr val="383838"/>
+                </a:solidFill>
+                <a:latin typeface="微软雅黑" pitchFamily="34" charset="0"/>
+                <a:ea typeface="宋体" charset="0"/>
+                <a:cs typeface="微软雅黑" pitchFamily="34" charset="-120"/>
+              </a:rPr>
+              <a:t>目前仍在调试支持中。</a:t>
+            </a:r>
+            <a:endParaRPr lang="zh-CN" altLang="en-US" sz="1680" b="1" dirty="0">
               <a:solidFill>
-                <a:srgbClr val="FF0000"/>
+                <a:srgbClr val="383838"/>
               </a:solidFill>
               <a:latin typeface="微软雅黑" pitchFamily="34" charset="0"/>
-              <a:ea typeface="微软雅黑" pitchFamily="34" charset="-122"/>
+              <a:ea typeface="宋体" charset="0"/>
               <a:cs typeface="微软雅黑" pitchFamily="34" charset="-120"/>
             </a:endParaRPr>
           </a:p>
         </p:txBody>
       </p:sp>
-      <p:pic>
-        <p:nvPicPr>
-          <p:cNvPr id="5" name="Image 1" descr="preencoded.png"/>
-          <p:cNvPicPr>
-            <a:picLocks noChangeAspect="1"/>
-          </p:cNvPicPr>
-          <p:nvPr/>
-        </p:nvPicPr>
-        <p:blipFill>
-          <a:blip r:embed="rId2"/>
-          <a:stretch>
-            <a:fillRect/>
-          </a:stretch>
-        </p:blipFill>
-        <p:spPr>
-          <a:xfrm>
-            <a:off x="2610485" y="718820"/>
-            <a:ext cx="6162040" cy="4402455"/>
-          </a:xfrm>
-          <a:prstGeom prst="rect">
-            <a:avLst/>
-          </a:prstGeom>
-          <a:effectLst>
-            <a:outerShdw blurRad="50800" dist="1270" dir="60000" algn="bl" rotWithShape="0">
-              <a:srgbClr val="000000">
-                <a:alpha val="12000"/>
-              </a:srgbClr>
-            </a:outerShdw>
-          </a:effectLst>
-        </p:spPr>
-      </p:pic>
     </p:spTree>
   </p:cSld>
   <p:clrMapOvr>
@@ -7776,40 +7351,16 @@
           <a:chExt cx="0" cy="0"/>
         </a:xfrm>
       </p:grpSpPr>
-      <p:pic>
-        <p:nvPicPr>
-          <p:cNvPr id="2" name="Image 0" descr="preencoded.png"/>
-          <p:cNvPicPr>
-            <a:picLocks noChangeAspect="1"/>
-          </p:cNvPicPr>
+      <p:sp>
+        <p:nvSpPr>
+          <p:cNvPr id="2" name="Text 0"/>
+          <p:cNvSpPr/>
           <p:nvPr/>
-        </p:nvPicPr>
-        <p:blipFill>
-          <a:blip r:embed="rId1"/>
-          <a:stretch>
-            <a:fillRect/>
-          </a:stretch>
-        </p:blipFill>
+        </p:nvSpPr>
         <p:spPr>
           <a:xfrm>
-            <a:off x="0" y="0"/>
-            <a:ext cx="9144000" cy="1276350"/>
-          </a:xfrm>
-          <a:prstGeom prst="rect">
-            <a:avLst/>
-          </a:prstGeom>
-        </p:spPr>
-      </p:pic>
-      <p:sp>
-        <p:nvSpPr>
-          <p:cNvPr id="3" name="Text 0"/>
-          <p:cNvSpPr/>
-          <p:nvPr/>
-        </p:nvSpPr>
-        <p:spPr>
-          <a:xfrm>
-            <a:off x="962025" y="133350"/>
-            <a:ext cx="7806690" cy="552450"/>
+            <a:off x="509588" y="1952625"/>
+            <a:ext cx="1452563" cy="1243013"/>
           </a:xfrm>
           <a:prstGeom prst="rect">
             <a:avLst/>
@@ -7820,34 +7371,34 @@
           <a:bodyPr wrap="square" rtlCol="0" anchor="ctr"/>
           <a:lstStyle/>
           <a:p>
-            <a:pPr marL="0" indent="0" algn="l">
+            <a:pPr marL="0" indent="0" algn="ctr">
               <a:buNone/>
             </a:pPr>
             <a:r>
-              <a:rPr lang="en-US" sz="2660" b="1" dirty="0">
-                <a:solidFill>
-                  <a:srgbClr val="1C3C5F"/>
+              <a:rPr lang="en-US" sz="5760" b="1" dirty="0">
+                <a:solidFill>
+                  <a:srgbClr val="FFFFFF"/>
                 </a:solidFill>
                 <a:latin typeface="微软雅黑" pitchFamily="34" charset="0"/>
                 <a:ea typeface="微软雅黑" pitchFamily="34" charset="-122"/>
                 <a:cs typeface="微软雅黑" pitchFamily="34" charset="-120"/>
               </a:rPr>
-              <a:t>微内核线程设计</a:t>
-            </a:r>
-            <a:endParaRPr lang="en-US" sz="2660" dirty="0"/>
-          </a:p>
-        </p:txBody>
-      </p:sp>
-      <p:sp>
-        <p:nvSpPr>
-          <p:cNvPr id="4" name="Text 1"/>
+              <a:t>04</a:t>
+            </a:r>
+            <a:endParaRPr lang="en-US" sz="5760" dirty="0"/>
+          </a:p>
+        </p:txBody>
+      </p:sp>
+      <p:sp>
+        <p:nvSpPr>
+          <p:cNvPr id="3" name="Text 1"/>
           <p:cNvSpPr/>
           <p:nvPr/>
         </p:nvSpPr>
         <p:spPr>
           <a:xfrm>
-            <a:off x="190500" y="1062355"/>
-            <a:ext cx="2208530" cy="3453130"/>
+            <a:off x="3267075" y="2128838"/>
+            <a:ext cx="5101590" cy="1647825"/>
           </a:xfrm>
           <a:prstGeom prst="rect">
             <a:avLst/>
@@ -7858,135 +7409,35 @@
           <a:bodyPr wrap="square" rtlCol="0" anchor="t"/>
           <a:lstStyle/>
           <a:p>
-            <a:pPr marL="190500" indent="-190500" algn="l">
-              <a:lnSpc>
-                <a:spcPct val="150000"/>
-              </a:lnSpc>
-              <a:buSzPct val="100000"/>
-              <a:buChar char="•"/>
-            </a:pPr>
-            <a:r>
-              <a:rPr lang="en-US" sz="1680" b="1" dirty="0">
-                <a:solidFill>
-                  <a:srgbClr val="383838"/>
+            <a:pPr marL="0" indent="0" algn="l">
+              <a:buNone/>
+            </a:pPr>
+            <a:r>
+              <a:rPr lang="zh-CN" altLang="en-US" sz="3500" b="1" dirty="0">
+                <a:solidFill>
+                  <a:srgbClr val="1C3C5F"/>
+                </a:solidFill>
+                <a:latin typeface="微软雅黑" pitchFamily="34" charset="0"/>
+                <a:ea typeface="宋体" charset="0"/>
+                <a:cs typeface="微软雅黑" pitchFamily="34" charset="-120"/>
+              </a:rPr>
+              <a:t>项目</a:t>
+            </a:r>
+            <a:r>
+              <a:rPr lang="en-US" sz="3500" b="1" dirty="0">
+                <a:solidFill>
+                  <a:srgbClr val="1C3C5F"/>
                 </a:solidFill>
                 <a:latin typeface="微软雅黑" pitchFamily="34" charset="0"/>
                 <a:ea typeface="微软雅黑" pitchFamily="34" charset="-122"/>
                 <a:cs typeface="微软雅黑" pitchFamily="34" charset="-120"/>
               </a:rPr>
-              <a:t>提供内核核心服务</a:t>
-            </a:r>
-            <a:endParaRPr lang="en-US" sz="1680" b="1" dirty="0">
-              <a:solidFill>
-                <a:srgbClr val="383838"/>
-              </a:solidFill>
-              <a:latin typeface="微软雅黑" pitchFamily="34" charset="0"/>
-              <a:ea typeface="微软雅黑" pitchFamily="34" charset="-122"/>
-              <a:cs typeface="微软雅黑" pitchFamily="34" charset="-120"/>
-            </a:endParaRPr>
-          </a:p>
-          <a:p>
-            <a:pPr marL="190500" indent="-190500" algn="l">
-              <a:lnSpc>
-                <a:spcPct val="150000"/>
-              </a:lnSpc>
-              <a:buSzPct val="100000"/>
-              <a:buChar char="•"/>
-            </a:pPr>
-            <a:endParaRPr lang="en-US" sz="1680" b="1" dirty="0"/>
-          </a:p>
-          <a:p>
-            <a:pPr marL="190500" indent="-190500" algn="l">
-              <a:lnSpc>
-                <a:spcPct val="150000"/>
-              </a:lnSpc>
-              <a:buSzPct val="100000"/>
-              <a:buChar char="•"/>
-            </a:pPr>
-            <a:r>
-              <a:rPr lang="en-US" sz="1680" b="1" dirty="0">
-                <a:solidFill>
-                  <a:srgbClr val="FF0000"/>
-                </a:solidFill>
-                <a:latin typeface="微软雅黑" pitchFamily="34" charset="0"/>
-                <a:ea typeface="微软雅黑" pitchFamily="34" charset="-122"/>
-                <a:cs typeface="微软雅黑" pitchFamily="34" charset="-120"/>
-              </a:rPr>
-              <a:t>统一调度所有内核线程和用户线程</a:t>
-            </a:r>
-            <a:endParaRPr lang="en-US" sz="1680" b="1" dirty="0">
-              <a:solidFill>
-                <a:srgbClr val="FF0000"/>
-              </a:solidFill>
-              <a:latin typeface="微软雅黑" pitchFamily="34" charset="0"/>
-              <a:ea typeface="微软雅黑" pitchFamily="34" charset="-122"/>
-              <a:cs typeface="微软雅黑" pitchFamily="34" charset="-120"/>
-            </a:endParaRPr>
-          </a:p>
-          <a:p>
-            <a:pPr marL="190500" indent="-190500" algn="l">
-              <a:lnSpc>
-                <a:spcPct val="150000"/>
-              </a:lnSpc>
-              <a:buSzPct val="100000"/>
-              <a:buChar char="•"/>
-            </a:pPr>
-            <a:endParaRPr lang="en-US" sz="1680" b="1" dirty="0"/>
-          </a:p>
-          <a:p>
-            <a:pPr marL="190500" indent="-190500" algn="l">
-              <a:lnSpc>
-                <a:spcPct val="150000"/>
-              </a:lnSpc>
-              <a:buSzPct val="100000"/>
-              <a:buChar char="•"/>
-            </a:pPr>
-            <a:r>
-              <a:rPr lang="en-US" sz="1680" b="1" dirty="0">
-                <a:solidFill>
-                  <a:srgbClr val="383838"/>
-                </a:solidFill>
-                <a:latin typeface="微软雅黑" pitchFamily="34" charset="0"/>
-                <a:ea typeface="微软雅黑" pitchFamily="34" charset="-122"/>
-                <a:cs typeface="微软雅黑" pitchFamily="34" charset="-120"/>
-              </a:rPr>
-              <a:t>转发用户线程请求</a:t>
-            </a:r>
-            <a:endParaRPr lang="en-US" sz="1680" b="1" dirty="0"/>
-          </a:p>
-        </p:txBody>
-      </p:sp>
-      <p:pic>
-        <p:nvPicPr>
-          <p:cNvPr id="5" name="Image 1" descr="preencoded.png"/>
-          <p:cNvPicPr>
-            <a:picLocks noChangeAspect="1"/>
-          </p:cNvPicPr>
-          <p:nvPr/>
-        </p:nvPicPr>
-        <p:blipFill>
-          <a:blip r:embed="rId2"/>
-          <a:stretch>
-            <a:fillRect/>
-          </a:stretch>
-        </p:blipFill>
-        <p:spPr>
-          <a:xfrm>
-            <a:off x="2280285" y="878840"/>
-            <a:ext cx="6945630" cy="3764915"/>
-          </a:xfrm>
-          <a:prstGeom prst="rect">
-            <a:avLst/>
-          </a:prstGeom>
-          <a:effectLst>
-            <a:outerShdw blurRad="50800" dist="1270" dir="60000" algn="bl" rotWithShape="0">
-              <a:srgbClr val="000000">
-                <a:alpha val="12000"/>
-              </a:srgbClr>
-            </a:outerShdw>
-          </a:effectLst>
-        </p:spPr>
-      </p:pic>
+              <a:t>总结</a:t>
+            </a:r>
+            <a:endParaRPr lang="en-US" sz="3500" dirty="0"/>
+          </a:p>
+        </p:txBody>
+      </p:sp>
     </p:spTree>
   </p:cSld>
   <p:clrMapOvr>
@@ -8060,17 +7511,24 @@
               <a:buNone/>
             </a:pPr>
             <a:r>
-              <a:rPr lang="en-US" sz="2660" b="1" dirty="0">
+              <a:rPr lang="zh-CN" sz="2660" b="1" dirty="0">
                 <a:solidFill>
                   <a:srgbClr val="1C3C5F"/>
                 </a:solidFill>
                 <a:latin typeface="微软雅黑" pitchFamily="34" charset="0"/>
-                <a:ea typeface="微软雅黑" pitchFamily="34" charset="-122"/>
-                <a:cs typeface="微软雅黑" pitchFamily="34" charset="-120"/>
-              </a:rPr>
-              <a:t>内核服务可靠性增强设计</a:t>
-            </a:r>
-            <a:endParaRPr lang="en-US" sz="2660" dirty="0"/>
+                <a:ea typeface="宋体" charset="0"/>
+                <a:cs typeface="微软雅黑" pitchFamily="34" charset="-120"/>
+              </a:rPr>
+              <a:t>项目总结</a:t>
+            </a:r>
+            <a:endParaRPr lang="zh-CN" sz="2660" b="1" dirty="0">
+              <a:solidFill>
+                <a:srgbClr val="1C3C5F"/>
+              </a:solidFill>
+              <a:latin typeface="微软雅黑" pitchFamily="34" charset="0"/>
+              <a:ea typeface="宋体" charset="0"/>
+              <a:cs typeface="微软雅黑" pitchFamily="34" charset="-120"/>
+            </a:endParaRPr>
           </a:p>
         </p:txBody>
       </p:sp>
@@ -8082,8 +7540,8 @@
         </p:nvSpPr>
         <p:spPr>
           <a:xfrm>
-            <a:off x="904875" y="1062038"/>
-            <a:ext cx="7715250" cy="3452813"/>
+            <a:off x="191135" y="1062355"/>
+            <a:ext cx="8520430" cy="3453130"/>
           </a:xfrm>
           <a:prstGeom prst="rect">
             <a:avLst/>
@@ -8102,25 +7560,23 @@
               <a:buChar char="•"/>
             </a:pPr>
             <a:r>
-              <a:rPr lang="en-US" b="1" dirty="0">
-                <a:solidFill>
-                  <a:schemeClr val="tx1"/>
-                </a:solidFill>
-                <a:latin typeface="微软雅黑" pitchFamily="34" charset="0"/>
-                <a:ea typeface="微软雅黑" pitchFamily="34" charset="-122"/>
-                <a:cs typeface="微软雅黑" pitchFamily="34" charset="-120"/>
-                <a:sym typeface="+mn-ea"/>
-              </a:rPr>
-              <a:t>多对多线程模型</a:t>
-            </a:r>
-            <a:endParaRPr lang="en-US" b="1" dirty="0">
+              <a:rPr lang="zh-CN" altLang="en-US" sz="1680" b="1" dirty="0">
+                <a:solidFill>
+                  <a:srgbClr val="383838"/>
+                </a:solidFill>
+                <a:latin typeface="微软雅黑" pitchFamily="34" charset="0"/>
+                <a:ea typeface="宋体" charset="0"/>
+                <a:cs typeface="微软雅黑" pitchFamily="34" charset="-120"/>
+              </a:rPr>
+              <a:t>本项目实现了一个多对多线程模型的混合内核框架，并实现了宏内核与混合内核两种内核架构。</a:t>
+            </a:r>
+            <a:endParaRPr lang="zh-CN" altLang="en-US" sz="1680" b="1" dirty="0">
               <a:solidFill>
-                <a:schemeClr val="tx1"/>
+                <a:srgbClr val="383838"/>
               </a:solidFill>
               <a:latin typeface="微软雅黑" pitchFamily="34" charset="0"/>
-              <a:ea typeface="微软雅黑" pitchFamily="34" charset="-122"/>
+              <a:ea typeface="宋体" charset="0"/>
               <a:cs typeface="微软雅黑" pitchFamily="34" charset="-120"/>
-              <a:sym typeface="+mn-ea"/>
             </a:endParaRPr>
           </a:p>
           <a:p>
@@ -8131,14 +7587,13 @@
               <a:buSzPct val="100000"/>
               <a:buChar char="•"/>
             </a:pPr>
-            <a:endParaRPr lang="en-US" b="1" dirty="0">
+            <a:endParaRPr lang="zh-CN" altLang="en-US" sz="1680" b="1" dirty="0">
               <a:solidFill>
                 <a:srgbClr val="383838"/>
               </a:solidFill>
               <a:latin typeface="微软雅黑" pitchFamily="34" charset="0"/>
-              <a:ea typeface="微软雅黑" pitchFamily="34" charset="-122"/>
+              <a:ea typeface="宋体" charset="0"/>
               <a:cs typeface="微软雅黑" pitchFamily="34" charset="-120"/>
-              <a:sym typeface="+mn-ea"/>
             </a:endParaRPr>
           </a:p>
           <a:p>
@@ -8149,12 +7604,67 @@
               <a:buSzPct val="100000"/>
               <a:buChar char="•"/>
             </a:pPr>
-            <a:endParaRPr lang="en-US" b="1" dirty="0">
+            <a:r>
+              <a:rPr lang="zh-CN" altLang="en-US" sz="1680" b="1" dirty="0">
+                <a:solidFill>
+                  <a:srgbClr val="383838"/>
+                </a:solidFill>
+                <a:latin typeface="微软雅黑" pitchFamily="34" charset="0"/>
+                <a:ea typeface="宋体" charset="0"/>
+                <a:cs typeface="微软雅黑" pitchFamily="34" charset="-120"/>
+              </a:rPr>
+              <a:t>完成了对</a:t>
+            </a:r>
+            <a:r>
+              <a:rPr lang="en-US" altLang="zh-CN" sz="1680" b="1" dirty="0">
+                <a:solidFill>
+                  <a:srgbClr val="383838"/>
+                </a:solidFill>
+                <a:latin typeface="微软雅黑" pitchFamily="34" charset="0"/>
+                <a:ea typeface="宋体" charset="0"/>
+                <a:cs typeface="微软雅黑" pitchFamily="34" charset="-120"/>
+              </a:rPr>
+              <a:t>musl-libc</a:t>
+            </a:r>
+            <a:r>
+              <a:rPr lang="zh-CN" altLang="en-US" sz="1680" b="1" dirty="0">
+                <a:solidFill>
+                  <a:srgbClr val="383838"/>
+                </a:solidFill>
+                <a:latin typeface="微软雅黑" pitchFamily="34" charset="0"/>
+                <a:ea typeface="宋体" charset="0"/>
+                <a:cs typeface="微软雅黑" pitchFamily="34" charset="-120"/>
+              </a:rPr>
+              <a:t>和简单</a:t>
+            </a:r>
+            <a:r>
+              <a:rPr lang="en-US" altLang="zh-CN" sz="1680" b="1" dirty="0">
+                <a:solidFill>
+                  <a:srgbClr val="383838"/>
+                </a:solidFill>
+                <a:latin typeface="微软雅黑" pitchFamily="34" charset="0"/>
+                <a:ea typeface="宋体" charset="0"/>
+                <a:cs typeface="微软雅黑" pitchFamily="34" charset="-120"/>
+              </a:rPr>
+              <a:t>c</a:t>
+            </a:r>
+            <a:r>
+              <a:rPr lang="zh-CN" altLang="en-US" sz="1680" b="1" dirty="0">
+                <a:solidFill>
+                  <a:srgbClr val="383838"/>
+                </a:solidFill>
+                <a:latin typeface="微软雅黑" pitchFamily="34" charset="0"/>
+                <a:ea typeface="宋体" charset="0"/>
+                <a:cs typeface="微软雅黑" pitchFamily="34" charset="-120"/>
+              </a:rPr>
+              <a:t>语言用户程序的初步支持。</a:t>
+            </a:r>
+            <a:endParaRPr lang="zh-CN" altLang="en-US" sz="1680" b="1" dirty="0">
               <a:solidFill>
                 <a:srgbClr val="383838"/>
               </a:solidFill>
               <a:latin typeface="微软雅黑" pitchFamily="34" charset="0"/>
-              <a:ea typeface="微软雅黑" pitchFamily="34" charset="-122"/>
+              <a:ea typeface="宋体" charset="0"/>
               <a:cs typeface="微软雅黑" pitchFamily="34" charset="-120"/>
             </a:endParaRPr>
           </a:p>
@@ -8166,23 +7676,43 @@
               <a:buSzPct val="100000"/>
               <a:buChar char="•"/>
             </a:pPr>
-            <a:r>
-              <a:rPr lang="en-US" b="1" dirty="0">
+            <a:endParaRPr lang="en-US" sz="1680" b="1" dirty="0"/>
+          </a:p>
+          <a:p>
+            <a:pPr marL="190500" indent="-190500" algn="l">
+              <a:lnSpc>
+                <a:spcPct val="150000"/>
+              </a:lnSpc>
+              <a:buSzPct val="100000"/>
+              <a:buChar char="•"/>
+            </a:pPr>
+            <a:endParaRPr lang="en-US" sz="1680" b="1" dirty="0"/>
+          </a:p>
+          <a:p>
+            <a:pPr marL="190500" indent="-190500" algn="l">
+              <a:lnSpc>
+                <a:spcPct val="150000"/>
+              </a:lnSpc>
+              <a:buSzPct val="100000"/>
+              <a:buChar char="•"/>
+            </a:pPr>
+            <a:r>
+              <a:rPr lang="zh-CN" altLang="en-US" sz="1680" b="1" dirty="0">
                 <a:solidFill>
                   <a:srgbClr val="FF0000"/>
                 </a:solidFill>
                 <a:latin typeface="微软雅黑" pitchFamily="34" charset="0"/>
-                <a:ea typeface="微软雅黑" pitchFamily="34" charset="-122"/>
-                <a:cs typeface="微软雅黑" pitchFamily="34" charset="-120"/>
-              </a:rPr>
-              <a:t>内核服务线程故障恢复</a:t>
-            </a:r>
-            <a:endParaRPr lang="en-US" b="1" dirty="0">
+                <a:ea typeface="宋体" charset="0"/>
+                <a:cs typeface="微软雅黑" pitchFamily="34" charset="-120"/>
+              </a:rPr>
+              <a:t>由于目前支持的设备驱动程序数量少，应用程序生态不足，难以说明混合内核对于内核可靠性提升的作用，尚未进行系统的测试分析。</a:t>
+            </a:r>
+            <a:endParaRPr lang="zh-CN" altLang="en-US" sz="1680" b="1" dirty="0">
               <a:solidFill>
                 <a:srgbClr val="FF0000"/>
               </a:solidFill>
               <a:latin typeface="微软雅黑" pitchFamily="34" charset="0"/>
-              <a:ea typeface="微软雅黑" pitchFamily="34" charset="-122"/>
+              <a:ea typeface="宋体" charset="0"/>
               <a:cs typeface="微软雅黑" pitchFamily="34" charset="-120"/>
             </a:endParaRPr>
           </a:p>
@@ -8213,9 +7743,92 @@
           <a:chExt cx="0" cy="0"/>
         </a:xfrm>
       </p:grpSpPr>
+      <p:sp>
+        <p:nvSpPr>
+          <p:cNvPr id="2" name="Text 0"/>
+          <p:cNvSpPr/>
+          <p:nvPr/>
+        </p:nvSpPr>
+        <p:spPr>
+          <a:xfrm>
+            <a:off x="411480" y="1854835"/>
+            <a:ext cx="5386070" cy="552450"/>
+          </a:xfrm>
+          <a:prstGeom prst="rect">
+            <a:avLst/>
+          </a:prstGeom>
+          <a:noFill/>
+        </p:spPr>
+        <p:txBody>
+          <a:bodyPr wrap="square" rtlCol="0" anchor="ctr"/>
+          <a:lstStyle/>
+          <a:p>
+            <a:pPr marL="0" indent="0" algn="ctr">
+              <a:buNone/>
+            </a:pPr>
+            <a:r>
+              <a:rPr lang="zh-CN" altLang="en-US" sz="4000" b="1" dirty="0">
+                <a:solidFill>
+                  <a:srgbClr val="1C3C5F"/>
+                </a:solidFill>
+                <a:latin typeface="微软雅黑" pitchFamily="34" charset="0"/>
+                <a:ea typeface="微软雅黑" pitchFamily="34" charset="-122"/>
+                <a:cs typeface="微软雅黑" pitchFamily="34" charset="-120"/>
+              </a:rPr>
+              <a:t>欢迎各位老师批评指正</a:t>
+            </a:r>
+            <a:endParaRPr lang="zh-CN" altLang="en-US" sz="4000" b="1" dirty="0">
+              <a:solidFill>
+                <a:srgbClr val="1C3C5F"/>
+              </a:solidFill>
+              <a:latin typeface="微软雅黑" pitchFamily="34" charset="0"/>
+              <a:ea typeface="微软雅黑" pitchFamily="34" charset="-122"/>
+              <a:cs typeface="微软雅黑" pitchFamily="34" charset="-120"/>
+            </a:endParaRPr>
+          </a:p>
+        </p:txBody>
+      </p:sp>
+      <p:sp>
+        <p:nvSpPr>
+          <p:cNvPr id="3" name="Text 1"/>
+          <p:cNvSpPr/>
+          <p:nvPr/>
+        </p:nvSpPr>
+        <p:spPr>
+          <a:xfrm>
+            <a:off x="1176337" y="2276475"/>
+            <a:ext cx="3395663" cy="1033463"/>
+          </a:xfrm>
+          <a:prstGeom prst="rect">
+            <a:avLst/>
+          </a:prstGeom>
+          <a:noFill/>
+        </p:spPr>
+        <p:txBody>
+          <a:bodyPr wrap="square" rtlCol="0" anchor="ctr"/>
+          <a:lstStyle/>
+          <a:p>
+            <a:pPr marL="0" indent="0" algn="ctr">
+              <a:buNone/>
+            </a:pPr>
+            <a:r>
+              <a:rPr lang="en-US" sz="4800" b="1" dirty="0">
+                <a:solidFill>
+                  <a:srgbClr val="383838"/>
+                </a:solidFill>
+                <a:latin typeface="微软雅黑" pitchFamily="34" charset="0"/>
+                <a:ea typeface="微软雅黑" pitchFamily="34" charset="-122"/>
+                <a:cs typeface="微软雅黑" pitchFamily="34" charset="-120"/>
+              </a:rPr>
+              <a:t>THANKS</a:t>
+            </a:r>
+            <a:endParaRPr lang="en-US" sz="4800" dirty="0"/>
+          </a:p>
+        </p:txBody>
+      </p:sp>
       <p:pic>
         <p:nvPicPr>
-          <p:cNvPr id="2" name="Image 0" descr="preencoded.png"/>
+          <p:cNvPr id="5" name="图片 4" descr="中国人民解放军国防科技大学-logo"/>
           <p:cNvPicPr>
             <a:picLocks noChangeAspect="1"/>
           </p:cNvPicPr>
@@ -8229,452 +7842,14 @@
         </p:blipFill>
         <p:spPr>
           <a:xfrm>
-            <a:off x="0" y="0"/>
-            <a:ext cx="9144000" cy="1276350"/>
+            <a:off x="6528435" y="1740535"/>
+            <a:ext cx="1870710" cy="1875155"/>
           </a:xfrm>
           <a:prstGeom prst="rect">
             <a:avLst/>
           </a:prstGeom>
         </p:spPr>
       </p:pic>
-      <p:sp>
-        <p:nvSpPr>
-          <p:cNvPr id="3" name="Text 0"/>
-          <p:cNvSpPr/>
-          <p:nvPr/>
-        </p:nvSpPr>
-        <p:spPr>
-          <a:xfrm>
-            <a:off x="962025" y="133350"/>
-            <a:ext cx="7806690" cy="552450"/>
-          </a:xfrm>
-          <a:prstGeom prst="rect">
-            <a:avLst/>
-          </a:prstGeom>
-          <a:noFill/>
-        </p:spPr>
-        <p:txBody>
-          <a:bodyPr wrap="square" rtlCol="0" anchor="ctr"/>
-          <a:lstStyle/>
-          <a:p>
-            <a:pPr marL="0" indent="0" algn="l">
-              <a:buNone/>
-            </a:pPr>
-            <a:r>
-              <a:rPr lang="en-US" sz="2660" b="1" dirty="0">
-                <a:solidFill>
-                  <a:srgbClr val="1C3C5F"/>
-                </a:solidFill>
-                <a:latin typeface="微软雅黑" pitchFamily="34" charset="0"/>
-                <a:ea typeface="微软雅黑" pitchFamily="34" charset="-122"/>
-                <a:cs typeface="微软雅黑" pitchFamily="34" charset="-120"/>
-              </a:rPr>
-              <a:t>内核服务线程故障恢复</a:t>
-            </a:r>
-            <a:endParaRPr lang="en-US" sz="2660" dirty="0"/>
-          </a:p>
-        </p:txBody>
-      </p:sp>
-      <p:sp>
-        <p:nvSpPr>
-          <p:cNvPr id="4" name="Text 1"/>
-          <p:cNvSpPr/>
-          <p:nvPr/>
-        </p:nvSpPr>
-        <p:spPr>
-          <a:xfrm>
-            <a:off x="565150" y="4119245"/>
-            <a:ext cx="7386955" cy="861695"/>
-          </a:xfrm>
-          <a:prstGeom prst="rect">
-            <a:avLst/>
-          </a:prstGeom>
-          <a:noFill/>
-        </p:spPr>
-        <p:txBody>
-          <a:bodyPr wrap="square" rtlCol="0" anchor="t"/>
-          <a:lstStyle/>
-          <a:p>
-            <a:pPr marL="190500" indent="-190500" algn="l">
-              <a:lnSpc>
-                <a:spcPct val="150000"/>
-              </a:lnSpc>
-              <a:buSzPct val="100000"/>
-              <a:buChar char="•"/>
-            </a:pPr>
-            <a:r>
-              <a:rPr lang="en-US" sz="1680" b="1" dirty="0">
-                <a:solidFill>
-                  <a:srgbClr val="383838"/>
-                </a:solidFill>
-                <a:latin typeface="微软雅黑" pitchFamily="34" charset="0"/>
-                <a:ea typeface="微软雅黑" pitchFamily="34" charset="-122"/>
-                <a:cs typeface="微软雅黑" pitchFamily="34" charset="-120"/>
-              </a:rPr>
-              <a:t>内核服务线程故障时，其丢弃出错的请求，内核重置内核栈和控制流。</a:t>
-            </a:r>
-            <a:endParaRPr lang="en-US" sz="1680" b="1" dirty="0"/>
-          </a:p>
-          <a:p>
-            <a:pPr marL="190500" indent="-190500" algn="l">
-              <a:lnSpc>
-                <a:spcPct val="150000"/>
-              </a:lnSpc>
-              <a:buSzPct val="100000"/>
-              <a:buChar char="•"/>
-            </a:pPr>
-            <a:r>
-              <a:rPr lang="en-US" sz="1680" b="1" dirty="0">
-                <a:solidFill>
-                  <a:srgbClr val="383838"/>
-                </a:solidFill>
-                <a:latin typeface="微软雅黑" pitchFamily="34" charset="0"/>
-                <a:ea typeface="微软雅黑" pitchFamily="34" charset="-122"/>
-                <a:cs typeface="微软雅黑" pitchFamily="34" charset="-120"/>
-              </a:rPr>
-              <a:t>任何内核服务线程故障不会影响内核和其余内核服务线程。</a:t>
-            </a:r>
-            <a:endParaRPr lang="en-US" sz="1680" b="1" dirty="0"/>
-          </a:p>
-        </p:txBody>
-      </p:sp>
-      <p:pic>
-        <p:nvPicPr>
-          <p:cNvPr id="5" name="Image 1" descr="preencoded.png"/>
-          <p:cNvPicPr>
-            <a:picLocks noChangeAspect="1"/>
-          </p:cNvPicPr>
-          <p:nvPr/>
-        </p:nvPicPr>
-        <p:blipFill>
-          <a:blip r:embed="rId2"/>
-          <a:stretch>
-            <a:fillRect/>
-          </a:stretch>
-        </p:blipFill>
-        <p:spPr>
-          <a:xfrm>
-            <a:off x="207010" y="864870"/>
-            <a:ext cx="8729980" cy="3202940"/>
-          </a:xfrm>
-          <a:prstGeom prst="rect">
-            <a:avLst/>
-          </a:prstGeom>
-          <a:effectLst>
-            <a:outerShdw blurRad="50800" dist="1270" dir="60000" algn="bl" rotWithShape="0">
-              <a:srgbClr val="000000">
-                <a:alpha val="12000"/>
-              </a:srgbClr>
-            </a:outerShdw>
-          </a:effectLst>
-        </p:spPr>
-      </p:pic>
-    </p:spTree>
-  </p:cSld>
-  <p:clrMapOvr>
-    <a:masterClrMapping/>
-  </p:clrMapOvr>
-</p:sld>
-</file>
-
-<file path=ppt/slides/slide28.xml><?xml version="1.0" encoding="utf-8"?>
-<p:sld xmlns:a="http://schemas.openxmlformats.org/drawingml/2006/main" xmlns:r="http://schemas.openxmlformats.org/officeDocument/2006/relationships" xmlns:p="http://schemas.openxmlformats.org/presentationml/2006/main">
-  <p:cSld>
-    <p:spTree>
-      <p:nvGrpSpPr>
-        <p:cNvPr id="1" name=""/>
-        <p:cNvGrpSpPr/>
-        <p:nvPr/>
-      </p:nvGrpSpPr>
-      <p:grpSpPr>
-        <a:xfrm>
-          <a:off x="0" y="0"/>
-          <a:ext cx="0" cy="0"/>
-          <a:chOff x="0" y="0"/>
-          <a:chExt cx="0" cy="0"/>
-        </a:xfrm>
-      </p:grpSpPr>
-      <p:sp>
-        <p:nvSpPr>
-          <p:cNvPr id="2" name="Text 0"/>
-          <p:cNvSpPr/>
-          <p:nvPr/>
-        </p:nvSpPr>
-        <p:spPr>
-          <a:xfrm>
-            <a:off x="509588" y="1952625"/>
-            <a:ext cx="1452563" cy="1243013"/>
-          </a:xfrm>
-          <a:prstGeom prst="rect">
-            <a:avLst/>
-          </a:prstGeom>
-          <a:noFill/>
-        </p:spPr>
-        <p:txBody>
-          <a:bodyPr wrap="square" rtlCol="0" anchor="ctr"/>
-          <a:lstStyle/>
-          <a:p>
-            <a:pPr marL="0" indent="0" algn="ctr">
-              <a:buNone/>
-            </a:pPr>
-            <a:r>
-              <a:rPr lang="en-US" sz="5760" b="1" dirty="0">
-                <a:solidFill>
-                  <a:srgbClr val="FFFFFF"/>
-                </a:solidFill>
-                <a:latin typeface="微软雅黑" pitchFamily="34" charset="0"/>
-                <a:ea typeface="微软雅黑" pitchFamily="34" charset="-122"/>
-                <a:cs typeface="微软雅黑" pitchFamily="34" charset="-120"/>
-              </a:rPr>
-              <a:t>03</a:t>
-            </a:r>
-            <a:endParaRPr lang="en-US" sz="5760" dirty="0"/>
-          </a:p>
-        </p:txBody>
-      </p:sp>
-      <p:sp>
-        <p:nvSpPr>
-          <p:cNvPr id="3" name="Text 1"/>
-          <p:cNvSpPr/>
-          <p:nvPr/>
-        </p:nvSpPr>
-        <p:spPr>
-          <a:xfrm>
-            <a:off x="3267075" y="2128838"/>
-            <a:ext cx="5101590" cy="1647825"/>
-          </a:xfrm>
-          <a:prstGeom prst="rect">
-            <a:avLst/>
-          </a:prstGeom>
-          <a:noFill/>
-        </p:spPr>
-        <p:txBody>
-          <a:bodyPr wrap="square" rtlCol="0" anchor="t"/>
-          <a:lstStyle/>
-          <a:p>
-            <a:pPr marL="0" indent="0" algn="l">
-              <a:buNone/>
-            </a:pPr>
-            <a:r>
-              <a:rPr lang="en-US" sz="3500" b="1" dirty="0">
-                <a:solidFill>
-                  <a:srgbClr val="1C3C5F"/>
-                </a:solidFill>
-                <a:latin typeface="微软雅黑" pitchFamily="34" charset="0"/>
-                <a:ea typeface="微软雅黑" pitchFamily="34" charset="-122"/>
-                <a:cs typeface="微软雅黑" pitchFamily="34" charset="-120"/>
-              </a:rPr>
-              <a:t>实验分析</a:t>
-            </a:r>
-            <a:endParaRPr lang="en-US" sz="3500" dirty="0"/>
-          </a:p>
-        </p:txBody>
-      </p:sp>
-    </p:spTree>
-  </p:cSld>
-  <p:clrMapOvr>
-    <a:masterClrMapping/>
-  </p:clrMapOvr>
-</p:sld>
-</file>
-
-<file path=ppt/slides/slide29.xml><?xml version="1.0" encoding="utf-8"?>
-<p:sld xmlns:a="http://schemas.openxmlformats.org/drawingml/2006/main" xmlns:r="http://schemas.openxmlformats.org/officeDocument/2006/relationships" xmlns:p="http://schemas.openxmlformats.org/presentationml/2006/main">
-  <p:cSld>
-    <p:spTree>
-      <p:nvGrpSpPr>
-        <p:cNvPr id="1" name=""/>
-        <p:cNvGrpSpPr/>
-        <p:nvPr/>
-      </p:nvGrpSpPr>
-      <p:grpSpPr>
-        <a:xfrm>
-          <a:off x="0" y="0"/>
-          <a:ext cx="0" cy="0"/>
-          <a:chOff x="0" y="0"/>
-          <a:chExt cx="0" cy="0"/>
-        </a:xfrm>
-      </p:grpSpPr>
-      <p:pic>
-        <p:nvPicPr>
-          <p:cNvPr id="2" name="Image 0" descr="preencoded.png"/>
-          <p:cNvPicPr>
-            <a:picLocks noChangeAspect="1"/>
-          </p:cNvPicPr>
-          <p:nvPr/>
-        </p:nvPicPr>
-        <p:blipFill>
-          <a:blip r:embed="rId1"/>
-          <a:stretch>
-            <a:fillRect/>
-          </a:stretch>
-        </p:blipFill>
-        <p:spPr>
-          <a:xfrm>
-            <a:off x="0" y="0"/>
-            <a:ext cx="9144000" cy="1276350"/>
-          </a:xfrm>
-          <a:prstGeom prst="rect">
-            <a:avLst/>
-          </a:prstGeom>
-        </p:spPr>
-      </p:pic>
-      <p:sp>
-        <p:nvSpPr>
-          <p:cNvPr id="3" name="Text 0"/>
-          <p:cNvSpPr/>
-          <p:nvPr/>
-        </p:nvSpPr>
-        <p:spPr>
-          <a:xfrm>
-            <a:off x="962025" y="133350"/>
-            <a:ext cx="7806690" cy="552450"/>
-          </a:xfrm>
-          <a:prstGeom prst="rect">
-            <a:avLst/>
-          </a:prstGeom>
-          <a:noFill/>
-        </p:spPr>
-        <p:txBody>
-          <a:bodyPr wrap="square" rtlCol="0" anchor="ctr"/>
-          <a:lstStyle/>
-          <a:p>
-            <a:pPr marL="0" indent="0" algn="l">
-              <a:buNone/>
-            </a:pPr>
-            <a:r>
-              <a:rPr lang="zh-CN" altLang="en-US" sz="2660" b="1" dirty="0">
-                <a:solidFill>
-                  <a:srgbClr val="1C3C5F"/>
-                </a:solidFill>
-                <a:latin typeface="微软雅黑" pitchFamily="34" charset="0"/>
-                <a:ea typeface="微软雅黑" pitchFamily="34" charset="-122"/>
-                <a:cs typeface="微软雅黑" pitchFamily="34" charset="-120"/>
-              </a:rPr>
-              <a:t>实验分析</a:t>
-            </a:r>
-            <a:endParaRPr lang="zh-CN" altLang="en-US" sz="2660" b="1" dirty="0">
-              <a:solidFill>
-                <a:srgbClr val="1C3C5F"/>
-              </a:solidFill>
-              <a:latin typeface="微软雅黑" pitchFamily="34" charset="0"/>
-              <a:ea typeface="微软雅黑" pitchFamily="34" charset="-122"/>
-              <a:cs typeface="微软雅黑" pitchFamily="34" charset="-120"/>
-            </a:endParaRPr>
-          </a:p>
-        </p:txBody>
-      </p:sp>
-      <p:sp>
-        <p:nvSpPr>
-          <p:cNvPr id="4" name="Text 1"/>
-          <p:cNvSpPr/>
-          <p:nvPr/>
-        </p:nvSpPr>
-        <p:spPr>
-          <a:xfrm>
-            <a:off x="904875" y="1062038"/>
-            <a:ext cx="7715250" cy="3452813"/>
-          </a:xfrm>
-          <a:prstGeom prst="rect">
-            <a:avLst/>
-          </a:prstGeom>
-          <a:noFill/>
-        </p:spPr>
-        <p:txBody>
-          <a:bodyPr wrap="square" rtlCol="0" anchor="t"/>
-          <a:lstStyle/>
-          <a:p>
-            <a:pPr marL="190500" indent="-190500" algn="l">
-              <a:lnSpc>
-                <a:spcPct val="150000"/>
-              </a:lnSpc>
-              <a:buSzPct val="100000"/>
-              <a:buChar char="•"/>
-            </a:pPr>
-            <a:r>
-              <a:rPr lang="zh-CN" altLang="en-US" b="1" dirty="0">
-                <a:solidFill>
-                  <a:srgbClr val="383838"/>
-                </a:solidFill>
-                <a:latin typeface="微软雅黑" pitchFamily="34" charset="0"/>
-                <a:ea typeface="微软雅黑" pitchFamily="34" charset="-122"/>
-                <a:cs typeface="微软雅黑" pitchFamily="34" charset="-120"/>
-              </a:rPr>
-              <a:t>系统调用功能性测试</a:t>
-            </a:r>
-            <a:endParaRPr lang="zh-CN" altLang="en-US" b="1" dirty="0">
-              <a:solidFill>
-                <a:srgbClr val="383838"/>
-              </a:solidFill>
-              <a:latin typeface="微软雅黑" pitchFamily="34" charset="0"/>
-              <a:ea typeface="微软雅黑" pitchFamily="34" charset="-122"/>
-              <a:cs typeface="微软雅黑" pitchFamily="34" charset="-120"/>
-            </a:endParaRPr>
-          </a:p>
-          <a:p>
-            <a:pPr marL="190500" indent="-190500" algn="l">
-              <a:lnSpc>
-                <a:spcPct val="150000"/>
-              </a:lnSpc>
-              <a:buSzPct val="100000"/>
-              <a:buChar char="•"/>
-            </a:pPr>
-            <a:endParaRPr lang="zh-CN" altLang="en-US" b="1" dirty="0">
-              <a:solidFill>
-                <a:srgbClr val="383838"/>
-              </a:solidFill>
-              <a:latin typeface="微软雅黑" pitchFamily="34" charset="0"/>
-              <a:ea typeface="微软雅黑" pitchFamily="34" charset="-122"/>
-              <a:cs typeface="微软雅黑" pitchFamily="34" charset="-120"/>
-            </a:endParaRPr>
-          </a:p>
-          <a:p>
-            <a:pPr marL="190500" indent="-190500" algn="l">
-              <a:lnSpc>
-                <a:spcPct val="150000"/>
-              </a:lnSpc>
-              <a:buSzPct val="100000"/>
-              <a:buChar char="•"/>
-            </a:pPr>
-            <a:endParaRPr lang="en-US" b="1" dirty="0">
-              <a:solidFill>
-                <a:srgbClr val="383838"/>
-              </a:solidFill>
-              <a:latin typeface="微软雅黑" pitchFamily="34" charset="0"/>
-              <a:ea typeface="微软雅黑" pitchFamily="34" charset="-122"/>
-              <a:cs typeface="微软雅黑" pitchFamily="34" charset="-120"/>
-            </a:endParaRPr>
-          </a:p>
-          <a:p>
-            <a:pPr marL="190500" indent="-190500" algn="l">
-              <a:lnSpc>
-                <a:spcPct val="150000"/>
-              </a:lnSpc>
-              <a:buSzPct val="100000"/>
-              <a:buChar char="•"/>
-            </a:pPr>
-            <a:r>
-              <a:rPr lang="zh-CN" altLang="en-US" b="1" dirty="0">
-                <a:solidFill>
-                  <a:srgbClr val="383838"/>
-                </a:solidFill>
-                <a:latin typeface="微软雅黑" pitchFamily="34" charset="0"/>
-                <a:ea typeface="微软雅黑" pitchFamily="34" charset="-122"/>
-                <a:cs typeface="微软雅黑" pitchFamily="34" charset="-120"/>
-              </a:rPr>
-              <a:t>可靠性测试</a:t>
-            </a:r>
-            <a:endParaRPr lang="zh-CN" altLang="en-US" b="1" dirty="0">
-              <a:solidFill>
-                <a:srgbClr val="383838"/>
-              </a:solidFill>
-              <a:latin typeface="微软雅黑" pitchFamily="34" charset="0"/>
-              <a:ea typeface="微软雅黑" pitchFamily="34" charset="-122"/>
-              <a:cs typeface="微软雅黑" pitchFamily="34" charset="-120"/>
-            </a:endParaRPr>
-          </a:p>
-        </p:txBody>
-      </p:sp>
     </p:spTree>
   </p:cSld>
   <p:clrMapOvr>
@@ -8783,1087 +7958,6 @@
           </a:p>
         </p:txBody>
       </p:sp>
-    </p:spTree>
-  </p:cSld>
-  <p:clrMapOvr>
-    <a:masterClrMapping/>
-  </p:clrMapOvr>
-</p:sld>
-</file>
-
-<file path=ppt/slides/slide30.xml><?xml version="1.0" encoding="utf-8"?>
-<p:sld xmlns:a="http://schemas.openxmlformats.org/drawingml/2006/main" xmlns:r="http://schemas.openxmlformats.org/officeDocument/2006/relationships" xmlns:p="http://schemas.openxmlformats.org/presentationml/2006/main">
-  <p:cSld>
-    <p:spTree>
-      <p:nvGrpSpPr>
-        <p:cNvPr id="1" name=""/>
-        <p:cNvGrpSpPr/>
-        <p:nvPr/>
-      </p:nvGrpSpPr>
-      <p:grpSpPr>
-        <a:xfrm>
-          <a:off x="0" y="0"/>
-          <a:ext cx="0" cy="0"/>
-          <a:chOff x="0" y="0"/>
-          <a:chExt cx="0" cy="0"/>
-        </a:xfrm>
-      </p:grpSpPr>
-      <p:pic>
-        <p:nvPicPr>
-          <p:cNvPr id="2" name="Image 0" descr="preencoded.png"/>
-          <p:cNvPicPr>
-            <a:picLocks noChangeAspect="1"/>
-          </p:cNvPicPr>
-          <p:nvPr/>
-        </p:nvPicPr>
-        <p:blipFill>
-          <a:blip r:embed="rId1"/>
-          <a:stretch>
-            <a:fillRect/>
-          </a:stretch>
-        </p:blipFill>
-        <p:spPr>
-          <a:xfrm>
-            <a:off x="0" y="0"/>
-            <a:ext cx="9144000" cy="1276350"/>
-          </a:xfrm>
-          <a:prstGeom prst="rect">
-            <a:avLst/>
-          </a:prstGeom>
-        </p:spPr>
-      </p:pic>
-      <p:sp>
-        <p:nvSpPr>
-          <p:cNvPr id="3" name="Text 0"/>
-          <p:cNvSpPr/>
-          <p:nvPr/>
-        </p:nvSpPr>
-        <p:spPr>
-          <a:xfrm>
-            <a:off x="962025" y="133350"/>
-            <a:ext cx="7806690" cy="552450"/>
-          </a:xfrm>
-          <a:prstGeom prst="rect">
-            <a:avLst/>
-          </a:prstGeom>
-          <a:noFill/>
-        </p:spPr>
-        <p:txBody>
-          <a:bodyPr wrap="square" rtlCol="0" anchor="ctr"/>
-          <a:lstStyle/>
-          <a:p>
-            <a:pPr marL="0" indent="0" algn="l">
-              <a:buNone/>
-            </a:pPr>
-            <a:r>
-              <a:rPr lang="en-US" sz="2660" b="1" dirty="0">
-                <a:solidFill>
-                  <a:srgbClr val="1C3C5F"/>
-                </a:solidFill>
-                <a:latin typeface="微软雅黑" pitchFamily="34" charset="0"/>
-                <a:ea typeface="微软雅黑" pitchFamily="34" charset="-122"/>
-                <a:cs typeface="微软雅黑" pitchFamily="34" charset="-120"/>
-              </a:rPr>
-              <a:t>系统调用功能性测试</a:t>
-            </a:r>
-            <a:endParaRPr lang="en-US" sz="2660" dirty="0"/>
-          </a:p>
-        </p:txBody>
-      </p:sp>
-      <p:sp>
-        <p:nvSpPr>
-          <p:cNvPr id="4" name="Text 1"/>
-          <p:cNvSpPr/>
-          <p:nvPr/>
-        </p:nvSpPr>
-        <p:spPr>
-          <a:xfrm>
-            <a:off x="191135" y="1062355"/>
-            <a:ext cx="2266315" cy="3453130"/>
-          </a:xfrm>
-          <a:prstGeom prst="rect">
-            <a:avLst/>
-          </a:prstGeom>
-          <a:noFill/>
-        </p:spPr>
-        <p:txBody>
-          <a:bodyPr wrap="square" rtlCol="0" anchor="t"/>
-          <a:lstStyle/>
-          <a:p>
-            <a:pPr marL="190500" indent="-190500" algn="l">
-              <a:lnSpc>
-                <a:spcPct val="150000"/>
-              </a:lnSpc>
-              <a:buSzPct val="100000"/>
-              <a:buChar char="•"/>
-            </a:pPr>
-            <a:r>
-              <a:rPr lang="en-US" sz="1680" b="1" dirty="0">
-                <a:solidFill>
-                  <a:srgbClr val="383838"/>
-                </a:solidFill>
-                <a:latin typeface="微软雅黑" pitchFamily="34" charset="0"/>
-                <a:ea typeface="微软雅黑" pitchFamily="34" charset="-122"/>
-                <a:cs typeface="微软雅黑" pitchFamily="34" charset="-120"/>
-              </a:rPr>
-              <a:t>手写Rust no_std环境应用程序</a:t>
-            </a:r>
-            <a:endParaRPr lang="en-US" sz="1680" b="1" dirty="0">
-              <a:solidFill>
-                <a:srgbClr val="383838"/>
-              </a:solidFill>
-              <a:latin typeface="微软雅黑" pitchFamily="34" charset="0"/>
-              <a:ea typeface="微软雅黑" pitchFamily="34" charset="-122"/>
-              <a:cs typeface="微软雅黑" pitchFamily="34" charset="-120"/>
-            </a:endParaRPr>
-          </a:p>
-          <a:p>
-            <a:pPr marL="190500" indent="-190500" algn="l">
-              <a:lnSpc>
-                <a:spcPct val="150000"/>
-              </a:lnSpc>
-              <a:buSzPct val="100000"/>
-              <a:buChar char="•"/>
-            </a:pPr>
-            <a:endParaRPr lang="en-US" sz="1680" b="1" dirty="0">
-              <a:solidFill>
-                <a:srgbClr val="383838"/>
-              </a:solidFill>
-              <a:latin typeface="微软雅黑" pitchFamily="34" charset="0"/>
-              <a:ea typeface="微软雅黑" pitchFamily="34" charset="-122"/>
-              <a:cs typeface="微软雅黑" pitchFamily="34" charset="-120"/>
-            </a:endParaRPr>
-          </a:p>
-          <a:p>
-            <a:pPr marL="190500" indent="-190500" algn="l">
-              <a:lnSpc>
-                <a:spcPct val="150000"/>
-              </a:lnSpc>
-              <a:buSzPct val="100000"/>
-              <a:buChar char="•"/>
-            </a:pPr>
-            <a:endParaRPr lang="en-US" sz="1680" b="1" dirty="0"/>
-          </a:p>
-          <a:p>
-            <a:pPr marL="190500" indent="-190500" algn="l">
-              <a:lnSpc>
-                <a:spcPct val="150000"/>
-              </a:lnSpc>
-              <a:buSzPct val="100000"/>
-              <a:buChar char="•"/>
-            </a:pPr>
-            <a:r>
-              <a:rPr lang="en-US" sz="1680" b="1" dirty="0">
-                <a:solidFill>
-                  <a:srgbClr val="383838"/>
-                </a:solidFill>
-                <a:latin typeface="微软雅黑" pitchFamily="34" charset="0"/>
-                <a:ea typeface="微软雅黑" pitchFamily="34" charset="-122"/>
-                <a:cs typeface="微软雅黑" pitchFamily="34" charset="-120"/>
-              </a:rPr>
-              <a:t>正在完成对musl-libc的支持</a:t>
-            </a:r>
-            <a:endParaRPr lang="en-US" sz="1680" b="1" dirty="0"/>
-          </a:p>
-        </p:txBody>
-      </p:sp>
-      <p:pic>
-        <p:nvPicPr>
-          <p:cNvPr id="5" name="Image 1" descr="preencoded.png"/>
-          <p:cNvPicPr>
-            <a:picLocks noChangeAspect="1"/>
-          </p:cNvPicPr>
-          <p:nvPr/>
-        </p:nvPicPr>
-        <p:blipFill>
-          <a:blip r:embed="rId2"/>
-          <a:stretch>
-            <a:fillRect/>
-          </a:stretch>
-        </p:blipFill>
-        <p:spPr>
-          <a:xfrm>
-            <a:off x="2847975" y="564515"/>
-            <a:ext cx="5755640" cy="4518025"/>
-          </a:xfrm>
-          <a:prstGeom prst="rect">
-            <a:avLst/>
-          </a:prstGeom>
-          <a:effectLst>
-            <a:outerShdw blurRad="50800" dist="1270" dir="60000" algn="bl" rotWithShape="0">
-              <a:srgbClr val="000000">
-                <a:alpha val="12000"/>
-              </a:srgbClr>
-            </a:outerShdw>
-          </a:effectLst>
-        </p:spPr>
-      </p:pic>
-    </p:spTree>
-  </p:cSld>
-  <p:clrMapOvr>
-    <a:masterClrMapping/>
-  </p:clrMapOvr>
-</p:sld>
-</file>
-
-<file path=ppt/slides/slide31.xml><?xml version="1.0" encoding="utf-8"?>
-<p:sld xmlns:a="http://schemas.openxmlformats.org/drawingml/2006/main" xmlns:r="http://schemas.openxmlformats.org/officeDocument/2006/relationships" xmlns:p="http://schemas.openxmlformats.org/presentationml/2006/main">
-  <p:cSld>
-    <p:spTree>
-      <p:nvGrpSpPr>
-        <p:cNvPr id="1" name=""/>
-        <p:cNvGrpSpPr/>
-        <p:nvPr/>
-      </p:nvGrpSpPr>
-      <p:grpSpPr>
-        <a:xfrm>
-          <a:off x="0" y="0"/>
-          <a:ext cx="0" cy="0"/>
-          <a:chOff x="0" y="0"/>
-          <a:chExt cx="0" cy="0"/>
-        </a:xfrm>
-      </p:grpSpPr>
-      <p:pic>
-        <p:nvPicPr>
-          <p:cNvPr id="2" name="Image 0" descr="preencoded.png"/>
-          <p:cNvPicPr>
-            <a:picLocks noChangeAspect="1"/>
-          </p:cNvPicPr>
-          <p:nvPr/>
-        </p:nvPicPr>
-        <p:blipFill>
-          <a:blip r:embed="rId1"/>
-          <a:stretch>
-            <a:fillRect/>
-          </a:stretch>
-        </p:blipFill>
-        <p:spPr>
-          <a:xfrm>
-            <a:off x="0" y="0"/>
-            <a:ext cx="9144000" cy="1276350"/>
-          </a:xfrm>
-          <a:prstGeom prst="rect">
-            <a:avLst/>
-          </a:prstGeom>
-        </p:spPr>
-      </p:pic>
-      <p:sp>
-        <p:nvSpPr>
-          <p:cNvPr id="3" name="Text 0"/>
-          <p:cNvSpPr/>
-          <p:nvPr/>
-        </p:nvSpPr>
-        <p:spPr>
-          <a:xfrm>
-            <a:off x="962025" y="133350"/>
-            <a:ext cx="7806690" cy="552450"/>
-          </a:xfrm>
-          <a:prstGeom prst="rect">
-            <a:avLst/>
-          </a:prstGeom>
-          <a:noFill/>
-        </p:spPr>
-        <p:txBody>
-          <a:bodyPr wrap="square" rtlCol="0" anchor="ctr"/>
-          <a:lstStyle/>
-          <a:p>
-            <a:pPr marL="0" indent="0" algn="l">
-              <a:buNone/>
-            </a:pPr>
-            <a:r>
-              <a:rPr lang="en-US" sz="2660" b="1" dirty="0">
-                <a:solidFill>
-                  <a:srgbClr val="1C3C5F"/>
-                </a:solidFill>
-                <a:latin typeface="微软雅黑" pitchFamily="34" charset="0"/>
-                <a:ea typeface="微软雅黑" pitchFamily="34" charset="-122"/>
-                <a:cs typeface="微软雅黑" pitchFamily="34" charset="-120"/>
-              </a:rPr>
-              <a:t>可靠性测试</a:t>
-            </a:r>
-            <a:endParaRPr lang="en-US" sz="2660" dirty="0"/>
-          </a:p>
-        </p:txBody>
-      </p:sp>
-      <p:sp>
-        <p:nvSpPr>
-          <p:cNvPr id="4" name="Text 1"/>
-          <p:cNvSpPr/>
-          <p:nvPr/>
-        </p:nvSpPr>
-        <p:spPr>
-          <a:xfrm>
-            <a:off x="440690" y="1038860"/>
-            <a:ext cx="3602355" cy="3453130"/>
-          </a:xfrm>
-          <a:prstGeom prst="rect">
-            <a:avLst/>
-          </a:prstGeom>
-          <a:noFill/>
-        </p:spPr>
-        <p:txBody>
-          <a:bodyPr wrap="square" rtlCol="0" anchor="t"/>
-          <a:lstStyle/>
-          <a:p>
-            <a:pPr marL="190500" indent="-190500" algn="l">
-              <a:lnSpc>
-                <a:spcPct val="150000"/>
-              </a:lnSpc>
-              <a:buSzPct val="100000"/>
-              <a:buChar char="•"/>
-            </a:pPr>
-            <a:r>
-              <a:rPr lang="en-US" sz="1680" b="1" dirty="0">
-                <a:solidFill>
-                  <a:srgbClr val="383838"/>
-                </a:solidFill>
-                <a:latin typeface="微软雅黑" pitchFamily="34" charset="0"/>
-                <a:ea typeface="微软雅黑" pitchFamily="34" charset="-122"/>
-                <a:cs typeface="微软雅黑" pitchFamily="34" charset="-120"/>
-              </a:rPr>
-              <a:t>手动触发panic模拟低质量驱动程序内部发生的逻辑错误</a:t>
-            </a:r>
-            <a:endParaRPr lang="en-US" sz="1680" b="1" dirty="0">
-              <a:solidFill>
-                <a:srgbClr val="383838"/>
-              </a:solidFill>
-              <a:latin typeface="微软雅黑" pitchFamily="34" charset="0"/>
-              <a:ea typeface="微软雅黑" pitchFamily="34" charset="-122"/>
-              <a:cs typeface="微软雅黑" pitchFamily="34" charset="-120"/>
-            </a:endParaRPr>
-          </a:p>
-          <a:p>
-            <a:pPr marL="190500" indent="-190500" algn="l">
-              <a:lnSpc>
-                <a:spcPct val="150000"/>
-              </a:lnSpc>
-              <a:buSzPct val="100000"/>
-              <a:buChar char="•"/>
-            </a:pPr>
-            <a:endParaRPr lang="en-US" sz="1680" b="1" dirty="0">
-              <a:solidFill>
-                <a:srgbClr val="383838"/>
-              </a:solidFill>
-              <a:latin typeface="微软雅黑" pitchFamily="34" charset="0"/>
-              <a:ea typeface="微软雅黑" pitchFamily="34" charset="-122"/>
-              <a:cs typeface="微软雅黑" pitchFamily="34" charset="-120"/>
-            </a:endParaRPr>
-          </a:p>
-          <a:p>
-            <a:pPr marL="190500" indent="-190500" algn="l">
-              <a:lnSpc>
-                <a:spcPct val="150000"/>
-              </a:lnSpc>
-              <a:buSzPct val="100000"/>
-              <a:buChar char="•"/>
-            </a:pPr>
-            <a:r>
-              <a:rPr lang="zh-CN" altLang="en-US" sz="1680" b="1" dirty="0">
-                <a:solidFill>
-                  <a:srgbClr val="383838"/>
-                </a:solidFill>
-                <a:latin typeface="微软雅黑" pitchFamily="34" charset="0"/>
-                <a:ea typeface="微软雅黑" pitchFamily="34" charset="-122"/>
-                <a:cs typeface="微软雅黑" pitchFamily="34" charset="-120"/>
-              </a:rPr>
-              <a:t>测试内核服务线程崩溃后是否能够重启并恢复内核执行控制流。</a:t>
-            </a:r>
-            <a:endParaRPr lang="en-US" sz="1680" b="1" dirty="0"/>
-          </a:p>
-          <a:p>
-            <a:pPr marL="190500" indent="-190500" algn="l">
-              <a:lnSpc>
-                <a:spcPct val="150000"/>
-              </a:lnSpc>
-              <a:buSzPct val="100000"/>
-              <a:buChar char="•"/>
-            </a:pPr>
-            <a:endParaRPr lang="en-US" sz="1680" b="1" dirty="0"/>
-          </a:p>
-        </p:txBody>
-      </p:sp>
-      <p:pic>
-        <p:nvPicPr>
-          <p:cNvPr id="5" name="Image 1" descr="preencoded.png"/>
-          <p:cNvPicPr>
-            <a:picLocks noChangeAspect="1"/>
-          </p:cNvPicPr>
-          <p:nvPr/>
-        </p:nvPicPr>
-        <p:blipFill>
-          <a:blip r:embed="rId2"/>
-          <a:stretch>
-            <a:fillRect/>
-          </a:stretch>
-        </p:blipFill>
-        <p:spPr>
-          <a:xfrm>
-            <a:off x="4364990" y="44450"/>
-            <a:ext cx="4274185" cy="5054600"/>
-          </a:xfrm>
-          <a:prstGeom prst="rect">
-            <a:avLst/>
-          </a:prstGeom>
-          <a:effectLst>
-            <a:outerShdw blurRad="50800" dist="1270" dir="60000" algn="bl" rotWithShape="0">
-              <a:srgbClr val="000000">
-                <a:alpha val="12000"/>
-              </a:srgbClr>
-            </a:outerShdw>
-          </a:effectLst>
-        </p:spPr>
-      </p:pic>
-    </p:spTree>
-  </p:cSld>
-  <p:clrMapOvr>
-    <a:masterClrMapping/>
-  </p:clrMapOvr>
-</p:sld>
-</file>
-
-<file path=ppt/slides/slide32.xml><?xml version="1.0" encoding="utf-8"?>
-<p:sld xmlns:a="http://schemas.openxmlformats.org/drawingml/2006/main" xmlns:r="http://schemas.openxmlformats.org/officeDocument/2006/relationships" xmlns:p="http://schemas.openxmlformats.org/presentationml/2006/main">
-  <p:cSld>
-    <p:spTree>
-      <p:nvGrpSpPr>
-        <p:cNvPr id="1" name=""/>
-        <p:cNvGrpSpPr/>
-        <p:nvPr/>
-      </p:nvGrpSpPr>
-      <p:grpSpPr>
-        <a:xfrm>
-          <a:off x="0" y="0"/>
-          <a:ext cx="0" cy="0"/>
-          <a:chOff x="0" y="0"/>
-          <a:chExt cx="0" cy="0"/>
-        </a:xfrm>
-      </p:grpSpPr>
-      <p:sp>
-        <p:nvSpPr>
-          <p:cNvPr id="2" name="Text 0"/>
-          <p:cNvSpPr/>
-          <p:nvPr/>
-        </p:nvSpPr>
-        <p:spPr>
-          <a:xfrm>
-            <a:off x="509588" y="1952625"/>
-            <a:ext cx="1452563" cy="1243013"/>
-          </a:xfrm>
-          <a:prstGeom prst="rect">
-            <a:avLst/>
-          </a:prstGeom>
-          <a:noFill/>
-        </p:spPr>
-        <p:txBody>
-          <a:bodyPr wrap="square" rtlCol="0" anchor="ctr"/>
-          <a:lstStyle/>
-          <a:p>
-            <a:pPr marL="0" indent="0" algn="ctr">
-              <a:buNone/>
-            </a:pPr>
-            <a:r>
-              <a:rPr lang="en-US" sz="5760" b="1" dirty="0">
-                <a:solidFill>
-                  <a:srgbClr val="FFFFFF"/>
-                </a:solidFill>
-                <a:latin typeface="微软雅黑" pitchFamily="34" charset="0"/>
-                <a:ea typeface="微软雅黑" pitchFamily="34" charset="-122"/>
-                <a:cs typeface="微软雅黑" pitchFamily="34" charset="-120"/>
-              </a:rPr>
-              <a:t>04</a:t>
-            </a:r>
-            <a:endParaRPr lang="en-US" sz="5760" dirty="0"/>
-          </a:p>
-        </p:txBody>
-      </p:sp>
-      <p:sp>
-        <p:nvSpPr>
-          <p:cNvPr id="3" name="Text 1"/>
-          <p:cNvSpPr/>
-          <p:nvPr/>
-        </p:nvSpPr>
-        <p:spPr>
-          <a:xfrm>
-            <a:off x="3267075" y="2128838"/>
-            <a:ext cx="5101590" cy="1647825"/>
-          </a:xfrm>
-          <a:prstGeom prst="rect">
-            <a:avLst/>
-          </a:prstGeom>
-          <a:noFill/>
-        </p:spPr>
-        <p:txBody>
-          <a:bodyPr wrap="square" rtlCol="0" anchor="t"/>
-          <a:lstStyle/>
-          <a:p>
-            <a:pPr marL="0" indent="0" algn="l">
-              <a:buNone/>
-            </a:pPr>
-            <a:r>
-              <a:rPr lang="en-US" sz="3500" b="1" dirty="0">
-                <a:solidFill>
-                  <a:srgbClr val="1C3C5F"/>
-                </a:solidFill>
-                <a:latin typeface="微软雅黑" pitchFamily="34" charset="0"/>
-                <a:ea typeface="微软雅黑" pitchFamily="34" charset="-122"/>
-                <a:cs typeface="微软雅黑" pitchFamily="34" charset="-120"/>
-              </a:rPr>
-              <a:t>总结展望</a:t>
-            </a:r>
-            <a:endParaRPr lang="en-US" sz="3500" dirty="0"/>
-          </a:p>
-        </p:txBody>
-      </p:sp>
-    </p:spTree>
-  </p:cSld>
-  <p:clrMapOvr>
-    <a:masterClrMapping/>
-  </p:clrMapOvr>
-</p:sld>
-</file>
-
-<file path=ppt/slides/slide33.xml><?xml version="1.0" encoding="utf-8"?>
-<p:sld xmlns:a="http://schemas.openxmlformats.org/drawingml/2006/main" xmlns:r="http://schemas.openxmlformats.org/officeDocument/2006/relationships" xmlns:p="http://schemas.openxmlformats.org/presentationml/2006/main">
-  <p:cSld>
-    <p:spTree>
-      <p:nvGrpSpPr>
-        <p:cNvPr id="1" name=""/>
-        <p:cNvGrpSpPr/>
-        <p:nvPr/>
-      </p:nvGrpSpPr>
-      <p:grpSpPr>
-        <a:xfrm>
-          <a:off x="0" y="0"/>
-          <a:ext cx="0" cy="0"/>
-          <a:chOff x="0" y="0"/>
-          <a:chExt cx="0" cy="0"/>
-        </a:xfrm>
-      </p:grpSpPr>
-      <p:pic>
-        <p:nvPicPr>
-          <p:cNvPr id="2" name="Image 0" descr="preencoded.png"/>
-          <p:cNvPicPr>
-            <a:picLocks noChangeAspect="1"/>
-          </p:cNvPicPr>
-          <p:nvPr/>
-        </p:nvPicPr>
-        <p:blipFill>
-          <a:blip r:embed="rId1">
-            <a:extLst>
-              <a:ext uri="{96DAC541-7B7A-43D3-8B79-37D633B846F1}">
-                <asvg:svgBlip xmlns:asvg="http://schemas.microsoft.com/office/drawing/2016/SVG/main" r:embed="rId2"/>
-              </a:ext>
-            </a:extLst>
-          </a:blip>
-          <a:stretch>
-            <a:fillRect/>
-          </a:stretch>
-        </p:blipFill>
-        <p:spPr>
-          <a:xfrm>
-            <a:off x="0" y="0"/>
-            <a:ext cx="9144000" cy="5143500"/>
-          </a:xfrm>
-          <a:prstGeom prst="rect">
-            <a:avLst/>
-          </a:prstGeom>
-        </p:spPr>
-      </p:pic>
-      <p:sp>
-        <p:nvSpPr>
-          <p:cNvPr id="3" name="Text 0"/>
-          <p:cNvSpPr/>
-          <p:nvPr/>
-        </p:nvSpPr>
-        <p:spPr>
-          <a:xfrm>
-            <a:off x="623887" y="319087"/>
-            <a:ext cx="7891462" cy="528638"/>
-          </a:xfrm>
-          <a:prstGeom prst="rect">
-            <a:avLst/>
-          </a:prstGeom>
-          <a:noFill/>
-        </p:spPr>
-        <p:txBody>
-          <a:bodyPr wrap="square" rtlCol="0" anchor="t"/>
-          <a:lstStyle/>
-          <a:p>
-            <a:pPr marL="0" indent="0" algn="l">
-              <a:lnSpc>
-                <a:spcPct val="150000"/>
-              </a:lnSpc>
-              <a:buNone/>
-            </a:pPr>
-            <a:r>
-              <a:rPr lang="en-US" sz="2590" b="1" dirty="0">
-                <a:solidFill>
-                  <a:srgbClr val="383838"/>
-                </a:solidFill>
-                <a:latin typeface="微软雅黑" pitchFamily="34" charset="0"/>
-                <a:ea typeface="微软雅黑" pitchFamily="34" charset="-122"/>
-                <a:cs typeface="微软雅黑" pitchFamily="34" charset="-120"/>
-              </a:rPr>
-              <a:t>总结展望</a:t>
-            </a:r>
-            <a:endParaRPr lang="en-US" sz="2590" dirty="0"/>
-          </a:p>
-        </p:txBody>
-      </p:sp>
-      <p:pic>
-        <p:nvPicPr>
-          <p:cNvPr id="4" name="Image 1" descr="preencoded.png"/>
-          <p:cNvPicPr>
-            <a:picLocks noChangeAspect="1"/>
-          </p:cNvPicPr>
-          <p:nvPr/>
-        </p:nvPicPr>
-        <p:blipFill>
-          <a:blip r:embed="rId3">
-            <a:extLst>
-              <a:ext uri="{96DAC541-7B7A-43D3-8B79-37D633B846F1}">
-                <asvg:svgBlip xmlns:asvg="http://schemas.microsoft.com/office/drawing/2016/SVG/main" r:embed="rId4"/>
-              </a:ext>
-            </a:extLst>
-          </a:blip>
-          <a:stretch>
-            <a:fillRect/>
-          </a:stretch>
-        </p:blipFill>
-        <p:spPr>
-          <a:xfrm>
-            <a:off x="471488" y="1357313"/>
-            <a:ext cx="7110413" cy="833438"/>
-          </a:xfrm>
-          <a:prstGeom prst="rect">
-            <a:avLst/>
-          </a:prstGeom>
-        </p:spPr>
-      </p:pic>
-      <p:sp>
-        <p:nvSpPr>
-          <p:cNvPr id="5" name="Text 1"/>
-          <p:cNvSpPr/>
-          <p:nvPr/>
-        </p:nvSpPr>
-        <p:spPr>
-          <a:xfrm>
-            <a:off x="1461770" y="1376680"/>
-            <a:ext cx="6119495" cy="714375"/>
-          </a:xfrm>
-          <a:prstGeom prst="rect">
-            <a:avLst/>
-          </a:prstGeom>
-          <a:noFill/>
-        </p:spPr>
-        <p:txBody>
-          <a:bodyPr wrap="square" rtlCol="0" anchor="t"/>
-          <a:lstStyle/>
-          <a:p>
-            <a:pPr marL="0" indent="0" algn="l">
-              <a:lnSpc>
-                <a:spcPct val="150000"/>
-              </a:lnSpc>
-              <a:buNone/>
-            </a:pPr>
-            <a:r>
-              <a:rPr lang="en-US" sz="1200" b="1" dirty="0">
-                <a:solidFill>
-                  <a:srgbClr val="FFFFFF"/>
-                </a:solidFill>
-                <a:latin typeface="微软雅黑" pitchFamily="34" charset="0"/>
-                <a:ea typeface="微软雅黑" pitchFamily="34" charset="-122"/>
-                <a:cs typeface="微软雅黑" pitchFamily="34" charset="-120"/>
-              </a:rPr>
-              <a:t>本文基于Rust语言的内存安全特性实现了一个多</a:t>
-            </a:r>
-            <a:r>
-              <a:rPr lang="en-US" sz="1200" b="1" dirty="0">
-                <a:solidFill>
-                  <a:srgbClr val="FF0000"/>
-                </a:solidFill>
-                <a:latin typeface="微软雅黑" pitchFamily="34" charset="0"/>
-                <a:ea typeface="微软雅黑" pitchFamily="34" charset="-122"/>
-                <a:cs typeface="微软雅黑" pitchFamily="34" charset="-120"/>
-              </a:rPr>
-              <a:t>对多线程模型</a:t>
-            </a:r>
-            <a:r>
-              <a:rPr lang="en-US" sz="1200" b="1" dirty="0">
-                <a:solidFill>
-                  <a:srgbClr val="FFFFFF"/>
-                </a:solidFill>
-                <a:latin typeface="微软雅黑" pitchFamily="34" charset="0"/>
-                <a:ea typeface="微软雅黑" pitchFamily="34" charset="-122"/>
-                <a:cs typeface="微软雅黑" pitchFamily="34" charset="-120"/>
-              </a:rPr>
-              <a:t>的</a:t>
-            </a:r>
-            <a:r>
-              <a:rPr lang="en-US" sz="1200" b="1" dirty="0">
-                <a:solidFill>
-                  <a:srgbClr val="FF0000"/>
-                </a:solidFill>
-                <a:latin typeface="微软雅黑" pitchFamily="34" charset="0"/>
-                <a:ea typeface="微软雅黑" pitchFamily="34" charset="-122"/>
-                <a:cs typeface="微软雅黑" pitchFamily="34" charset="-120"/>
-              </a:rPr>
-              <a:t>混合内核</a:t>
-            </a:r>
-            <a:r>
-              <a:rPr lang="en-US" sz="1200" b="1" dirty="0">
-                <a:solidFill>
-                  <a:srgbClr val="FFFFFF"/>
-                </a:solidFill>
-                <a:latin typeface="微软雅黑" pitchFamily="34" charset="0"/>
-                <a:ea typeface="微软雅黑" pitchFamily="34" charset="-122"/>
-                <a:cs typeface="微软雅黑" pitchFamily="34" charset="-120"/>
-              </a:rPr>
-              <a:t>，并基于此实现了内核服务</a:t>
-            </a:r>
-            <a:r>
-              <a:rPr lang="en-US" sz="1200" b="1" dirty="0">
-                <a:solidFill>
-                  <a:srgbClr val="FF0000"/>
-                </a:solidFill>
-                <a:latin typeface="微软雅黑" pitchFamily="34" charset="0"/>
-                <a:ea typeface="微软雅黑" pitchFamily="34" charset="-122"/>
-                <a:cs typeface="微软雅黑" pitchFamily="34" charset="-120"/>
-              </a:rPr>
-              <a:t>可靠性增强</a:t>
-            </a:r>
-            <a:r>
-              <a:rPr lang="en-US" sz="1200" b="1" dirty="0">
-                <a:solidFill>
-                  <a:srgbClr val="FFFFFF"/>
-                </a:solidFill>
-                <a:latin typeface="微软雅黑" pitchFamily="34" charset="0"/>
-                <a:ea typeface="微软雅黑" pitchFamily="34" charset="-122"/>
-                <a:cs typeface="微软雅黑" pitchFamily="34" charset="-120"/>
-              </a:rPr>
-              <a:t>，并实现了一种简单的关键系统服务</a:t>
-            </a:r>
-            <a:r>
-              <a:rPr lang="en-US" sz="1200" b="1" dirty="0">
-                <a:solidFill>
-                  <a:srgbClr val="FF0000"/>
-                </a:solidFill>
-                <a:latin typeface="微软雅黑" pitchFamily="34" charset="0"/>
-                <a:ea typeface="微软雅黑" pitchFamily="34" charset="-122"/>
-                <a:cs typeface="微软雅黑" pitchFamily="34" charset="-120"/>
-              </a:rPr>
-              <a:t>故障恢复机制</a:t>
-            </a:r>
-            <a:r>
-              <a:rPr lang="en-US" sz="1200" b="1" dirty="0">
-                <a:solidFill>
-                  <a:srgbClr val="FFFFFF"/>
-                </a:solidFill>
-                <a:latin typeface="微软雅黑" pitchFamily="34" charset="0"/>
-                <a:ea typeface="微软雅黑" pitchFamily="34" charset="-122"/>
-                <a:cs typeface="微软雅黑" pitchFamily="34" charset="-120"/>
-              </a:rPr>
-              <a:t>。</a:t>
-            </a:r>
-            <a:endParaRPr lang="en-US" sz="1200" b="1" dirty="0">
-              <a:solidFill>
-                <a:srgbClr val="FFFFFF"/>
-              </a:solidFill>
-              <a:latin typeface="微软雅黑" pitchFamily="34" charset="0"/>
-              <a:ea typeface="微软雅黑" pitchFamily="34" charset="-122"/>
-              <a:cs typeface="微软雅黑" pitchFamily="34" charset="-120"/>
-            </a:endParaRPr>
-          </a:p>
-        </p:txBody>
-      </p:sp>
-      <p:pic>
-        <p:nvPicPr>
-          <p:cNvPr id="6" name="Image 2" descr="preencoded.png"/>
-          <p:cNvPicPr>
-            <a:picLocks noChangeAspect="1"/>
-          </p:cNvPicPr>
-          <p:nvPr/>
-        </p:nvPicPr>
-        <p:blipFill>
-          <a:blip r:embed="rId3">
-            <a:extLst>
-              <a:ext uri="{96DAC541-7B7A-43D3-8B79-37D633B846F1}">
-                <asvg:svgBlip xmlns:asvg="http://schemas.microsoft.com/office/drawing/2016/SVG/main" r:embed="rId4"/>
-              </a:ext>
-            </a:extLst>
-          </a:blip>
-          <a:stretch>
-            <a:fillRect/>
-          </a:stretch>
-        </p:blipFill>
-        <p:spPr>
-          <a:xfrm>
-            <a:off x="814388" y="2495550"/>
-            <a:ext cx="7110413" cy="833438"/>
-          </a:xfrm>
-          <a:prstGeom prst="rect">
-            <a:avLst/>
-          </a:prstGeom>
-        </p:spPr>
-      </p:pic>
-      <p:sp>
-        <p:nvSpPr>
-          <p:cNvPr id="7" name="Text 2"/>
-          <p:cNvSpPr/>
-          <p:nvPr/>
-        </p:nvSpPr>
-        <p:spPr>
-          <a:xfrm>
-            <a:off x="1737995" y="2538730"/>
-            <a:ext cx="6119495" cy="647700"/>
-          </a:xfrm>
-          <a:prstGeom prst="rect">
-            <a:avLst/>
-          </a:prstGeom>
-          <a:noFill/>
-        </p:spPr>
-        <p:txBody>
-          <a:bodyPr wrap="square" rtlCol="0" anchor="t"/>
-          <a:lstStyle/>
-          <a:p>
-            <a:pPr marL="0" indent="0" algn="l">
-              <a:lnSpc>
-                <a:spcPct val="150000"/>
-              </a:lnSpc>
-              <a:buNone/>
-            </a:pPr>
-            <a:r>
-              <a:rPr lang="en-US" sz="1400" b="1" dirty="0">
-                <a:solidFill>
-                  <a:srgbClr val="FFFFFF"/>
-                </a:solidFill>
-                <a:latin typeface="微软雅黑" pitchFamily="34" charset="0"/>
-                <a:ea typeface="微软雅黑" pitchFamily="34" charset="-122"/>
-                <a:cs typeface="微软雅黑" pitchFamily="34" charset="-120"/>
-              </a:rPr>
-              <a:t>目前尙不支持C语言用户程序，未来应该使用原生Linux应用程序进行性能对比测试</a:t>
-            </a:r>
-            <a:endParaRPr lang="en-US" sz="1400" b="1" dirty="0">
-              <a:solidFill>
-                <a:srgbClr val="FFFFFF"/>
-              </a:solidFill>
-              <a:latin typeface="微软雅黑" pitchFamily="34" charset="0"/>
-              <a:ea typeface="微软雅黑" pitchFamily="34" charset="-122"/>
-              <a:cs typeface="微软雅黑" pitchFamily="34" charset="-120"/>
-            </a:endParaRPr>
-          </a:p>
-        </p:txBody>
-      </p:sp>
-      <p:pic>
-        <p:nvPicPr>
-          <p:cNvPr id="8" name="Image 3" descr="preencoded.png"/>
-          <p:cNvPicPr>
-            <a:picLocks noChangeAspect="1"/>
-          </p:cNvPicPr>
-          <p:nvPr/>
-        </p:nvPicPr>
-        <p:blipFill>
-          <a:blip r:embed="rId3">
-            <a:extLst>
-              <a:ext uri="{96DAC541-7B7A-43D3-8B79-37D633B846F1}">
-                <asvg:svgBlip xmlns:asvg="http://schemas.microsoft.com/office/drawing/2016/SVG/main" r:embed="rId4"/>
-              </a:ext>
-            </a:extLst>
-          </a:blip>
-          <a:stretch>
-            <a:fillRect/>
-          </a:stretch>
-        </p:blipFill>
-        <p:spPr>
-          <a:xfrm>
-            <a:off x="471488" y="3633788"/>
-            <a:ext cx="7110413" cy="833438"/>
-          </a:xfrm>
-          <a:prstGeom prst="rect">
-            <a:avLst/>
-          </a:prstGeom>
-        </p:spPr>
-      </p:pic>
-      <p:sp>
-        <p:nvSpPr>
-          <p:cNvPr id="9" name="Text 3"/>
-          <p:cNvSpPr/>
-          <p:nvPr/>
-        </p:nvSpPr>
-        <p:spPr>
-          <a:xfrm>
-            <a:off x="1461770" y="3672205"/>
-            <a:ext cx="6113780" cy="647700"/>
-          </a:xfrm>
-          <a:prstGeom prst="rect">
-            <a:avLst/>
-          </a:prstGeom>
-          <a:noFill/>
-        </p:spPr>
-        <p:txBody>
-          <a:bodyPr wrap="square" rtlCol="0" anchor="t"/>
-          <a:lstStyle/>
-          <a:p>
-            <a:pPr marL="0" indent="0" algn="l">
-              <a:lnSpc>
-                <a:spcPct val="150000"/>
-              </a:lnSpc>
-              <a:buNone/>
-            </a:pPr>
-            <a:r>
-              <a:rPr lang="en-US" sz="1400" b="1" dirty="0">
-                <a:solidFill>
-                  <a:srgbClr val="FFFFFF"/>
-                </a:solidFill>
-                <a:latin typeface="微软雅黑" pitchFamily="34" charset="0"/>
-                <a:ea typeface="微软雅黑" pitchFamily="34" charset="-122"/>
-                <a:cs typeface="微软雅黑" pitchFamily="34" charset="-120"/>
-              </a:rPr>
-              <a:t>目前的故障恢复机制只依赖于Rust语言的panic捕捉，不能适应普遍情况。</a:t>
-            </a:r>
-            <a:endParaRPr lang="en-US" sz="1400" b="1" dirty="0">
-              <a:solidFill>
-                <a:srgbClr val="FFFFFF"/>
-              </a:solidFill>
-              <a:latin typeface="微软雅黑" pitchFamily="34" charset="0"/>
-              <a:ea typeface="微软雅黑" pitchFamily="34" charset="-122"/>
-              <a:cs typeface="微软雅黑" pitchFamily="34" charset="-120"/>
-            </a:endParaRPr>
-          </a:p>
-        </p:txBody>
-      </p:sp>
-    </p:spTree>
-  </p:cSld>
-  <p:clrMapOvr>
-    <a:masterClrMapping/>
-  </p:clrMapOvr>
-</p:sld>
-</file>
-
-<file path=ppt/slides/slide34.xml><?xml version="1.0" encoding="utf-8"?>
-<p:sld xmlns:a="http://schemas.openxmlformats.org/drawingml/2006/main" xmlns:r="http://schemas.openxmlformats.org/officeDocument/2006/relationships" xmlns:p="http://schemas.openxmlformats.org/presentationml/2006/main">
-  <p:cSld>
-    <p:spTree>
-      <p:nvGrpSpPr>
-        <p:cNvPr id="1" name=""/>
-        <p:cNvGrpSpPr/>
-        <p:nvPr/>
-      </p:nvGrpSpPr>
-      <p:grpSpPr>
-        <a:xfrm>
-          <a:off x="0" y="0"/>
-          <a:ext cx="0" cy="0"/>
-          <a:chOff x="0" y="0"/>
-          <a:chExt cx="0" cy="0"/>
-        </a:xfrm>
-      </p:grpSpPr>
-      <p:sp>
-        <p:nvSpPr>
-          <p:cNvPr id="2" name="Text 0"/>
-          <p:cNvSpPr/>
-          <p:nvPr/>
-        </p:nvSpPr>
-        <p:spPr>
-          <a:xfrm>
-            <a:off x="411480" y="1854835"/>
-            <a:ext cx="5386070" cy="552450"/>
-          </a:xfrm>
-          <a:prstGeom prst="rect">
-            <a:avLst/>
-          </a:prstGeom>
-          <a:noFill/>
-        </p:spPr>
-        <p:txBody>
-          <a:bodyPr wrap="square" rtlCol="0" anchor="ctr"/>
-          <a:lstStyle/>
-          <a:p>
-            <a:pPr marL="0" indent="0" algn="ctr">
-              <a:buNone/>
-            </a:pPr>
-            <a:r>
-              <a:rPr lang="zh-CN" altLang="en-US" sz="4000" b="1" dirty="0">
-                <a:solidFill>
-                  <a:srgbClr val="1C3C5F"/>
-                </a:solidFill>
-                <a:latin typeface="微软雅黑" pitchFamily="34" charset="0"/>
-                <a:ea typeface="微软雅黑" pitchFamily="34" charset="-122"/>
-                <a:cs typeface="微软雅黑" pitchFamily="34" charset="-120"/>
-              </a:rPr>
-              <a:t>欢迎各位老师批评指正</a:t>
-            </a:r>
-            <a:endParaRPr lang="zh-CN" altLang="en-US" sz="4000" b="1" dirty="0">
-              <a:solidFill>
-                <a:srgbClr val="1C3C5F"/>
-              </a:solidFill>
-              <a:latin typeface="微软雅黑" pitchFamily="34" charset="0"/>
-              <a:ea typeface="微软雅黑" pitchFamily="34" charset="-122"/>
-              <a:cs typeface="微软雅黑" pitchFamily="34" charset="-120"/>
-            </a:endParaRPr>
-          </a:p>
-        </p:txBody>
-      </p:sp>
-      <p:sp>
-        <p:nvSpPr>
-          <p:cNvPr id="3" name="Text 1"/>
-          <p:cNvSpPr/>
-          <p:nvPr/>
-        </p:nvSpPr>
-        <p:spPr>
-          <a:xfrm>
-            <a:off x="1176337" y="2276475"/>
-            <a:ext cx="3395663" cy="1033463"/>
-          </a:xfrm>
-          <a:prstGeom prst="rect">
-            <a:avLst/>
-          </a:prstGeom>
-          <a:noFill/>
-        </p:spPr>
-        <p:txBody>
-          <a:bodyPr wrap="square" rtlCol="0" anchor="ctr"/>
-          <a:lstStyle/>
-          <a:p>
-            <a:pPr marL="0" indent="0" algn="ctr">
-              <a:buNone/>
-            </a:pPr>
-            <a:r>
-              <a:rPr lang="en-US" sz="4800" b="1" dirty="0">
-                <a:solidFill>
-                  <a:srgbClr val="383838"/>
-                </a:solidFill>
-                <a:latin typeface="微软雅黑" pitchFamily="34" charset="0"/>
-                <a:ea typeface="微软雅黑" pitchFamily="34" charset="-122"/>
-                <a:cs typeface="微软雅黑" pitchFamily="34" charset="-120"/>
-              </a:rPr>
-              <a:t>THANKS</a:t>
-            </a:r>
-            <a:endParaRPr lang="en-US" sz="4800" dirty="0"/>
-          </a:p>
-        </p:txBody>
-      </p:sp>
-      <p:pic>
-        <p:nvPicPr>
-          <p:cNvPr id="5" name="图片 4" descr="中国人民解放军国防科技大学-logo"/>
-          <p:cNvPicPr>
-            <a:picLocks noChangeAspect="1"/>
-          </p:cNvPicPr>
-          <p:nvPr/>
-        </p:nvPicPr>
-        <p:blipFill>
-          <a:blip r:embed="rId1"/>
-          <a:stretch>
-            <a:fillRect/>
-          </a:stretch>
-        </p:blipFill>
-        <p:spPr>
-          <a:xfrm>
-            <a:off x="6528435" y="1740535"/>
-            <a:ext cx="1870710" cy="1875155"/>
-          </a:xfrm>
-          <a:prstGeom prst="rect">
-            <a:avLst/>
-          </a:prstGeom>
-        </p:spPr>
-      </p:pic>
     </p:spTree>
   </p:cSld>
   <p:clrMapOvr>
@@ -9994,7 +8088,7 @@
                 <a:ea typeface="微软雅黑" pitchFamily="34" charset="-122"/>
                 <a:cs typeface="微软雅黑" pitchFamily="34" charset="-120"/>
               </a:rPr>
-              <a:t>研究背景</a:t>
+              <a:t>项目背景</a:t>
             </a:r>
             <a:endParaRPr lang="en-US" dirty="0">
               <a:solidFill>
@@ -10017,7 +8111,7 @@
               <a:rPr lang="zh-CN" altLang="en-US" dirty="0">
                 <a:ea typeface="宋体" charset="0"/>
               </a:rPr>
-              <a:t>相关工作</a:t>
+              <a:t>项目设计目标</a:t>
             </a:r>
             <a:endParaRPr lang="zh-CN" altLang="en-US" dirty="0">
               <a:ea typeface="宋体" charset="0"/>
@@ -10035,25 +8129,7 @@
               <a:rPr lang="zh-CN" altLang="en-US" dirty="0">
                 <a:ea typeface="宋体" charset="0"/>
               </a:rPr>
-              <a:t>研究目的</a:t>
-            </a:r>
-            <a:endParaRPr lang="zh-CN" altLang="en-US" dirty="0">
-              <a:ea typeface="宋体" charset="0"/>
-            </a:endParaRPr>
-          </a:p>
-          <a:p>
-            <a:pPr marL="190500" indent="-190500" algn="l">
-              <a:lnSpc>
-                <a:spcPct val="150000"/>
-              </a:lnSpc>
-              <a:buSzPct val="100000"/>
-              <a:buChar char="•"/>
-            </a:pPr>
-            <a:r>
-              <a:rPr lang="zh-CN" altLang="en-US" dirty="0">
-                <a:ea typeface="宋体" charset="0"/>
-              </a:rPr>
-              <a:t>本文工作</a:t>
+              <a:t>本项目工作</a:t>
             </a:r>
             <a:endParaRPr lang="zh-CN" altLang="en-US" dirty="0">
               <a:ea typeface="宋体" charset="0"/>
@@ -10142,7 +8218,7 @@
                 <a:ea typeface="微软雅黑" pitchFamily="34" charset="-122"/>
                 <a:cs typeface="微软雅黑" pitchFamily="34" charset="-120"/>
               </a:rPr>
-              <a:t>研究背景</a:t>
+              <a:t>项目背景</a:t>
             </a:r>
             <a:endParaRPr lang="zh-CN" altLang="en-US" sz="2660" b="1" dirty="0">
               <a:solidFill>
@@ -10199,12 +8275,14 @@
               <a:buChar char="•"/>
             </a:pPr>
             <a:r>
-              <a:rPr lang="zh-CN" altLang="en-US" dirty="0">
+              <a:rPr lang="zh-CN" dirty="0">
                 <a:ea typeface="宋体" charset="0"/>
               </a:rPr>
-              <a:t>微内核架构</a:t>
-            </a:r>
-            <a:endParaRPr lang="en-US" dirty="0"/>
+              <a:t>主流内核架构</a:t>
+            </a:r>
+            <a:endParaRPr lang="zh-CN" dirty="0">
+              <a:ea typeface="宋体" charset="0"/>
+            </a:endParaRPr>
           </a:p>
           <a:p>
             <a:pPr marL="190500" lvl="0" indent="-190500" algn="l">
@@ -10215,16 +8293,12 @@
               <a:buChar char="•"/>
             </a:pPr>
             <a:r>
-              <a:rPr lang="en-US" dirty="0"/>
-              <a:t>Rust</a:t>
-            </a:r>
-            <a:r>
-              <a:rPr lang="zh-CN" altLang="en-US" dirty="0">
+              <a:rPr lang="zh-CN" dirty="0">
                 <a:ea typeface="宋体" charset="0"/>
               </a:rPr>
-              <a:t>内存安全语言</a:t>
-            </a:r>
-            <a:endParaRPr lang="zh-CN" altLang="en-US" dirty="0">
+              <a:t>线程模型</a:t>
+            </a:r>
+            <a:endParaRPr lang="zh-CN" dirty="0">
               <a:ea typeface="宋体" charset="0"/>
             </a:endParaRPr>
           </a:p>
@@ -10333,6 +8407,17 @@
               <a:buNone/>
             </a:pPr>
             <a:r>
+              <a:rPr lang="zh-CN" altLang="en-US" sz="2660" b="1" dirty="0">
+                <a:solidFill>
+                  <a:srgbClr val="1C3C5F"/>
+                </a:solidFill>
+                <a:latin typeface="微软雅黑" pitchFamily="34" charset="0"/>
+                <a:ea typeface="宋体" charset="0"/>
+                <a:cs typeface="微软雅黑" pitchFamily="34" charset="-120"/>
+              </a:rPr>
+              <a:t>项目</a:t>
+            </a:r>
+            <a:r>
               <a:rPr lang="en-US" sz="2660" b="1" dirty="0">
                 <a:solidFill>
                   <a:srgbClr val="1C3C5F"/>
@@ -10341,7 +8426,7 @@
                 <a:ea typeface="微软雅黑" pitchFamily="34" charset="-122"/>
                 <a:cs typeface="微软雅黑" pitchFamily="34" charset="-120"/>
               </a:rPr>
-              <a:t>研究背景</a:t>
+              <a:t>背景</a:t>
             </a:r>
             <a:r>
               <a:rPr lang="zh-CN" altLang="en-US" sz="2660" b="1" dirty="0">
@@ -10668,7 +8753,7 @@
               <a:buNone/>
             </a:pPr>
             <a:r>
-              <a:rPr lang="en-US" sz="2660" b="1" dirty="0">
+              <a:rPr lang="zh-CN" altLang="en-US" sz="2660" b="1" dirty="0">
                 <a:solidFill>
                   <a:srgbClr val="1C3C5F"/>
                 </a:solidFill>
@@ -10676,20 +8761,9 @@
                 <a:ea typeface="微软雅黑" pitchFamily="34" charset="-122"/>
                 <a:cs typeface="微软雅黑" pitchFamily="34" charset="-120"/>
               </a:rPr>
-              <a:t>研究背景</a:t>
-            </a:r>
-            <a:r>
-              <a:rPr lang="zh-CN" altLang="en-US" sz="2660" b="1" dirty="0">
-                <a:solidFill>
-                  <a:srgbClr val="1C3C5F"/>
-                </a:solidFill>
-                <a:latin typeface="微软雅黑" pitchFamily="34" charset="0"/>
-                <a:ea typeface="微软雅黑" pitchFamily="34" charset="-122"/>
-                <a:cs typeface="微软雅黑" pitchFamily="34" charset="-120"/>
-              </a:rPr>
-              <a:t>：微内核架构</a:t>
-            </a:r>
-            <a:endParaRPr lang="x-none" altLang="zh-CN" sz="2660" b="1" dirty="0">
+              <a:t>项目背景：主流内核架构</a:t>
+            </a:r>
+            <a:endParaRPr lang="zh-CN" altLang="en-US" sz="2660" b="1" dirty="0">
               <a:solidFill>
                 <a:srgbClr val="1C3C5F"/>
               </a:solidFill>
@@ -10702,14 +8776,14 @@
       </p:sp>
       <p:sp>
         <p:nvSpPr>
-          <p:cNvPr id="5" name="Text 1"/>
+          <p:cNvPr id="4" name="Text 1"/>
           <p:cNvSpPr/>
           <p:nvPr/>
         </p:nvSpPr>
         <p:spPr>
           <a:xfrm>
-            <a:off x="454660" y="597535"/>
-            <a:ext cx="8510905" cy="1374140"/>
+            <a:off x="904875" y="653415"/>
+            <a:ext cx="7715250" cy="4340860"/>
           </a:xfrm>
           <a:prstGeom prst="rect">
             <a:avLst/>
@@ -10720,152 +8794,185 @@
           <a:bodyPr wrap="square" rtlCol="0" anchor="t"/>
           <a:lstStyle/>
           <a:p>
-            <a:pPr marL="285750" indent="-285750" algn="l">
+            <a:pPr marL="190500" lvl="0" indent="-190500" algn="l">
               <a:lnSpc>
                 <a:spcPct val="150000"/>
               </a:lnSpc>
-              <a:buFont typeface="Wingdings" panose="05000000000000000000" charset="0"/>
-              <a:buChar char=""/>
-            </a:pPr>
-            <a:r>
-              <a:rPr sz="1600" dirty="0">
-                <a:latin typeface="微软雅黑" pitchFamily="34" charset="0"/>
-                <a:ea typeface="微软雅黑" pitchFamily="34" charset="-122"/>
-                <a:cs typeface="微软雅黑" pitchFamily="34" charset="-120"/>
-              </a:rPr>
-              <a:t>具备</a:t>
-            </a:r>
-            <a:r>
-              <a:rPr sz="1600" dirty="0">
+              <a:buSzPct val="100000"/>
+              <a:buChar char="•"/>
+            </a:pPr>
+            <a:endParaRPr lang="zh-CN" altLang="en-US" b="1" dirty="0">
+              <a:ea typeface="宋体" charset="0"/>
+            </a:endParaRPr>
+          </a:p>
+        </p:txBody>
+      </p:sp>
+      <p:sp>
+        <p:nvSpPr>
+          <p:cNvPr id="5" name="文本框 4"/>
+          <p:cNvSpPr txBox="1"/>
+          <p:nvPr/>
+        </p:nvSpPr>
+        <p:spPr>
+          <a:xfrm>
+            <a:off x="579755" y="824865"/>
+            <a:ext cx="8035290" cy="1537335"/>
+          </a:xfrm>
+          <a:prstGeom prst="rect">
+            <a:avLst/>
+          </a:prstGeom>
+          <a:noFill/>
+        </p:spPr>
+        <p:txBody>
+          <a:bodyPr wrap="square" rtlCol="0">
+            <a:noAutofit/>
+          </a:bodyPr>
+          <a:p>
+            <a:pPr marL="285750" indent="-285750">
+              <a:buFont typeface="Arial" panose="020B0604020202020204" pitchFamily="34" charset="0"/>
+              <a:buChar char="•"/>
+            </a:pPr>
+            <a:r>
+              <a:rPr lang="zh-CN" altLang="en-US" sz="1600"/>
+              <a:t>宏内核：所有内核服务全部集成在内核态，</a:t>
+            </a:r>
+            <a:r>
+              <a:rPr lang="zh-CN" altLang="en-US" sz="1600">
                 <a:solidFill>
                   <a:srgbClr val="FF0000"/>
                 </a:solidFill>
-                <a:latin typeface="微软雅黑" pitchFamily="34" charset="0"/>
-                <a:ea typeface="微软雅黑" pitchFamily="34" charset="-122"/>
-                <a:cs typeface="微软雅黑" pitchFamily="34" charset="-120"/>
-              </a:rPr>
-              <a:t>良好的隔离性</a:t>
-            </a:r>
-            <a:r>
-              <a:rPr sz="1600" dirty="0">
-                <a:latin typeface="微软雅黑" pitchFamily="34" charset="0"/>
-                <a:ea typeface="微软雅黑" pitchFamily="34" charset="-122"/>
-                <a:cs typeface="微软雅黑" pitchFamily="34" charset="-120"/>
-              </a:rPr>
-              <a:t>，很大程度隔离内核错误的传播</a:t>
-            </a:r>
-            <a:endParaRPr sz="1600" dirty="0">
-              <a:latin typeface="微软雅黑" pitchFamily="34" charset="0"/>
-              <a:ea typeface="微软雅黑" pitchFamily="34" charset="-122"/>
-              <a:cs typeface="微软雅黑" pitchFamily="34" charset="-120"/>
-            </a:endParaRPr>
-          </a:p>
-          <a:p>
-            <a:pPr marL="285750" indent="-285750" algn="l">
-              <a:lnSpc>
-                <a:spcPct val="150000"/>
-              </a:lnSpc>
-              <a:buFont typeface="Wingdings" panose="05000000000000000000" charset="0"/>
-              <a:buChar char=""/>
-            </a:pPr>
-            <a:r>
-              <a:rPr sz="1600" dirty="0">
-                <a:latin typeface="微软雅黑" pitchFamily="34" charset="0"/>
-                <a:ea typeface="微软雅黑" pitchFamily="34" charset="-122"/>
-                <a:cs typeface="微软雅黑" pitchFamily="34" charset="-120"/>
-              </a:rPr>
-              <a:t>比宏内核</a:t>
-            </a:r>
-            <a:r>
-              <a:rPr sz="1600" dirty="0">
+              </a:rPr>
+              <a:t>性能好</a:t>
+            </a:r>
+            <a:r>
+              <a:rPr lang="zh-CN" altLang="en-US" sz="1600"/>
+              <a:t>，</a:t>
+            </a:r>
+            <a:r>
+              <a:rPr lang="zh-CN" altLang="en-US" sz="1600">
                 <a:solidFill>
                   <a:srgbClr val="FF0000"/>
                 </a:solidFill>
-                <a:latin typeface="微软雅黑" pitchFamily="34" charset="0"/>
-                <a:ea typeface="微软雅黑" pitchFamily="34" charset="-122"/>
-                <a:cs typeface="微软雅黑" pitchFamily="34" charset="-120"/>
-              </a:rPr>
-              <a:t>更高的可靠性</a:t>
-            </a:r>
-            <a:r>
-              <a:rPr sz="1600" dirty="0">
-                <a:latin typeface="微软雅黑" pitchFamily="34" charset="0"/>
-                <a:ea typeface="微软雅黑" pitchFamily="34" charset="-122"/>
-                <a:cs typeface="微软雅黑" pitchFamily="34" charset="-120"/>
-              </a:rPr>
+              </a:rPr>
+              <a:t>可靠性、可拓展性差</a:t>
+            </a:r>
+            <a:r>
+              <a:rPr lang="zh-CN" altLang="en-US" sz="1600"/>
               <a:t>。</a:t>
             </a:r>
-            <a:endParaRPr sz="1600" dirty="0">
-              <a:latin typeface="微软雅黑" pitchFamily="34" charset="0"/>
-              <a:ea typeface="微软雅黑" pitchFamily="34" charset="-122"/>
-              <a:cs typeface="微软雅黑" pitchFamily="34" charset="-120"/>
-            </a:endParaRPr>
-          </a:p>
-          <a:p>
-            <a:pPr marL="285750" indent="-285750" algn="l">
-              <a:lnSpc>
-                <a:spcPct val="150000"/>
-              </a:lnSpc>
-              <a:buFont typeface="Wingdings" panose="05000000000000000000" charset="0"/>
-              <a:buChar char=""/>
-            </a:pPr>
-            <a:r>
-              <a:rPr sz="1600" dirty="0">
-                <a:latin typeface="微软雅黑" pitchFamily="34" charset="0"/>
-                <a:ea typeface="微软雅黑" pitchFamily="34" charset="-122"/>
-                <a:cs typeface="微软雅黑" pitchFamily="34" charset="-120"/>
-              </a:rPr>
-              <a:t>通过</a:t>
-            </a:r>
-            <a:r>
-              <a:rPr sz="1600" dirty="0">
+            <a:endParaRPr lang="zh-CN" altLang="en-US" sz="1600"/>
+          </a:p>
+          <a:p>
+            <a:pPr marL="285750" indent="-285750">
+              <a:buFont typeface="Arial" panose="020B0604020202020204" pitchFamily="34" charset="0"/>
+              <a:buChar char="•"/>
+            </a:pPr>
+            <a:endParaRPr lang="zh-CN" altLang="en-US" sz="1600"/>
+          </a:p>
+          <a:p>
+            <a:pPr marL="285750" indent="-285750">
+              <a:buFont typeface="Arial" panose="020B0604020202020204" pitchFamily="34" charset="0"/>
+              <a:buChar char="•"/>
+            </a:pPr>
+            <a:r>
+              <a:rPr lang="zh-CN" altLang="en-US" sz="1600"/>
+              <a:t>微内核：核心服务在内核态，非核心服务用户态，</a:t>
+            </a:r>
+            <a:r>
+              <a:rPr lang="zh-CN" altLang="en-US" sz="1600">
                 <a:solidFill>
                   <a:srgbClr val="FF0000"/>
                 </a:solidFill>
-                <a:latin typeface="微软雅黑" pitchFamily="34" charset="0"/>
-                <a:ea typeface="微软雅黑" pitchFamily="34" charset="-122"/>
-                <a:cs typeface="微软雅黑" pitchFamily="34" charset="-120"/>
-              </a:rPr>
-              <a:t>进程间通信 (IPC) </a:t>
-            </a:r>
-            <a:r>
-              <a:rPr sz="1600" dirty="0">
-                <a:latin typeface="微软雅黑" pitchFamily="34" charset="0"/>
-                <a:ea typeface="微软雅黑" pitchFamily="34" charset="-122"/>
-                <a:cs typeface="微软雅黑" pitchFamily="34" charset="-120"/>
-              </a:rPr>
-              <a:t>交互，引入了</a:t>
-            </a:r>
-            <a:r>
-              <a:rPr sz="1600" dirty="0">
+              </a:rPr>
+              <a:t>可靠性强</a:t>
+            </a:r>
+            <a:r>
+              <a:rPr lang="zh-CN" altLang="en-US" sz="1600"/>
+              <a:t>，</a:t>
+            </a:r>
+            <a:r>
+              <a:rPr lang="zh-CN" altLang="en-US" sz="1600">
                 <a:solidFill>
                   <a:srgbClr val="FF0000"/>
                 </a:solidFill>
-                <a:latin typeface="微软雅黑" pitchFamily="34" charset="0"/>
-                <a:ea typeface="微软雅黑" pitchFamily="34" charset="-122"/>
-                <a:cs typeface="微软雅黑" pitchFamily="34" charset="-120"/>
-              </a:rPr>
-              <a:t>显著的性能开销</a:t>
-            </a:r>
-            <a:r>
-              <a:rPr lang="zh-CN" sz="1600" dirty="0">
-                <a:latin typeface="微软雅黑" pitchFamily="34" charset="0"/>
-                <a:ea typeface="微软雅黑" pitchFamily="34" charset="-122"/>
-                <a:cs typeface="微软雅黑" pitchFamily="34" charset="-120"/>
-              </a:rPr>
+              </a:rPr>
+              <a:t>性能较差</a:t>
+            </a:r>
+            <a:r>
+              <a:rPr lang="zh-CN" altLang="en-US" sz="1600"/>
               <a:t>。</a:t>
             </a:r>
-            <a:endParaRPr lang="zh-CN" sz="1600" dirty="0">
-              <a:latin typeface="微软雅黑" pitchFamily="34" charset="0"/>
-              <a:ea typeface="微软雅黑" pitchFamily="34" charset="-122"/>
-              <a:cs typeface="微软雅黑" pitchFamily="34" charset="-120"/>
-            </a:endParaRPr>
+            <a:endParaRPr lang="zh-CN" altLang="en-US" sz="1600"/>
+          </a:p>
+          <a:p>
+            <a:pPr indent="0">
+              <a:buFont typeface="Arial" panose="020B0604020202020204" pitchFamily="34" charset="0"/>
+              <a:buNone/>
+            </a:pPr>
+            <a:endParaRPr lang="zh-CN" altLang="en-US" sz="1600"/>
+          </a:p>
+          <a:p>
+            <a:pPr marL="285750" indent="-285750">
+              <a:buFont typeface="Arial" panose="020B0604020202020204" pitchFamily="34" charset="0"/>
+              <a:buChar char="•"/>
+            </a:pPr>
+            <a:r>
+              <a:rPr lang="zh-CN" altLang="en-US" sz="1600"/>
+              <a:t>混合内核：折中方案，非核心服务以</a:t>
+            </a:r>
+            <a:r>
+              <a:rPr lang="zh-CN" altLang="en-US" sz="1600">
+                <a:solidFill>
+                  <a:srgbClr val="FF0000"/>
+                </a:solidFill>
+              </a:rPr>
+              <a:t>独立内核线程</a:t>
+            </a:r>
+            <a:r>
+              <a:rPr lang="zh-CN" altLang="en-US" sz="1600"/>
+              <a:t>的方式运行在内核态，</a:t>
+            </a:r>
+            <a:r>
+              <a:rPr lang="zh-CN" altLang="en-US" sz="1600">
+                <a:solidFill>
+                  <a:srgbClr val="FF0000"/>
+                </a:solidFill>
+              </a:rPr>
+              <a:t>避免</a:t>
+            </a:r>
+            <a:r>
+              <a:rPr lang="en-US" altLang="zh-CN" sz="1600">
+                <a:solidFill>
+                  <a:srgbClr val="FF0000"/>
+                </a:solidFill>
+              </a:rPr>
+              <a:t>IPC</a:t>
+            </a:r>
+            <a:r>
+              <a:rPr lang="zh-CN" altLang="en-US" sz="1600">
+                <a:solidFill>
+                  <a:srgbClr val="FF0000"/>
+                </a:solidFill>
+                <a:ea typeface="宋体" charset="0"/>
+              </a:rPr>
+              <a:t>开销</a:t>
+            </a:r>
+            <a:r>
+              <a:rPr lang="zh-CN" altLang="en-US" sz="1600">
+                <a:ea typeface="宋体" charset="0"/>
+              </a:rPr>
+              <a:t>。</a:t>
+            </a:r>
+            <a:endParaRPr lang="zh-CN" altLang="en-US" sz="1600"/>
+          </a:p>
+          <a:p>
+            <a:endParaRPr lang="zh-CN" altLang="en-US" sz="1600"/>
           </a:p>
         </p:txBody>
       </p:sp>
       <p:pic>
         <p:nvPicPr>
-          <p:cNvPr id="4" name="图片 3" descr="宏微核"/>
+          <p:cNvPr id="7" name="图片 6" descr="三种架构"/>
           <p:cNvPicPr>
             <a:picLocks noChangeAspect="1"/>
           </p:cNvPicPr>
@@ -10879,8 +8986,8 @@
         </p:blipFill>
         <p:spPr>
           <a:xfrm>
-            <a:off x="1386840" y="1845310"/>
-            <a:ext cx="6307455" cy="3052445"/>
+            <a:off x="1045845" y="2339340"/>
+            <a:ext cx="7400290" cy="2752090"/>
           </a:xfrm>
           <a:prstGeom prst="rect">
             <a:avLst/>
@@ -10938,259 +9045,7 @@
       </p:pic>
       <p:sp>
         <p:nvSpPr>
-          <p:cNvPr id="6" name="文本框 5"/>
-          <p:cNvSpPr txBox="1"/>
-          <p:nvPr/>
-        </p:nvSpPr>
-        <p:spPr>
-          <a:xfrm>
-            <a:off x="390525" y="1042670"/>
-            <a:ext cx="8455660" cy="3678555"/>
-          </a:xfrm>
-          <a:prstGeom prst="rect">
-            <a:avLst/>
-          </a:prstGeom>
-          <a:noFill/>
-        </p:spPr>
-        <p:txBody>
-          <a:bodyPr wrap="square" rtlCol="0" anchor="t">
-            <a:noAutofit/>
-          </a:bodyPr>
-          <a:p>
-            <a:pPr marL="285750" indent="-285750">
-              <a:buFont typeface="Wingdings" panose="05000000000000000000" charset="0"/>
-              <a:buChar char=""/>
-            </a:pPr>
-            <a:r>
-              <a:rPr lang="zh-CN" altLang="en-US"/>
-              <a:t>系统级语言，高效，</a:t>
-            </a:r>
-            <a:r>
-              <a:rPr lang="zh-CN" altLang="en-US">
-                <a:solidFill>
-                  <a:srgbClr val="FF0000"/>
-                </a:solidFill>
-              </a:rPr>
-              <a:t>性能接近</a:t>
-            </a:r>
-            <a:r>
-              <a:rPr lang="en-US" altLang="zh-CN">
-                <a:solidFill>
-                  <a:srgbClr val="FF0000"/>
-                </a:solidFill>
-              </a:rPr>
-              <a:t>C</a:t>
-            </a:r>
-            <a:r>
-              <a:rPr lang="zh-CN" altLang="en-US">
-                <a:solidFill>
-                  <a:srgbClr val="FF0000"/>
-                </a:solidFill>
-                <a:ea typeface="宋体" charset="0"/>
-              </a:rPr>
-              <a:t>语言</a:t>
-            </a:r>
-            <a:r>
-              <a:rPr lang="zh-CN" altLang="en-US">
-                <a:ea typeface="宋体" charset="0"/>
-              </a:rPr>
-              <a:t>。</a:t>
-            </a:r>
-            <a:endParaRPr lang="zh-CN" altLang="en-US"/>
-          </a:p>
-          <a:p>
-            <a:endParaRPr lang="zh-CN" altLang="en-US"/>
-          </a:p>
-          <a:p>
-            <a:endParaRPr lang="zh-CN" altLang="en-US"/>
-          </a:p>
-          <a:p>
-            <a:endParaRPr lang="zh-CN" altLang="en-US"/>
-          </a:p>
-          <a:p>
-            <a:pPr marL="285750" indent="-285750">
-              <a:buFont typeface="Wingdings" panose="05000000000000000000" charset="0"/>
-              <a:buChar char=""/>
-            </a:pPr>
-            <a:r>
-              <a:rPr lang="zh-CN" altLang="en-US"/>
-              <a:t>语言层面保证</a:t>
-            </a:r>
-            <a:r>
-              <a:rPr lang="zh-CN" altLang="en-US">
-                <a:solidFill>
-                  <a:srgbClr val="FF0000"/>
-                </a:solidFill>
-              </a:rPr>
-              <a:t>内存安全、并发安全。</a:t>
-            </a:r>
-            <a:endParaRPr lang="zh-CN" altLang="en-US">
-              <a:solidFill>
-                <a:srgbClr val="FF0000"/>
-              </a:solidFill>
-            </a:endParaRPr>
-          </a:p>
-          <a:p>
-            <a:pPr marL="285750" indent="-285750">
-              <a:buFont typeface="Wingdings" panose="05000000000000000000" charset="0"/>
-              <a:buChar char=""/>
-            </a:pPr>
-            <a:endParaRPr lang="zh-CN" altLang="en-US">
-              <a:solidFill>
-                <a:srgbClr val="FF0000"/>
-              </a:solidFill>
-            </a:endParaRPr>
-          </a:p>
-          <a:p>
-            <a:pPr marL="285750" indent="-285750">
-              <a:buFont typeface="Wingdings" panose="05000000000000000000" charset="0"/>
-              <a:buChar char=""/>
-            </a:pPr>
-            <a:endParaRPr lang="zh-CN" altLang="en-US">
-              <a:solidFill>
-                <a:srgbClr val="FF0000"/>
-              </a:solidFill>
-            </a:endParaRPr>
-          </a:p>
-          <a:p>
-            <a:pPr marL="285750" indent="-285750">
-              <a:buFont typeface="Wingdings" panose="05000000000000000000" charset="0"/>
-              <a:buChar char=""/>
-            </a:pPr>
-            <a:endParaRPr lang="zh-CN" altLang="en-US">
-              <a:solidFill>
-                <a:srgbClr val="FF0000"/>
-              </a:solidFill>
-            </a:endParaRPr>
-          </a:p>
-          <a:p>
-            <a:pPr marL="285750" indent="-285750">
-              <a:buFont typeface="Wingdings" panose="05000000000000000000" charset="0"/>
-              <a:buChar char=""/>
-            </a:pPr>
-            <a:r>
-              <a:rPr lang="zh-CN" altLang="en-US"/>
-              <a:t>良好的</a:t>
-            </a:r>
-            <a:r>
-              <a:rPr lang="zh-CN" altLang="en-US">
-                <a:solidFill>
-                  <a:srgbClr val="FF0000"/>
-                </a:solidFill>
-              </a:rPr>
-              <a:t>异步支持</a:t>
-            </a:r>
-            <a:r>
-              <a:rPr lang="zh-CN" altLang="en-US"/>
-              <a:t>（</a:t>
-            </a:r>
-            <a:r>
-              <a:rPr lang="en-US" altLang="zh-CN"/>
-              <a:t>async Rust</a:t>
-            </a:r>
-            <a:r>
-              <a:rPr lang="zh-CN" altLang="en-US"/>
-              <a:t>）。</a:t>
-            </a:r>
-            <a:endParaRPr lang="zh-CN" altLang="en-US"/>
-          </a:p>
-          <a:p>
-            <a:pPr marL="285750" indent="-285750">
-              <a:buFont typeface="Wingdings" panose="05000000000000000000" charset="0"/>
-              <a:buChar char=""/>
-            </a:pPr>
-            <a:endParaRPr lang="zh-CN" altLang="en-US"/>
-          </a:p>
-          <a:p>
-            <a:pPr marL="285750" indent="-285750">
-              <a:buFont typeface="Wingdings" panose="05000000000000000000" charset="0"/>
-              <a:buChar char=""/>
-            </a:pPr>
-            <a:endParaRPr lang="zh-CN" altLang="en-US"/>
-          </a:p>
-          <a:p>
-            <a:pPr marL="285750" indent="-285750">
-              <a:buFont typeface="Wingdings" panose="05000000000000000000" charset="0"/>
-              <a:buChar char=""/>
-            </a:pPr>
-            <a:endParaRPr lang="zh-CN" altLang="en-US"/>
-          </a:p>
-          <a:p>
-            <a:pPr marL="285750" indent="-285750">
-              <a:buFont typeface="Wingdings" panose="05000000000000000000" charset="0"/>
-              <a:buChar char=""/>
-            </a:pPr>
-            <a:r>
-              <a:rPr lang="zh-CN" altLang="en-US"/>
-              <a:t>表达能力强，且有</a:t>
-            </a:r>
-            <a:r>
-              <a:rPr lang="zh-CN" altLang="en-US">
-                <a:solidFill>
-                  <a:srgbClr val="FF0000"/>
-                </a:solidFill>
-              </a:rPr>
-              <a:t>丰富的第三方库</a:t>
-            </a:r>
-            <a:r>
-              <a:rPr lang="zh-CN" altLang="en-US"/>
-              <a:t>。</a:t>
-            </a:r>
-            <a:endParaRPr lang="zh-CN" altLang="en-US"/>
-          </a:p>
-          <a:p>
-            <a:pPr marL="285750" indent="-285750">
-              <a:buFont typeface="Wingdings" panose="05000000000000000000" charset="0"/>
-              <a:buChar char=""/>
-            </a:pPr>
-            <a:endParaRPr lang="zh-CN" altLang="en-US"/>
-          </a:p>
-          <a:p>
-            <a:pPr marL="285750" indent="-285750">
-              <a:buFont typeface="Wingdings" panose="05000000000000000000" charset="0"/>
-              <a:buChar char=""/>
-            </a:pPr>
-            <a:endParaRPr lang="zh-CN" altLang="en-US"/>
-          </a:p>
-          <a:p>
-            <a:pPr marL="285750" indent="-285750">
-              <a:buFont typeface="Wingdings" panose="05000000000000000000" charset="0"/>
-              <a:buChar char=""/>
-            </a:pPr>
-            <a:endParaRPr lang="zh-CN" altLang="en-US"/>
-          </a:p>
-          <a:p>
-            <a:pPr marL="285750" indent="-285750">
-              <a:buFont typeface="Wingdings" panose="05000000000000000000" charset="0"/>
-              <a:buChar char=""/>
-            </a:pPr>
-            <a:endParaRPr lang="zh-CN" altLang="en-US"/>
-          </a:p>
-          <a:p>
-            <a:pPr marL="285750" indent="-285750">
-              <a:buFont typeface="Wingdings" panose="05000000000000000000" charset="0"/>
-              <a:buChar char=""/>
-            </a:pPr>
-            <a:endParaRPr lang="zh-CN" altLang="en-US"/>
-          </a:p>
-          <a:p>
-            <a:pPr marL="285750" indent="-285750">
-              <a:buFont typeface="Wingdings" panose="05000000000000000000" charset="0"/>
-              <a:buChar char=""/>
-            </a:pPr>
-            <a:endParaRPr lang="zh-CN" altLang="en-US"/>
-          </a:p>
-          <a:p>
-            <a:endParaRPr lang="zh-CN" altLang="en-US"/>
-          </a:p>
-          <a:p>
-            <a:endParaRPr lang="zh-CN" altLang="en-US"/>
-          </a:p>
-        </p:txBody>
-      </p:sp>
-      <p:sp>
-        <p:nvSpPr>
-          <p:cNvPr id="7" name="Text 0"/>
+          <p:cNvPr id="3" name="Text 0"/>
           <p:cNvSpPr/>
           <p:nvPr/>
         </p:nvSpPr>
@@ -11206,12 +9061,13 @@
         </p:spPr>
         <p:txBody>
           <a:bodyPr wrap="square" rtlCol="0" anchor="ctr"/>
+          <a:lstStyle/>
           <a:p>
             <a:pPr marL="0" indent="0" algn="l">
               <a:buNone/>
             </a:pPr>
             <a:r>
-              <a:rPr lang="en-US" sz="2660" b="1" dirty="0">
+              <a:rPr lang="zh-CN" altLang="x-none" sz="2660" b="1" dirty="0">
                 <a:solidFill>
                   <a:srgbClr val="1C3C5F"/>
                 </a:solidFill>
@@ -11219,48 +9075,174 @@
                 <a:ea typeface="微软雅黑" pitchFamily="34" charset="-122"/>
                 <a:cs typeface="微软雅黑" pitchFamily="34" charset="-120"/>
               </a:rPr>
-              <a:t>研究背景</a:t>
-            </a:r>
-            <a:r>
-              <a:rPr lang="zh-CN" altLang="en-US" sz="2660" b="1" dirty="0">
-                <a:solidFill>
-                  <a:srgbClr val="1C3C5F"/>
-                </a:solidFill>
-                <a:latin typeface="微软雅黑" pitchFamily="34" charset="0"/>
-                <a:ea typeface="微软雅黑" pitchFamily="34" charset="-122"/>
-                <a:cs typeface="微软雅黑" pitchFamily="34" charset="-120"/>
-              </a:rPr>
-              <a:t>：</a:t>
-            </a:r>
-            <a:r>
-              <a:rPr lang="en-US" altLang="zh-CN" sz="2660" b="1" dirty="0">
-                <a:solidFill>
-                  <a:srgbClr val="1C3C5F"/>
-                </a:solidFill>
-                <a:latin typeface="微软雅黑" pitchFamily="34" charset="0"/>
-                <a:ea typeface="微软雅黑" pitchFamily="34" charset="-122"/>
-                <a:cs typeface="微软雅黑" pitchFamily="34" charset="-120"/>
-              </a:rPr>
-              <a:t>Rust</a:t>
-            </a:r>
-            <a:r>
-              <a:rPr lang="zh-CN" altLang="en-US" sz="2660" b="1" dirty="0">
-                <a:solidFill>
-                  <a:srgbClr val="1C3C5F"/>
-                </a:solidFill>
-                <a:latin typeface="微软雅黑" pitchFamily="34" charset="0"/>
-                <a:ea typeface="微软雅黑" pitchFamily="34" charset="-122"/>
-                <a:cs typeface="微软雅黑" pitchFamily="34" charset="-120"/>
-              </a:rPr>
-              <a:t>内存安全语言</a:t>
-            </a:r>
-            <a:endParaRPr lang="zh-CN" altLang="en-US" sz="2660" b="1" dirty="0">
+              <a:t>项目背景：线程模型</a:t>
+            </a:r>
+            <a:endParaRPr lang="zh-CN" altLang="x-none" sz="2660" b="1" dirty="0">
               <a:solidFill>
                 <a:srgbClr val="1C3C5F"/>
               </a:solidFill>
               <a:latin typeface="微软雅黑" pitchFamily="34" charset="0"/>
               <a:ea typeface="微软雅黑" pitchFamily="34" charset="-122"/>
               <a:cs typeface="微软雅黑" pitchFamily="34" charset="-120"/>
+            </a:endParaRPr>
+          </a:p>
+        </p:txBody>
+      </p:sp>
+      <p:sp>
+        <p:nvSpPr>
+          <p:cNvPr id="5" name="Text 1"/>
+          <p:cNvSpPr/>
+          <p:nvPr/>
+        </p:nvSpPr>
+        <p:spPr>
+          <a:xfrm>
+            <a:off x="1228725" y="1252538"/>
+            <a:ext cx="7062787" cy="3071813"/>
+          </a:xfrm>
+          <a:prstGeom prst="rect">
+            <a:avLst/>
+          </a:prstGeom>
+          <a:noFill/>
+        </p:spPr>
+        <p:txBody>
+          <a:bodyPr wrap="square" rtlCol="0" anchor="ctr"/>
+          <a:lstStyle/>
+          <a:p>
+            <a:pPr marL="0" indent="0" algn="l">
+              <a:lnSpc>
+                <a:spcPct val="150000"/>
+              </a:lnSpc>
+              <a:buNone/>
+            </a:pPr>
+            <a:endParaRPr lang="en-US" b="1" dirty="0"/>
+          </a:p>
+        </p:txBody>
+      </p:sp>
+      <p:pic>
+        <p:nvPicPr>
+          <p:cNvPr id="6" name="图片 5" descr="121threadmodel"/>
+          <p:cNvPicPr>
+            <a:picLocks noChangeAspect="1"/>
+          </p:cNvPicPr>
+          <p:nvPr/>
+        </p:nvPicPr>
+        <p:blipFill>
+          <a:blip r:embed="rId2"/>
+          <a:stretch>
+            <a:fillRect/>
+          </a:stretch>
+        </p:blipFill>
+        <p:spPr>
+          <a:xfrm>
+            <a:off x="349250" y="2658110"/>
+            <a:ext cx="3609340" cy="2197735"/>
+          </a:xfrm>
+          <a:prstGeom prst="rect">
+            <a:avLst/>
+          </a:prstGeom>
+        </p:spPr>
+      </p:pic>
+      <p:pic>
+        <p:nvPicPr>
+          <p:cNvPr id="7" name="图片 6" descr="many2manythreadmodel"/>
+          <p:cNvPicPr>
+            <a:picLocks noChangeAspect="1"/>
+          </p:cNvPicPr>
+          <p:nvPr/>
+        </p:nvPicPr>
+        <p:blipFill>
+          <a:blip r:embed="rId3"/>
+          <a:stretch>
+            <a:fillRect/>
+          </a:stretch>
+        </p:blipFill>
+        <p:spPr>
+          <a:xfrm>
+            <a:off x="4983480" y="2658110"/>
+            <a:ext cx="3520440" cy="2138680"/>
+          </a:xfrm>
+          <a:prstGeom prst="rect">
+            <a:avLst/>
+          </a:prstGeom>
+        </p:spPr>
+      </p:pic>
+      <p:sp>
+        <p:nvSpPr>
+          <p:cNvPr id="8" name="文本框 7"/>
+          <p:cNvSpPr txBox="1"/>
+          <p:nvPr/>
+        </p:nvSpPr>
+        <p:spPr>
+          <a:xfrm>
+            <a:off x="258445" y="970280"/>
+            <a:ext cx="8509635" cy="1746885"/>
+          </a:xfrm>
+          <a:prstGeom prst="rect">
+            <a:avLst/>
+          </a:prstGeom>
+          <a:noFill/>
+        </p:spPr>
+        <p:txBody>
+          <a:bodyPr wrap="square" rtlCol="0">
+            <a:noAutofit/>
+          </a:bodyPr>
+          <a:p>
+            <a:r>
+              <a:rPr lang="zh-CN" altLang="en-US" sz="1600"/>
+              <a:t>一对一线程模型：一个用户线程配备一个内核线程（有独立内核栈），内核需要</a:t>
+            </a:r>
+            <a:r>
+              <a:rPr lang="zh-CN" altLang="en-US" sz="1600">
+                <a:solidFill>
+                  <a:srgbClr val="FF0000"/>
+                </a:solidFill>
+              </a:rPr>
+              <a:t>限制用户线程数量、内核线程数量多，上下文开销大。</a:t>
+            </a:r>
+            <a:endParaRPr lang="zh-CN" altLang="en-US" sz="1600"/>
+          </a:p>
+          <a:p>
+            <a:endParaRPr lang="en-US" altLang="zh-CN" sz="1600"/>
+          </a:p>
+          <a:p>
+            <a:r>
+              <a:rPr lang="zh-CN" altLang="en-US" sz="1600">
+                <a:ea typeface="宋体" charset="0"/>
+              </a:rPr>
+              <a:t>多对多线程模型：每个内核线程服务多个用户线程，</a:t>
+            </a:r>
+            <a:r>
+              <a:rPr lang="zh-CN" altLang="en-US" sz="1600">
+                <a:solidFill>
+                  <a:srgbClr val="FF0000"/>
+                </a:solidFill>
+                <a:ea typeface="宋体" charset="0"/>
+              </a:rPr>
+              <a:t>节省内存</a:t>
+            </a:r>
+            <a:r>
+              <a:rPr lang="zh-CN" altLang="en-US" sz="1600">
+                <a:ea typeface="宋体" charset="0"/>
+              </a:rPr>
+              <a:t>，</a:t>
+            </a:r>
+            <a:r>
+              <a:rPr lang="zh-CN" altLang="en-US" sz="1600">
+                <a:solidFill>
+                  <a:srgbClr val="FF0000"/>
+                </a:solidFill>
+                <a:ea typeface="宋体" charset="0"/>
+              </a:rPr>
+              <a:t>节省上下文切换开销</a:t>
+            </a:r>
+            <a:r>
+              <a:rPr lang="zh-CN" altLang="en-US" sz="1600">
+                <a:ea typeface="宋体" charset="0"/>
+              </a:rPr>
+              <a:t>。</a:t>
+            </a:r>
+            <a:endParaRPr lang="zh-CN" altLang="en-US" sz="1600">
+              <a:ea typeface="宋体" charset="0"/>
             </a:endParaRPr>
           </a:p>
         </p:txBody>
@@ -11336,7 +9318,7 @@
           </a:bodyPr>
           <a:p>
             <a:pPr marL="285750" indent="-285750">
-              <a:buFont typeface="Arial" panose="02080604020202020204" pitchFamily="34" charset="0"/>
+              <a:buFont typeface="Arial" panose="020B0604020202020204" pitchFamily="34" charset="0"/>
               <a:buChar char="•"/>
             </a:pPr>
             <a:r>
@@ -11347,14 +9329,14 @@
           </a:p>
           <a:p>
             <a:pPr marL="285750" indent="-285750">
-              <a:buFont typeface="Arial" panose="02080604020202020204" pitchFamily="34" charset="0"/>
+              <a:buFont typeface="Arial" panose="020B0604020202020204" pitchFamily="34" charset="0"/>
               <a:buChar char="•"/>
             </a:pPr>
             <a:endParaRPr lang="zh-CN" altLang="en-US"/>
           </a:p>
           <a:p>
             <a:pPr marL="742950" lvl="1" indent="-285750">
-              <a:buFont typeface="Arial" panose="02080604020202020204" pitchFamily="34" charset="0"/>
+              <a:buFont typeface="Arial" panose="020B0604020202020204" pitchFamily="34" charset="0"/>
               <a:buChar char="•"/>
             </a:pPr>
             <a:r>
@@ -11365,14 +9347,14 @@
           </a:p>
           <a:p>
             <a:pPr marL="742950" lvl="1" indent="-285750">
-              <a:buFont typeface="Arial" panose="02080604020202020204" pitchFamily="34" charset="0"/>
+              <a:buFont typeface="Arial" panose="020B0604020202020204" pitchFamily="34" charset="0"/>
               <a:buChar char="•"/>
             </a:pPr>
             <a:endParaRPr lang="zh-CN" altLang="en-US"/>
           </a:p>
           <a:p>
             <a:pPr marL="742950" lvl="1" indent="-285750">
-              <a:buFont typeface="Arial" panose="02080604020202020204" pitchFamily="34" charset="0"/>
+              <a:buFont typeface="Arial" panose="020B0604020202020204" pitchFamily="34" charset="0"/>
               <a:buChar char="•"/>
             </a:pPr>
             <a:r>
@@ -11415,7 +9397,7 @@
           </a:p>
           <a:p>
             <a:pPr marL="742950" lvl="1" indent="-285750">
-              <a:buFont typeface="Arial" panose="02080604020202020204" pitchFamily="34" charset="0"/>
+              <a:buFont typeface="Arial" panose="020B0604020202020204" pitchFamily="34" charset="0"/>
               <a:buChar char="•"/>
             </a:pPr>
             <a:endParaRPr lang="zh-CN" altLang="en-US">
@@ -11424,14 +9406,14 @@
           </a:p>
           <a:p>
             <a:pPr marL="742950" lvl="1" indent="-285750">
-              <a:buFont typeface="Arial" panose="02080604020202020204" pitchFamily="34" charset="0"/>
+              <a:buFont typeface="Arial" panose="020B0604020202020204" pitchFamily="34" charset="0"/>
               <a:buChar char="•"/>
             </a:pPr>
             <a:endParaRPr lang="zh-CN" altLang="en-US"/>
           </a:p>
           <a:p>
             <a:pPr marL="285750" indent="-285750">
-              <a:buFont typeface="Arial" panose="02080604020202020204" pitchFamily="34" charset="0"/>
+              <a:buFont typeface="Arial" panose="020B0604020202020204" pitchFamily="34" charset="0"/>
               <a:buChar char="•"/>
             </a:pPr>
             <a:r>
@@ -11442,14 +9424,14 @@
           </a:p>
           <a:p>
             <a:pPr marL="285750" indent="-285750">
-              <a:buFont typeface="Arial" panose="02080604020202020204" pitchFamily="34" charset="0"/>
+              <a:buFont typeface="Arial" panose="020B0604020202020204" pitchFamily="34" charset="0"/>
               <a:buChar char="•"/>
             </a:pPr>
             <a:endParaRPr lang="zh-CN" altLang="en-US"/>
           </a:p>
           <a:p>
             <a:pPr marL="742950" lvl="1" indent="-285750">
-              <a:buFont typeface="Arial" panose="02080604020202020204" pitchFamily="34" charset="0"/>
+              <a:buFont typeface="Arial" panose="020B0604020202020204" pitchFamily="34" charset="0"/>
               <a:buChar char="•"/>
             </a:pPr>
             <a:r>
@@ -11460,14 +9442,14 @@
           </a:p>
           <a:p>
             <a:pPr marL="742950" lvl="1" indent="-285750">
-              <a:buFont typeface="Arial" panose="02080604020202020204" pitchFamily="34" charset="0"/>
+              <a:buFont typeface="Arial" panose="020B0604020202020204" pitchFamily="34" charset="0"/>
               <a:buChar char="•"/>
             </a:pPr>
             <a:endParaRPr lang="zh-CN" altLang="en-US"/>
           </a:p>
           <a:p>
             <a:pPr marL="742950" lvl="1" indent="-285750">
-              <a:buFont typeface="Arial" panose="02080604020202020204" pitchFamily="34" charset="0"/>
+              <a:buFont typeface="Arial" panose="020B0604020202020204" pitchFamily="34" charset="0"/>
               <a:buChar char="•"/>
             </a:pPr>
             <a:r>
@@ -11527,6 +9509,17 @@
               <a:buNone/>
             </a:pPr>
             <a:r>
+              <a:rPr lang="zh-CN" altLang="en-US" sz="2660" b="1" dirty="0">
+                <a:solidFill>
+                  <a:srgbClr val="1C3C5F"/>
+                </a:solidFill>
+                <a:latin typeface="微软雅黑" pitchFamily="34" charset="0"/>
+                <a:ea typeface="宋体" charset="0"/>
+                <a:cs typeface="微软雅黑" pitchFamily="34" charset="-120"/>
+              </a:rPr>
+              <a:t>项目</a:t>
+            </a:r>
+            <a:r>
               <a:rPr lang="en-US" sz="2660" b="1" dirty="0">
                 <a:solidFill>
                   <a:srgbClr val="1C3C5F"/>
@@ -11535,7 +9528,7 @@
                 <a:ea typeface="微软雅黑" pitchFamily="34" charset="-122"/>
                 <a:cs typeface="微软雅黑" pitchFamily="34" charset="-120"/>
               </a:rPr>
-              <a:t>研究背景</a:t>
+              <a:t>背景</a:t>
             </a:r>
             <a:r>
               <a:rPr lang="zh-CN" altLang="en-US" sz="2660" b="1" dirty="0">
